--- a/cloudflare-deploy/public/library/branch/hq-kr.pptx
+++ b/cloudflare-deploy/public/library/branch/hq-kr.pptx
@@ -35,6 +35,8 @@
     <p:sldId id="283" r:id="rId34"/>
     <p:sldId id="284" r:id="rId35"/>
     <p:sldId id="285" r:id="rId36"/>
+    <p:sldId id="286" r:id="rId37"/>
+    <p:sldId id="287" r:id="rId38"/>
   </p:sldIdLst>
   <p:sldSz cx="12191695" cy="6858000" type="screen4x3"/>
   <p:notesSz cx="6858000" cy="9144000"/>
@@ -19961,7 +19963,7 @@
                 </a:solidFill>
                 <a:latin typeface="Malgun Gothic"/>
               </a:rPr>
-              <a:t>기능 요약 · 데이터</a:t>
+              <a:t>주요 기능 사용법</a:t>
             </a:r>
           </a:p>
         </p:txBody>
@@ -19974,8 +19976,8 @@
         </p:nvSpPr>
         <p:spPr>
           <a:xfrm>
-            <a:off x="365760" y="841248"/>
-            <a:ext cx="658368" cy="512064"/>
+            <a:off x="365760" y="822960"/>
+            <a:ext cx="868680" cy="868680"/>
           </a:xfrm>
           <a:prstGeom prst="roundRect">
             <a:avLst/>
@@ -20018,9 +20020,2149 @@
         </p:nvSpPr>
         <p:spPr>
           <a:xfrm>
+            <a:off x="365760" y="822960"/>
+            <a:ext cx="868680" cy="868680"/>
+          </a:xfrm>
+          <a:prstGeom prst="rect">
+            <a:avLst/>
+          </a:prstGeom>
+          <a:noFill/>
+        </p:spPr>
+        <p:txBody>
+          <a:bodyPr wrap="square" anchor="ctr">
+            <a:spAutoFit/>
+          </a:bodyPr>
+          <a:lstStyle/>
+          <a:p>
+            <a:pPr algn="ctr">
+              <a:lnSpc>
+                <a:spcPct val="100000"/>
+              </a:lnSpc>
+            </a:pPr>
+            <a:r>
+              <a:rPr sz="2600" b="1">
+                <a:solidFill>
+                  <a:srgbClr val="FFFFFF"/>
+                </a:solidFill>
+                <a:latin typeface="Malgun Gothic"/>
+              </a:rPr>
+              <a:t>22</a:t>
+            </a:r>
+          </a:p>
+        </p:txBody>
+      </p:sp>
+      <p:sp>
+        <p:nvSpPr>
+          <p:cNvPr id="8" name="TextBox 7"/>
+          <p:cNvSpPr txBox="1"/>
+          <p:nvPr/>
+        </p:nvSpPr>
+        <p:spPr>
+          <a:xfrm>
+            <a:off x="1371600" y="822960"/>
+            <a:ext cx="10424160" cy="502920"/>
+          </a:xfrm>
+          <a:prstGeom prst="rect">
+            <a:avLst/>
+          </a:prstGeom>
+          <a:noFill/>
+        </p:spPr>
+        <p:txBody>
+          <a:bodyPr wrap="square" anchor="t">
+            <a:spAutoFit/>
+          </a:bodyPr>
+          <a:lstStyle/>
+          <a:p>
+            <a:pPr algn="l">
+              <a:lnSpc>
+                <a:spcPct val="100000"/>
+              </a:lnSpc>
+            </a:pPr>
+            <a:r>
+              <a:rPr sz="2300" b="1">
+                <a:solidFill>
+                  <a:srgbClr val="1E2340"/>
+                </a:solidFill>
+                <a:latin typeface="Malgun Gothic"/>
+              </a:rPr>
+              <a:t>🗂️ 강사 통합 관리 개편 (명부 필터 · 그룹 · 상세 탭)</a:t>
+            </a:r>
+          </a:p>
+        </p:txBody>
+      </p:sp>
+      <p:sp>
+        <p:nvSpPr>
+          <p:cNvPr id="9" name="TextBox 8"/>
+          <p:cNvSpPr txBox="1"/>
+          <p:nvPr/>
+        </p:nvSpPr>
+        <p:spPr>
+          <a:xfrm>
+            <a:off x="1417320" y="1353312"/>
+            <a:ext cx="10424160" cy="320040"/>
+          </a:xfrm>
+          <a:prstGeom prst="rect">
+            <a:avLst/>
+          </a:prstGeom>
+          <a:noFill/>
+        </p:spPr>
+        <p:txBody>
+          <a:bodyPr wrap="square" anchor="t">
+            <a:spAutoFit/>
+          </a:bodyPr>
+          <a:lstStyle/>
+          <a:p>
+            <a:pPr algn="l">
+              <a:lnSpc>
+                <a:spcPct val="100000"/>
+              </a:lnSpc>
+            </a:pPr>
+            <a:r>
+              <a:rPr sz="1300" b="0">
+                <a:solidFill>
+                  <a:srgbClr val="64748B"/>
+                </a:solidFill>
+                <a:latin typeface="Malgun Gothic"/>
+              </a:rPr>
+              <a:t>찾기 쉬운 명부 · 한눈에 보는 상세</a:t>
+            </a:r>
+          </a:p>
+        </p:txBody>
+      </p:sp>
+      <p:sp>
+        <p:nvSpPr>
+          <p:cNvPr id="10" name="Rounded Rectangle 9"/>
+          <p:cNvSpPr/>
+          <p:nvPr/>
+        </p:nvSpPr>
+        <p:spPr>
+          <a:xfrm>
+            <a:off x="365760" y="1828800"/>
+            <a:ext cx="11430000" cy="777240"/>
+          </a:xfrm>
+          <a:prstGeom prst="roundRect">
+            <a:avLst/>
+          </a:prstGeom>
+          <a:solidFill>
+            <a:srgbClr val="ECFDF5"/>
+          </a:solidFill>
+          <a:ln>
+            <a:noFill/>
+          </a:ln>
+          <a:effectLst/>
+        </p:spPr>
+        <p:style>
+          <a:lnRef idx="1">
+            <a:schemeClr val="accent1"/>
+          </a:lnRef>
+          <a:fillRef idx="3">
+            <a:schemeClr val="accent1"/>
+          </a:fillRef>
+          <a:effectRef idx="2">
+            <a:schemeClr val="accent1"/>
+          </a:effectRef>
+          <a:fontRef idx="minor">
+            <a:schemeClr val="lt1"/>
+          </a:fontRef>
+        </p:style>
+        <p:txBody>
+          <a:bodyPr rtlCol="0" anchor="ctr"/>
+          <a:lstStyle/>
+          <a:p>
+            <a:pPr algn="ctr"/>
+          </a:p>
+        </p:txBody>
+      </p:sp>
+      <p:sp>
+        <p:nvSpPr>
+          <p:cNvPr id="11" name="TextBox 10"/>
+          <p:cNvSpPr txBox="1"/>
+          <p:nvPr/>
+        </p:nvSpPr>
+        <p:spPr>
+          <a:xfrm>
+            <a:off x="548640" y="1901952"/>
+            <a:ext cx="11064240" cy="640080"/>
+          </a:xfrm>
+          <a:prstGeom prst="rect">
+            <a:avLst/>
+          </a:prstGeom>
+          <a:noFill/>
+        </p:spPr>
+        <p:txBody>
+          <a:bodyPr wrap="square" anchor="t">
+            <a:spAutoFit/>
+          </a:bodyPr>
+          <a:lstStyle/>
+          <a:p>
+            <a:pPr algn="l">
+              <a:lnSpc>
+                <a:spcPct val="115000"/>
+              </a:lnSpc>
+            </a:pPr>
+            <a:r>
+              <a:rPr sz="1200" b="0">
+                <a:solidFill>
+                  <a:srgbClr val="334155"/>
+                </a:solidFill>
+                <a:latin typeface="Malgun Gothic"/>
+              </a:rPr>
+              <a:t>강사 관리 화면이 찾기 쉽고 보기 편하게 정리됐어요. 흩어져 있던 메뉴를 네 묶음으로 그룹지어 사이드바에 담았고, 강사 명부 위에는 구분·상태·그룹 드롭다운 필터와 적용된 필터 칩이 생겼어요. 강사를 누르면 프로필·급여·평가 탭으로 나뉜 상세 화면이 열리고, 매니저 배지와 재직 상태(재직·휴직·퇴사) 가 한눈에 표시돼요.</a:t>
+            </a:r>
+          </a:p>
+        </p:txBody>
+      </p:sp>
+      <p:sp>
+        <p:nvSpPr>
+          <p:cNvPr id="12" name="TextBox 11"/>
+          <p:cNvSpPr txBox="1"/>
+          <p:nvPr/>
+        </p:nvSpPr>
+        <p:spPr>
+          <a:xfrm>
+            <a:off x="457200" y="2743200"/>
+            <a:ext cx="5669280" cy="320040"/>
+          </a:xfrm>
+          <a:prstGeom prst="rect">
+            <a:avLst/>
+          </a:prstGeom>
+          <a:noFill/>
+        </p:spPr>
+        <p:txBody>
+          <a:bodyPr wrap="square" anchor="t">
+            <a:spAutoFit/>
+          </a:bodyPr>
+          <a:lstStyle/>
+          <a:p>
+            <a:pPr algn="l">
+              <a:lnSpc>
+                <a:spcPct val="100000"/>
+              </a:lnSpc>
+            </a:pPr>
+            <a:r>
+              <a:rPr sz="1350" b="1">
+                <a:solidFill>
+                  <a:srgbClr val="0D9488"/>
+                </a:solidFill>
+                <a:latin typeface="Malgun Gothic"/>
+              </a:rPr>
+              <a:t>사용 방법</a:t>
+            </a:r>
+          </a:p>
+        </p:txBody>
+      </p:sp>
+      <p:sp>
+        <p:nvSpPr>
+          <p:cNvPr id="13" name="TextBox 12"/>
+          <p:cNvSpPr txBox="1"/>
+          <p:nvPr/>
+        </p:nvSpPr>
+        <p:spPr>
+          <a:xfrm>
+            <a:off x="457200" y="3108960"/>
+            <a:ext cx="5669280" cy="2377440"/>
+          </a:xfrm>
+          <a:prstGeom prst="rect">
+            <a:avLst/>
+          </a:prstGeom>
+          <a:noFill/>
+        </p:spPr>
+        <p:txBody>
+          <a:bodyPr wrap="square">
+            <a:spAutoFit/>
+          </a:bodyPr>
+          <a:lstStyle/>
+          <a:p>
+            <a:pPr>
+              <a:lnSpc>
+                <a:spcPct val="115000"/>
+              </a:lnSpc>
+              <a:spcAft>
+                <a:spcPts val="600"/>
+              </a:spcAft>
+            </a:pPr>
+            <a:r>
+              <a:rPr sz="1050" b="1">
+                <a:solidFill>
+                  <a:srgbClr val="0D9488"/>
+                </a:solidFill>
+                <a:latin typeface="Malgun Gothic"/>
+              </a:rPr>
+              <a:t>● </a:t>
+            </a:r>
+            <a:r>
+              <a:rPr sz="1250">
+                <a:solidFill>
+                  <a:srgbClr val="334155"/>
+                </a:solidFill>
+                <a:latin typeface="Malgun Gothic"/>
+              </a:rPr>
+              <a:t>관리자 메뉴 강사 통합을 열어요(메뉴가 네 묶음으로 정리돼 있어요).</a:t>
+            </a:r>
+          </a:p>
+          <a:p>
+            <a:pPr>
+              <a:lnSpc>
+                <a:spcPct val="115000"/>
+              </a:lnSpc>
+              <a:spcAft>
+                <a:spcPts val="600"/>
+              </a:spcAft>
+            </a:pPr>
+            <a:r>
+              <a:rPr sz="1050" b="1">
+                <a:solidFill>
+                  <a:srgbClr val="0D9488"/>
+                </a:solidFill>
+                <a:latin typeface="Malgun Gothic"/>
+              </a:rPr>
+              <a:t>● </a:t>
+            </a:r>
+            <a:r>
+              <a:rPr sz="1250">
+                <a:solidFill>
+                  <a:srgbClr val="334155"/>
+                </a:solidFill>
+                <a:latin typeface="Malgun Gothic"/>
+              </a:rPr>
+              <a:t>명부 위 상태·그룹 드롭다운으로 원하는 강사만 걸러요.</a:t>
+            </a:r>
+          </a:p>
+          <a:p>
+            <a:pPr>
+              <a:lnSpc>
+                <a:spcPct val="115000"/>
+              </a:lnSpc>
+              <a:spcAft>
+                <a:spcPts val="600"/>
+              </a:spcAft>
+            </a:pPr>
+            <a:r>
+              <a:rPr sz="1050" b="1">
+                <a:solidFill>
+                  <a:srgbClr val="0D9488"/>
+                </a:solidFill>
+                <a:latin typeface="Malgun Gothic"/>
+              </a:rPr>
+              <a:t>● </a:t>
+            </a:r>
+            <a:r>
+              <a:rPr sz="1250">
+                <a:solidFill>
+                  <a:srgbClr val="334155"/>
+                </a:solidFill>
+                <a:latin typeface="Malgun Gothic"/>
+              </a:rPr>
+              <a:t>적용된 필터는 칩으로 표시되고, 칩을 지우면 해제돼요.</a:t>
+            </a:r>
+          </a:p>
+          <a:p>
+            <a:pPr>
+              <a:lnSpc>
+                <a:spcPct val="115000"/>
+              </a:lnSpc>
+              <a:spcAft>
+                <a:spcPts val="600"/>
+              </a:spcAft>
+            </a:pPr>
+            <a:r>
+              <a:rPr sz="1050" b="1">
+                <a:solidFill>
+                  <a:srgbClr val="0D9488"/>
+                </a:solidFill>
+                <a:latin typeface="Malgun Gothic"/>
+              </a:rPr>
+              <a:t>● </a:t>
+            </a:r>
+            <a:r>
+              <a:rPr sz="1250">
+                <a:solidFill>
+                  <a:srgbClr val="334155"/>
+                </a:solidFill>
+                <a:latin typeface="Malgun Gothic"/>
+              </a:rPr>
+              <a:t>강사를 누르면 프로필 / 급여 / 평가 탭 상세가 열려요.</a:t>
+            </a:r>
+          </a:p>
+          <a:p>
+            <a:pPr>
+              <a:lnSpc>
+                <a:spcPct val="115000"/>
+              </a:lnSpc>
+              <a:spcAft>
+                <a:spcPts val="600"/>
+              </a:spcAft>
+            </a:pPr>
+            <a:r>
+              <a:rPr sz="1050" b="1">
+                <a:solidFill>
+                  <a:srgbClr val="0D9488"/>
+                </a:solidFill>
+                <a:latin typeface="Malgun Gothic"/>
+              </a:rPr>
+              <a:t>● </a:t>
+            </a:r>
+            <a:r>
+              <a:rPr sz="1250">
+                <a:solidFill>
+                  <a:srgbClr val="334155"/>
+                </a:solidFill>
+                <a:latin typeface="Malgun Gothic"/>
+              </a:rPr>
+              <a:t>급여·평가 탭의 요약 숫자는 열 때 필요한 만큼만 불러옵니다.</a:t>
+            </a:r>
+          </a:p>
+        </p:txBody>
+      </p:sp>
+      <p:sp>
+        <p:nvSpPr>
+          <p:cNvPr id="14" name="Rounded Rectangle 13"/>
+          <p:cNvSpPr/>
+          <p:nvPr/>
+        </p:nvSpPr>
+        <p:spPr>
+          <a:xfrm>
+            <a:off x="457200" y="5166360"/>
+            <a:ext cx="5669280" cy="1627632"/>
+          </a:xfrm>
+          <a:prstGeom prst="roundRect">
+            <a:avLst/>
+          </a:prstGeom>
+          <a:solidFill>
+            <a:srgbClr val="F4F7FF"/>
+          </a:solidFill>
+          <a:ln w="12700">
+            <a:solidFill>
+              <a:srgbClr val="0D9488"/>
+            </a:solidFill>
+          </a:ln>
+          <a:effectLst/>
+        </p:spPr>
+        <p:style>
+          <a:lnRef idx="1">
+            <a:schemeClr val="accent1"/>
+          </a:lnRef>
+          <a:fillRef idx="3">
+            <a:schemeClr val="accent1"/>
+          </a:fillRef>
+          <a:effectRef idx="2">
+            <a:schemeClr val="accent1"/>
+          </a:effectRef>
+          <a:fontRef idx="minor">
+            <a:schemeClr val="lt1"/>
+          </a:fontRef>
+        </p:style>
+        <p:txBody>
+          <a:bodyPr rtlCol="0" anchor="ctr"/>
+          <a:lstStyle/>
+          <a:p>
+            <a:pPr algn="ctr"/>
+          </a:p>
+        </p:txBody>
+      </p:sp>
+      <p:sp>
+        <p:nvSpPr>
+          <p:cNvPr id="15" name="TextBox 14"/>
+          <p:cNvSpPr txBox="1"/>
+          <p:nvPr/>
+        </p:nvSpPr>
+        <p:spPr>
+          <a:xfrm>
+            <a:off x="594360" y="5221224"/>
+            <a:ext cx="5394960" cy="274320"/>
+          </a:xfrm>
+          <a:prstGeom prst="rect">
+            <a:avLst/>
+          </a:prstGeom>
+          <a:noFill/>
+        </p:spPr>
+        <p:txBody>
+          <a:bodyPr wrap="square" anchor="t">
+            <a:spAutoFit/>
+          </a:bodyPr>
+          <a:lstStyle/>
+          <a:p>
+            <a:pPr algn="l">
+              <a:lnSpc>
+                <a:spcPct val="100000"/>
+              </a:lnSpc>
+            </a:pPr>
+            <a:r>
+              <a:rPr sz="1150" b="1">
+                <a:solidFill>
+                  <a:srgbClr val="0D9488"/>
+                </a:solidFill>
+                <a:latin typeface="Malgun Gothic"/>
+              </a:rPr>
+              <a:t>✅ 핵심 포인트</a:t>
+            </a:r>
+          </a:p>
+        </p:txBody>
+      </p:sp>
+      <p:sp>
+        <p:nvSpPr>
+          <p:cNvPr id="16" name="TextBox 15"/>
+          <p:cNvSpPr txBox="1"/>
+          <p:nvPr/>
+        </p:nvSpPr>
+        <p:spPr>
+          <a:xfrm>
+            <a:off x="594360" y="5495544"/>
+            <a:ext cx="5394960" cy="1261872"/>
+          </a:xfrm>
+          <a:prstGeom prst="rect">
+            <a:avLst/>
+          </a:prstGeom>
+          <a:noFill/>
+        </p:spPr>
+        <p:txBody>
+          <a:bodyPr wrap="square">
+            <a:spAutoFit/>
+          </a:bodyPr>
+          <a:lstStyle/>
+          <a:p>
+            <a:pPr>
+              <a:lnSpc>
+                <a:spcPct val="115000"/>
+              </a:lnSpc>
+              <a:spcAft>
+                <a:spcPts val="200"/>
+              </a:spcAft>
+            </a:pPr>
+            <a:r>
+              <a:rPr sz="900" b="1">
+                <a:solidFill>
+                  <a:srgbClr val="0D9488"/>
+                </a:solidFill>
+                <a:latin typeface="Malgun Gothic"/>
+              </a:rPr>
+              <a:t>● </a:t>
+            </a:r>
+            <a:r>
+              <a:rPr sz="1100">
+                <a:solidFill>
+                  <a:srgbClr val="334155"/>
+                </a:solidFill>
+                <a:latin typeface="Malgun Gothic"/>
+              </a:rPr>
+              <a:t>매니저는 배지로 구분되고, 재직 상태가 재직·휴직·퇴사 3가지로 표시돼요.</a:t>
+            </a:r>
+          </a:p>
+          <a:p>
+            <a:pPr>
+              <a:lnSpc>
+                <a:spcPct val="115000"/>
+              </a:lnSpc>
+              <a:spcAft>
+                <a:spcPts val="200"/>
+              </a:spcAft>
+            </a:pPr>
+            <a:r>
+              <a:rPr sz="900" b="1">
+                <a:solidFill>
+                  <a:srgbClr val="0D9488"/>
+                </a:solidFill>
+                <a:latin typeface="Malgun Gothic"/>
+              </a:rPr>
+              <a:t>● </a:t>
+            </a:r>
+            <a:r>
+              <a:rPr sz="1100">
+                <a:solidFill>
+                  <a:srgbClr val="334155"/>
+                </a:solidFill>
+                <a:latin typeface="Malgun Gothic"/>
+              </a:rPr>
+              <a:t>이름이 비어도 아이디로 대체 표기돼 빈칸이 없어요.</a:t>
+            </a:r>
+          </a:p>
+          <a:p>
+            <a:pPr>
+              <a:lnSpc>
+                <a:spcPct val="115000"/>
+              </a:lnSpc>
+              <a:spcAft>
+                <a:spcPts val="200"/>
+              </a:spcAft>
+            </a:pPr>
+            <a:r>
+              <a:rPr sz="900" b="1">
+                <a:solidFill>
+                  <a:srgbClr val="0D9488"/>
+                </a:solidFill>
+                <a:latin typeface="Malgun Gothic"/>
+              </a:rPr>
+              <a:t>● </a:t>
+            </a:r>
+            <a:r>
+              <a:rPr sz="1100">
+                <a:solidFill>
+                  <a:srgbClr val="334155"/>
+                </a:solidFill>
+                <a:latin typeface="Malgun Gothic"/>
+              </a:rPr>
+              <a:t>상세 탭은 기존 API를 재사용해 빠르게 뜨고, 화면은 한/영 병기예요.</a:t>
+            </a:r>
+          </a:p>
+          <a:p>
+            <a:pPr>
+              <a:lnSpc>
+                <a:spcPct val="115000"/>
+              </a:lnSpc>
+              <a:spcAft>
+                <a:spcPts val="200"/>
+              </a:spcAft>
+            </a:pPr>
+            <a:r>
+              <a:rPr sz="900" b="1">
+                <a:solidFill>
+                  <a:srgbClr val="0D9488"/>
+                </a:solidFill>
+                <a:latin typeface="Malgun Gothic"/>
+              </a:rPr>
+              <a:t>● </a:t>
+            </a:r>
+            <a:r>
+              <a:rPr sz="1100">
+                <a:solidFill>
+                  <a:srgbClr val="334155"/>
+                </a:solidFill>
+                <a:latin typeface="Malgun Gothic"/>
+              </a:rPr>
+              <a:t>중복이던 급여 입구를 정리하고 버그 접수는 별도 시스템으로 옮겼어요.</a:t>
+            </a:r>
+          </a:p>
+        </p:txBody>
+      </p:sp>
+      <p:sp>
+        <p:nvSpPr>
+          <p:cNvPr id="17" name="Rounded Rectangle 16"/>
+          <p:cNvSpPr/>
+          <p:nvPr/>
+        </p:nvSpPr>
+        <p:spPr>
+          <a:xfrm>
+            <a:off x="457200" y="6903720"/>
+            <a:ext cx="5669280" cy="640080"/>
+          </a:xfrm>
+          <a:prstGeom prst="roundRect">
+            <a:avLst/>
+          </a:prstGeom>
+          <a:solidFill>
+            <a:srgbClr val="FFFBEB"/>
+          </a:solidFill>
+          <a:ln w="12700">
+            <a:solidFill>
+              <a:srgbClr val="F59E0B"/>
+            </a:solidFill>
+          </a:ln>
+          <a:effectLst/>
+        </p:spPr>
+        <p:style>
+          <a:lnRef idx="1">
+            <a:schemeClr val="accent1"/>
+          </a:lnRef>
+          <a:fillRef idx="3">
+            <a:schemeClr val="accent1"/>
+          </a:fillRef>
+          <a:effectRef idx="2">
+            <a:schemeClr val="accent1"/>
+          </a:effectRef>
+          <a:fontRef idx="minor">
+            <a:schemeClr val="lt1"/>
+          </a:fontRef>
+        </p:style>
+        <p:txBody>
+          <a:bodyPr rtlCol="0" anchor="ctr"/>
+          <a:lstStyle/>
+          <a:p>
+            <a:pPr algn="ctr"/>
+          </a:p>
+        </p:txBody>
+      </p:sp>
+      <p:sp>
+        <p:nvSpPr>
+          <p:cNvPr id="18" name="TextBox 17"/>
+          <p:cNvSpPr txBox="1"/>
+          <p:nvPr/>
+        </p:nvSpPr>
+        <p:spPr>
+          <a:xfrm>
+            <a:off x="594360" y="6949440"/>
+            <a:ext cx="5394960" cy="548640"/>
+          </a:xfrm>
+          <a:prstGeom prst="rect">
+            <a:avLst/>
+          </a:prstGeom>
+          <a:noFill/>
+        </p:spPr>
+        <p:txBody>
+          <a:bodyPr wrap="square" anchor="t">
+            <a:spAutoFit/>
+          </a:bodyPr>
+          <a:lstStyle/>
+          <a:p>
+            <a:pPr algn="l">
+              <a:lnSpc>
+                <a:spcPct val="105000"/>
+              </a:lnSpc>
+            </a:pPr>
+            <a:r>
+              <a:rPr sz="1050" b="0">
+                <a:solidFill>
+                  <a:srgbClr val="92670A"/>
+                </a:solidFill>
+                <a:latin typeface="Malgun Gothic"/>
+              </a:rPr>
+              <a:t>⚠️ 알아두기 · 필터·상세 정리 작업이에요. 강사 등록·수정·삭제 기능 자체는 그대로예요.</a:t>
+            </a:r>
+          </a:p>
+        </p:txBody>
+      </p:sp>
+      <p:sp>
+        <p:nvSpPr>
+          <p:cNvPr id="19" name="Rounded Rectangle 18"/>
+          <p:cNvSpPr/>
+          <p:nvPr/>
+        </p:nvSpPr>
+        <p:spPr>
+          <a:xfrm>
+            <a:off x="457200" y="7635240"/>
+            <a:ext cx="5669280" cy="658368"/>
+          </a:xfrm>
+          <a:prstGeom prst="roundRect">
+            <a:avLst/>
+          </a:prstGeom>
+          <a:solidFill>
+            <a:srgbClr val="FFF7E6"/>
+          </a:solidFill>
+          <a:ln w="12700">
+            <a:solidFill>
+              <a:srgbClr val="F59E0B"/>
+            </a:solidFill>
+          </a:ln>
+          <a:effectLst/>
+        </p:spPr>
+        <p:style>
+          <a:lnRef idx="1">
+            <a:schemeClr val="accent1"/>
+          </a:lnRef>
+          <a:fillRef idx="3">
+            <a:schemeClr val="accent1"/>
+          </a:fillRef>
+          <a:effectRef idx="2">
+            <a:schemeClr val="accent1"/>
+          </a:effectRef>
+          <a:fontRef idx="minor">
+            <a:schemeClr val="lt1"/>
+          </a:fontRef>
+        </p:style>
+        <p:txBody>
+          <a:bodyPr rtlCol="0" anchor="ctr"/>
+          <a:lstStyle/>
+          <a:p>
+            <a:pPr algn="ctr"/>
+          </a:p>
+        </p:txBody>
+      </p:sp>
+      <p:sp>
+        <p:nvSpPr>
+          <p:cNvPr id="20" name="TextBox 19"/>
+          <p:cNvSpPr txBox="1"/>
+          <p:nvPr/>
+        </p:nvSpPr>
+        <p:spPr>
+          <a:xfrm>
+            <a:off x="594360" y="7680960"/>
+            <a:ext cx="5394960" cy="566928"/>
+          </a:xfrm>
+          <a:prstGeom prst="rect">
+            <a:avLst/>
+          </a:prstGeom>
+          <a:noFill/>
+        </p:spPr>
+        <p:txBody>
+          <a:bodyPr wrap="square" anchor="t">
+            <a:spAutoFit/>
+          </a:bodyPr>
+          <a:lstStyle/>
+          <a:p>
+            <a:pPr algn="l">
+              <a:lnSpc>
+                <a:spcPct val="105000"/>
+              </a:lnSpc>
+            </a:pPr>
+            <a:r>
+              <a:rPr sz="1050" b="0">
+                <a:solidFill>
+                  <a:srgbClr val="5B4A2A"/>
+                </a:solidFill>
+                <a:latin typeface="Malgun Gothic"/>
+              </a:rPr>
+              <a:t>💡 꿀팁 · 강사가 많을수록 상태·그룹 필터가 큰 힘을 발휘해요. 자주 보는 조건은 필터를 걸어 두고 쓰세요.</a:t>
+            </a:r>
+          </a:p>
+        </p:txBody>
+      </p:sp>
+      <p:sp>
+        <p:nvSpPr>
+          <p:cNvPr id="21" name="Rectangle 20"/>
+          <p:cNvSpPr/>
+          <p:nvPr/>
+        </p:nvSpPr>
+        <p:spPr>
+          <a:xfrm>
+            <a:off x="6300216" y="2345436"/>
+            <a:ext cx="5596128" cy="3538728"/>
+          </a:xfrm>
+          <a:prstGeom prst="rect">
+            <a:avLst/>
+          </a:prstGeom>
+          <a:solidFill>
+            <a:srgbClr val="FFFFFF"/>
+          </a:solidFill>
+          <a:ln w="12700">
+            <a:solidFill>
+              <a:srgbClr val="E2E8F0"/>
+            </a:solidFill>
+          </a:ln>
+          <a:effectLst/>
+        </p:spPr>
+        <p:style>
+          <a:lnRef idx="1">
+            <a:schemeClr val="accent1"/>
+          </a:lnRef>
+          <a:fillRef idx="3">
+            <a:schemeClr val="accent1"/>
+          </a:fillRef>
+          <a:effectRef idx="2">
+            <a:schemeClr val="accent1"/>
+          </a:effectRef>
+          <a:fontRef idx="minor">
+            <a:schemeClr val="lt1"/>
+          </a:fontRef>
+        </p:style>
+        <p:txBody>
+          <a:bodyPr rtlCol="0" anchor="ctr"/>
+          <a:lstStyle/>
+          <a:p>
+            <a:pPr algn="ctr"/>
+          </a:p>
+        </p:txBody>
+      </p:sp>
+      <p:pic>
+        <p:nvPicPr>
+          <p:cNvPr id="22" name="Picture 21" descr="admin_teachers.jpg"/>
+          <p:cNvPicPr>
+            <a:picLocks noChangeAspect="1"/>
+          </p:cNvPicPr>
+          <p:nvPr/>
+        </p:nvPicPr>
+        <p:blipFill>
+          <a:blip r:embed="rId2"/>
+          <a:stretch>
+            <a:fillRect/>
+          </a:stretch>
+        </p:blipFill>
+        <p:spPr>
+          <a:xfrm>
+            <a:off x="6355080" y="2400300"/>
+            <a:ext cx="5486400" cy="3429000"/>
+          </a:xfrm>
+          <a:prstGeom prst="rect">
+            <a:avLst/>
+          </a:prstGeom>
+        </p:spPr>
+      </p:pic>
+    </p:spTree>
+  </p:cSld>
+  <p:clrMapOvr>
+    <a:masterClrMapping/>
+  </p:clrMapOvr>
+</p:sld>
+</file>
+
+<file path=ppt/slides/slide26.xml><?xml version="1.0" encoding="utf-8"?>
+<p:sld xmlns:a="http://schemas.openxmlformats.org/drawingml/2006/main" xmlns:p="http://schemas.openxmlformats.org/presentationml/2006/main" xmlns:r="http://schemas.openxmlformats.org/officeDocument/2006/relationships">
+  <p:cSld>
+    <p:bg>
+      <p:bgPr>
+        <a:solidFill>
+          <a:srgbClr val="FFFFFF"/>
+        </a:solidFill>
+        <a:effectLst/>
+      </p:bgPr>
+    </p:bg>
+    <p:spTree>
+      <p:nvGrpSpPr>
+        <p:cNvPr id="1" name=""/>
+        <p:cNvGrpSpPr/>
+        <p:nvPr/>
+      </p:nvGrpSpPr>
+      <p:grpSpPr/>
+      <p:sp>
+        <p:nvSpPr>
+          <p:cNvPr id="2" name="Rectangle 1"/>
+          <p:cNvSpPr/>
+          <p:nvPr/>
+        </p:nvSpPr>
+        <p:spPr>
+          <a:xfrm>
+            <a:off x="0" y="0"/>
+            <a:ext cx="12191695" cy="566928"/>
+          </a:xfrm>
+          <a:prstGeom prst="rect">
+            <a:avLst/>
+          </a:prstGeom>
+          <a:solidFill>
+            <a:srgbClr val="0D9488"/>
+          </a:solidFill>
+          <a:ln>
+            <a:noFill/>
+          </a:ln>
+          <a:effectLst/>
+        </p:spPr>
+        <p:style>
+          <a:lnRef idx="1">
+            <a:schemeClr val="accent1"/>
+          </a:lnRef>
+          <a:fillRef idx="3">
+            <a:schemeClr val="accent1"/>
+          </a:fillRef>
+          <a:effectRef idx="2">
+            <a:schemeClr val="accent1"/>
+          </a:effectRef>
+          <a:fontRef idx="minor">
+            <a:schemeClr val="lt1"/>
+          </a:fontRef>
+        </p:style>
+        <p:txBody>
+          <a:bodyPr rtlCol="0" anchor="ctr"/>
+          <a:lstStyle/>
+          <a:p>
+            <a:pPr algn="ctr"/>
+          </a:p>
+        </p:txBody>
+      </p:sp>
+      <p:sp>
+        <p:nvSpPr>
+          <p:cNvPr id="3" name="Rectangle 2"/>
+          <p:cNvSpPr/>
+          <p:nvPr/>
+        </p:nvSpPr>
+        <p:spPr>
+          <a:xfrm>
+            <a:off x="0" y="566928"/>
+            <a:ext cx="12191695" cy="54864"/>
+          </a:xfrm>
+          <a:prstGeom prst="rect">
+            <a:avLst/>
+          </a:prstGeom>
+          <a:solidFill>
+            <a:srgbClr val="F59E0B"/>
+          </a:solidFill>
+          <a:ln>
+            <a:noFill/>
+          </a:ln>
+          <a:effectLst/>
+        </p:spPr>
+        <p:style>
+          <a:lnRef idx="1">
+            <a:schemeClr val="accent1"/>
+          </a:lnRef>
+          <a:fillRef idx="3">
+            <a:schemeClr val="accent1"/>
+          </a:fillRef>
+          <a:effectRef idx="2">
+            <a:schemeClr val="accent1"/>
+          </a:effectRef>
+          <a:fontRef idx="minor">
+            <a:schemeClr val="lt1"/>
+          </a:fontRef>
+        </p:style>
+        <p:txBody>
+          <a:bodyPr rtlCol="0" anchor="ctr"/>
+          <a:lstStyle/>
+          <a:p>
+            <a:pPr algn="ctr"/>
+          </a:p>
+        </p:txBody>
+      </p:sp>
+      <p:sp>
+        <p:nvSpPr>
+          <p:cNvPr id="4" name="TextBox 3"/>
+          <p:cNvSpPr txBox="1"/>
+          <p:nvPr/>
+        </p:nvSpPr>
+        <p:spPr>
+          <a:xfrm>
+            <a:off x="365760" y="27432"/>
+            <a:ext cx="7315200" cy="502920"/>
+          </a:xfrm>
+          <a:prstGeom prst="rect">
+            <a:avLst/>
+          </a:prstGeom>
+          <a:noFill/>
+        </p:spPr>
+        <p:txBody>
+          <a:bodyPr wrap="square" anchor="ctr">
+            <a:spAutoFit/>
+          </a:bodyPr>
+          <a:lstStyle/>
+          <a:p>
+            <a:pPr algn="l">
+              <a:lnSpc>
+                <a:spcPct val="100000"/>
+              </a:lnSpc>
+            </a:pPr>
+            <a:r>
+              <a:rPr sz="1500" b="1">
+                <a:solidFill>
+                  <a:srgbClr val="FFFFFF"/>
+                </a:solidFill>
+                <a:latin typeface="Malgun Gothic"/>
+              </a:rPr>
+              <a:t>🏢 망고아이 지사용 사용설명서</a:t>
+            </a:r>
+          </a:p>
+        </p:txBody>
+      </p:sp>
+      <p:sp>
+        <p:nvSpPr>
+          <p:cNvPr id="5" name="TextBox 4"/>
+          <p:cNvSpPr txBox="1"/>
+          <p:nvPr/>
+        </p:nvSpPr>
+        <p:spPr>
+          <a:xfrm>
+            <a:off x="8168335" y="27432"/>
+            <a:ext cx="3657600" cy="502920"/>
+          </a:xfrm>
+          <a:prstGeom prst="rect">
+            <a:avLst/>
+          </a:prstGeom>
+          <a:noFill/>
+        </p:spPr>
+        <p:txBody>
+          <a:bodyPr wrap="square" anchor="ctr">
+            <a:spAutoFit/>
+          </a:bodyPr>
+          <a:lstStyle/>
+          <a:p>
+            <a:pPr algn="r">
+              <a:lnSpc>
+                <a:spcPct val="100000"/>
+              </a:lnSpc>
+            </a:pPr>
+            <a:r>
+              <a:rPr sz="1300" b="1">
+                <a:solidFill>
+                  <a:srgbClr val="F1F5F9"/>
+                </a:solidFill>
+                <a:latin typeface="Malgun Gothic"/>
+              </a:rPr>
+              <a:t>주요 기능 사용법</a:t>
+            </a:r>
+          </a:p>
+        </p:txBody>
+      </p:sp>
+      <p:sp>
+        <p:nvSpPr>
+          <p:cNvPr id="6" name="Rounded Rectangle 5"/>
+          <p:cNvSpPr/>
+          <p:nvPr/>
+        </p:nvSpPr>
+        <p:spPr>
+          <a:xfrm>
+            <a:off x="365760" y="822960"/>
+            <a:ext cx="868680" cy="868680"/>
+          </a:xfrm>
+          <a:prstGeom prst="roundRect">
+            <a:avLst/>
+          </a:prstGeom>
+          <a:solidFill>
+            <a:srgbClr val="0D9488"/>
+          </a:solidFill>
+          <a:ln>
+            <a:noFill/>
+          </a:ln>
+          <a:effectLst/>
+        </p:spPr>
+        <p:style>
+          <a:lnRef idx="1">
+            <a:schemeClr val="accent1"/>
+          </a:lnRef>
+          <a:fillRef idx="3">
+            <a:schemeClr val="accent1"/>
+          </a:fillRef>
+          <a:effectRef idx="2">
+            <a:schemeClr val="accent1"/>
+          </a:effectRef>
+          <a:fontRef idx="minor">
+            <a:schemeClr val="lt1"/>
+          </a:fontRef>
+        </p:style>
+        <p:txBody>
+          <a:bodyPr rtlCol="0" anchor="ctr"/>
+          <a:lstStyle/>
+          <a:p>
+            <a:pPr algn="ctr"/>
+          </a:p>
+        </p:txBody>
+      </p:sp>
+      <p:sp>
+        <p:nvSpPr>
+          <p:cNvPr id="7" name="TextBox 6"/>
+          <p:cNvSpPr txBox="1"/>
+          <p:nvPr/>
+        </p:nvSpPr>
+        <p:spPr>
+          <a:xfrm>
+            <a:off x="365760" y="822960"/>
+            <a:ext cx="868680" cy="868680"/>
+          </a:xfrm>
+          <a:prstGeom prst="rect">
+            <a:avLst/>
+          </a:prstGeom>
+          <a:noFill/>
+        </p:spPr>
+        <p:txBody>
+          <a:bodyPr wrap="square" anchor="ctr">
+            <a:spAutoFit/>
+          </a:bodyPr>
+          <a:lstStyle/>
+          <a:p>
+            <a:pPr algn="ctr">
+              <a:lnSpc>
+                <a:spcPct val="100000"/>
+              </a:lnSpc>
+            </a:pPr>
+            <a:r>
+              <a:rPr sz="2600" b="1">
+                <a:solidFill>
+                  <a:srgbClr val="FFFFFF"/>
+                </a:solidFill>
+                <a:latin typeface="Malgun Gothic"/>
+              </a:rPr>
+              <a:t>23</a:t>
+            </a:r>
+          </a:p>
+        </p:txBody>
+      </p:sp>
+      <p:sp>
+        <p:nvSpPr>
+          <p:cNvPr id="8" name="TextBox 7"/>
+          <p:cNvSpPr txBox="1"/>
+          <p:nvPr/>
+        </p:nvSpPr>
+        <p:spPr>
+          <a:xfrm>
+            <a:off x="1371600" y="822960"/>
+            <a:ext cx="10424160" cy="502920"/>
+          </a:xfrm>
+          <a:prstGeom prst="rect">
+            <a:avLst/>
+          </a:prstGeom>
+          <a:noFill/>
+        </p:spPr>
+        <p:txBody>
+          <a:bodyPr wrap="square" anchor="t">
+            <a:spAutoFit/>
+          </a:bodyPr>
+          <a:lstStyle/>
+          <a:p>
+            <a:pPr algn="l">
+              <a:lnSpc>
+                <a:spcPct val="100000"/>
+              </a:lnSpc>
+            </a:pPr>
+            <a:r>
+              <a:rPr sz="2300" b="1">
+                <a:solidFill>
+                  <a:srgbClr val="1E2340"/>
+                </a:solidFill>
+                <a:latin typeface="Malgun Gothic"/>
+              </a:rPr>
+              <a:t>🌟 학부모 월간 성적표 (오각형) 발송</a:t>
+            </a:r>
+          </a:p>
+        </p:txBody>
+      </p:sp>
+      <p:sp>
+        <p:nvSpPr>
+          <p:cNvPr id="9" name="TextBox 8"/>
+          <p:cNvSpPr txBox="1"/>
+          <p:nvPr/>
+        </p:nvSpPr>
+        <p:spPr>
+          <a:xfrm>
+            <a:off x="1417320" y="1353312"/>
+            <a:ext cx="10424160" cy="320040"/>
+          </a:xfrm>
+          <a:prstGeom prst="rect">
+            <a:avLst/>
+          </a:prstGeom>
+          <a:noFill/>
+        </p:spPr>
+        <p:txBody>
+          <a:bodyPr wrap="square" anchor="t">
+            <a:spAutoFit/>
+          </a:bodyPr>
+          <a:lstStyle/>
+          <a:p>
+            <a:pPr algn="l">
+              <a:lnSpc>
+                <a:spcPct val="100000"/>
+              </a:lnSpc>
+            </a:pPr>
+            <a:r>
+              <a:rPr sz="1300" b="0">
+                <a:solidFill>
+                  <a:srgbClr val="64748B"/>
+                </a:solidFill>
+                <a:latin typeface="Malgun Gothic"/>
+              </a:rPr>
+              <a:t>5축 그래프 성적표를 미리보고 링크로</a:t>
+            </a:r>
+          </a:p>
+        </p:txBody>
+      </p:sp>
+      <p:sp>
+        <p:nvSpPr>
+          <p:cNvPr id="10" name="Rounded Rectangle 9"/>
+          <p:cNvSpPr/>
+          <p:nvPr/>
+        </p:nvSpPr>
+        <p:spPr>
+          <a:xfrm>
+            <a:off x="365760" y="1828800"/>
+            <a:ext cx="11430000" cy="777240"/>
+          </a:xfrm>
+          <a:prstGeom prst="roundRect">
+            <a:avLst/>
+          </a:prstGeom>
+          <a:solidFill>
+            <a:srgbClr val="ECFDF5"/>
+          </a:solidFill>
+          <a:ln>
+            <a:noFill/>
+          </a:ln>
+          <a:effectLst/>
+        </p:spPr>
+        <p:style>
+          <a:lnRef idx="1">
+            <a:schemeClr val="accent1"/>
+          </a:lnRef>
+          <a:fillRef idx="3">
+            <a:schemeClr val="accent1"/>
+          </a:fillRef>
+          <a:effectRef idx="2">
+            <a:schemeClr val="accent1"/>
+          </a:effectRef>
+          <a:fontRef idx="minor">
+            <a:schemeClr val="lt1"/>
+          </a:fontRef>
+        </p:style>
+        <p:txBody>
+          <a:bodyPr rtlCol="0" anchor="ctr"/>
+          <a:lstStyle/>
+          <a:p>
+            <a:pPr algn="ctr"/>
+          </a:p>
+        </p:txBody>
+      </p:sp>
+      <p:sp>
+        <p:nvSpPr>
+          <p:cNvPr id="11" name="TextBox 10"/>
+          <p:cNvSpPr txBox="1"/>
+          <p:nvPr/>
+        </p:nvSpPr>
+        <p:spPr>
+          <a:xfrm>
+            <a:off x="548640" y="1901952"/>
+            <a:ext cx="11064240" cy="640080"/>
+          </a:xfrm>
+          <a:prstGeom prst="rect">
+            <a:avLst/>
+          </a:prstGeom>
+          <a:noFill/>
+        </p:spPr>
+        <p:txBody>
+          <a:bodyPr wrap="square" anchor="t">
+            <a:spAutoFit/>
+          </a:bodyPr>
+          <a:lstStyle/>
+          <a:p>
+            <a:pPr algn="l">
+              <a:lnSpc>
+                <a:spcPct val="115000"/>
+              </a:lnSpc>
+            </a:pPr>
+            <a:r>
+              <a:rPr sz="1200" b="0">
+                <a:solidFill>
+                  <a:srgbClr val="334155"/>
+                </a:solidFill>
+                <a:latin typeface="Malgun Gothic"/>
+              </a:rPr>
+              <a:t>학부모에게 보내는 월간 성적표가 오각형 5축 그래프로 새로워졌어요. 발음·유창성 / 어휘 / 문장 구성력 / 수업 태도 / 참여도 를 한눈에 보여 주고, 출결·판단력·담임의 한마디가 함께 담깁니다. 관리자·교사는 학생 ID와 월을 넣어 미리보기한 뒤 카카오톡 링크로 보냅니다.</a:t>
+            </a:r>
+          </a:p>
+        </p:txBody>
+      </p:sp>
+      <p:sp>
+        <p:nvSpPr>
+          <p:cNvPr id="12" name="TextBox 11"/>
+          <p:cNvSpPr txBox="1"/>
+          <p:nvPr/>
+        </p:nvSpPr>
+        <p:spPr>
+          <a:xfrm>
+            <a:off x="457200" y="2743200"/>
+            <a:ext cx="5669280" cy="320040"/>
+          </a:xfrm>
+          <a:prstGeom prst="rect">
+            <a:avLst/>
+          </a:prstGeom>
+          <a:noFill/>
+        </p:spPr>
+        <p:txBody>
+          <a:bodyPr wrap="square" anchor="t">
+            <a:spAutoFit/>
+          </a:bodyPr>
+          <a:lstStyle/>
+          <a:p>
+            <a:pPr algn="l">
+              <a:lnSpc>
+                <a:spcPct val="100000"/>
+              </a:lnSpc>
+            </a:pPr>
+            <a:r>
+              <a:rPr sz="1350" b="1">
+                <a:solidFill>
+                  <a:srgbClr val="0D9488"/>
+                </a:solidFill>
+                <a:latin typeface="Malgun Gothic"/>
+              </a:rPr>
+              <a:t>사용 방법</a:t>
+            </a:r>
+          </a:p>
+        </p:txBody>
+      </p:sp>
+      <p:sp>
+        <p:nvSpPr>
+          <p:cNvPr id="13" name="TextBox 12"/>
+          <p:cNvSpPr txBox="1"/>
+          <p:nvPr/>
+        </p:nvSpPr>
+        <p:spPr>
+          <a:xfrm>
+            <a:off x="457200" y="3108960"/>
+            <a:ext cx="5669280" cy="2377440"/>
+          </a:xfrm>
+          <a:prstGeom prst="rect">
+            <a:avLst/>
+          </a:prstGeom>
+          <a:noFill/>
+        </p:spPr>
+        <p:txBody>
+          <a:bodyPr wrap="square">
+            <a:spAutoFit/>
+          </a:bodyPr>
+          <a:lstStyle/>
+          <a:p>
+            <a:pPr>
+              <a:lnSpc>
+                <a:spcPct val="115000"/>
+              </a:lnSpc>
+              <a:spcAft>
+                <a:spcPts val="600"/>
+              </a:spcAft>
+            </a:pPr>
+            <a:r>
+              <a:rPr sz="1050" b="1">
+                <a:solidFill>
+                  <a:srgbClr val="0D9488"/>
+                </a:solidFill>
+                <a:latin typeface="Malgun Gothic"/>
+              </a:rPr>
+              <a:t>● </a:t>
+            </a:r>
+            <a:r>
+              <a:rPr sz="1250">
+                <a:solidFill>
+                  <a:srgbClr val="334155"/>
+                </a:solidFill>
+                <a:latin typeface="Malgun Gothic"/>
+              </a:rPr>
+              <a:t>월간 리포트 화면을 열어요.</a:t>
+            </a:r>
+          </a:p>
+          <a:p>
+            <a:pPr>
+              <a:lnSpc>
+                <a:spcPct val="115000"/>
+              </a:lnSpc>
+              <a:spcAft>
+                <a:spcPts val="600"/>
+              </a:spcAft>
+            </a:pPr>
+            <a:r>
+              <a:rPr sz="1050" b="1">
+                <a:solidFill>
+                  <a:srgbClr val="0D9488"/>
+                </a:solidFill>
+                <a:latin typeface="Malgun Gothic"/>
+              </a:rPr>
+              <a:t>● </a:t>
+            </a:r>
+            <a:r>
+              <a:rPr sz="1250">
+                <a:solidFill>
+                  <a:srgbClr val="334155"/>
+                </a:solidFill>
+                <a:latin typeface="Malgun Gothic"/>
+              </a:rPr>
+              <a:t>학생 ID와 월을 넣고 레포트 보기를 눌러 미리봐요.</a:t>
+            </a:r>
+          </a:p>
+          <a:p>
+            <a:pPr>
+              <a:lnSpc>
+                <a:spcPct val="115000"/>
+              </a:lnSpc>
+              <a:spcAft>
+                <a:spcPts val="600"/>
+              </a:spcAft>
+            </a:pPr>
+            <a:r>
+              <a:rPr sz="1050" b="1">
+                <a:solidFill>
+                  <a:srgbClr val="0D9488"/>
+                </a:solidFill>
+                <a:latin typeface="Malgun Gothic"/>
+              </a:rPr>
+              <a:t>● </a:t>
+            </a:r>
+            <a:r>
+              <a:rPr sz="1250">
+                <a:solidFill>
+                  <a:srgbClr val="334155"/>
+                </a:solidFill>
+                <a:latin typeface="Malgun Gothic"/>
+              </a:rPr>
+              <a:t>오각형과 담임의 한마디를 확인하고, 필요하면 평가를 보완해요.</a:t>
+            </a:r>
+          </a:p>
+          <a:p>
+            <a:pPr>
+              <a:lnSpc>
+                <a:spcPct val="115000"/>
+              </a:lnSpc>
+              <a:spcAft>
+                <a:spcPts val="600"/>
+              </a:spcAft>
+            </a:pPr>
+            <a:r>
+              <a:rPr sz="1050" b="1">
+                <a:solidFill>
+                  <a:srgbClr val="0D9488"/>
+                </a:solidFill>
+                <a:latin typeface="Malgun Gothic"/>
+              </a:rPr>
+              <a:t>● </a:t>
+            </a:r>
+            <a:r>
+              <a:rPr sz="1250">
+                <a:solidFill>
+                  <a:srgbClr val="334155"/>
+                </a:solidFill>
+                <a:latin typeface="Malgun Gothic"/>
+              </a:rPr>
+              <a:t>주소에 ?uid=학생ID&amp;period=YYYY-MM 를 붙여 카카오톡 링크로 보냅니다.</a:t>
+            </a:r>
+          </a:p>
+        </p:txBody>
+      </p:sp>
+      <p:sp>
+        <p:nvSpPr>
+          <p:cNvPr id="14" name="Rounded Rectangle 13"/>
+          <p:cNvSpPr/>
+          <p:nvPr/>
+        </p:nvSpPr>
+        <p:spPr>
+          <a:xfrm>
+            <a:off x="457200" y="4782312"/>
+            <a:ext cx="5669280" cy="1316736"/>
+          </a:xfrm>
+          <a:prstGeom prst="roundRect">
+            <a:avLst/>
+          </a:prstGeom>
+          <a:solidFill>
+            <a:srgbClr val="F4F7FF"/>
+          </a:solidFill>
+          <a:ln w="12700">
+            <a:solidFill>
+              <a:srgbClr val="0D9488"/>
+            </a:solidFill>
+          </a:ln>
+          <a:effectLst/>
+        </p:spPr>
+        <p:style>
+          <a:lnRef idx="1">
+            <a:schemeClr val="accent1"/>
+          </a:lnRef>
+          <a:fillRef idx="3">
+            <a:schemeClr val="accent1"/>
+          </a:fillRef>
+          <a:effectRef idx="2">
+            <a:schemeClr val="accent1"/>
+          </a:effectRef>
+          <a:fontRef idx="minor">
+            <a:schemeClr val="lt1"/>
+          </a:fontRef>
+        </p:style>
+        <p:txBody>
+          <a:bodyPr rtlCol="0" anchor="ctr"/>
+          <a:lstStyle/>
+          <a:p>
+            <a:pPr algn="ctr"/>
+          </a:p>
+        </p:txBody>
+      </p:sp>
+      <p:sp>
+        <p:nvSpPr>
+          <p:cNvPr id="15" name="TextBox 14"/>
+          <p:cNvSpPr txBox="1"/>
+          <p:nvPr/>
+        </p:nvSpPr>
+        <p:spPr>
+          <a:xfrm>
+            <a:off x="594360" y="4837175"/>
+            <a:ext cx="5394960" cy="274320"/>
+          </a:xfrm>
+          <a:prstGeom prst="rect">
+            <a:avLst/>
+          </a:prstGeom>
+          <a:noFill/>
+        </p:spPr>
+        <p:txBody>
+          <a:bodyPr wrap="square" anchor="t">
+            <a:spAutoFit/>
+          </a:bodyPr>
+          <a:lstStyle/>
+          <a:p>
+            <a:pPr algn="l">
+              <a:lnSpc>
+                <a:spcPct val="100000"/>
+              </a:lnSpc>
+            </a:pPr>
+            <a:r>
+              <a:rPr sz="1150" b="1">
+                <a:solidFill>
+                  <a:srgbClr val="0D9488"/>
+                </a:solidFill>
+                <a:latin typeface="Malgun Gothic"/>
+              </a:rPr>
+              <a:t>✅ 핵심 포인트</a:t>
+            </a:r>
+          </a:p>
+        </p:txBody>
+      </p:sp>
+      <p:sp>
+        <p:nvSpPr>
+          <p:cNvPr id="16" name="TextBox 15"/>
+          <p:cNvSpPr txBox="1"/>
+          <p:nvPr/>
+        </p:nvSpPr>
+        <p:spPr>
+          <a:xfrm>
+            <a:off x="594360" y="5111496"/>
+            <a:ext cx="5394960" cy="950976"/>
+          </a:xfrm>
+          <a:prstGeom prst="rect">
+            <a:avLst/>
+          </a:prstGeom>
+          <a:noFill/>
+        </p:spPr>
+        <p:txBody>
+          <a:bodyPr wrap="square">
+            <a:spAutoFit/>
+          </a:bodyPr>
+          <a:lstStyle/>
+          <a:p>
+            <a:pPr>
+              <a:lnSpc>
+                <a:spcPct val="115000"/>
+              </a:lnSpc>
+              <a:spcAft>
+                <a:spcPts val="200"/>
+              </a:spcAft>
+            </a:pPr>
+            <a:r>
+              <a:rPr sz="900" b="1">
+                <a:solidFill>
+                  <a:srgbClr val="0D9488"/>
+                </a:solidFill>
+                <a:latin typeface="Malgun Gothic"/>
+              </a:rPr>
+              <a:t>● </a:t>
+            </a:r>
+            <a:r>
+              <a:rPr sz="1100">
+                <a:solidFill>
+                  <a:srgbClr val="334155"/>
+                </a:solidFill>
+                <a:latin typeface="Malgun Gothic"/>
+              </a:rPr>
+              <a:t>실제 기록이 있는 축만 채워져 신뢰할 수 있어요.</a:t>
+            </a:r>
+          </a:p>
+          <a:p>
+            <a:pPr>
+              <a:lnSpc>
+                <a:spcPct val="115000"/>
+              </a:lnSpc>
+              <a:spcAft>
+                <a:spcPts val="200"/>
+              </a:spcAft>
+            </a:pPr>
+            <a:r>
+              <a:rPr sz="900" b="1">
+                <a:solidFill>
+                  <a:srgbClr val="0D9488"/>
+                </a:solidFill>
+                <a:latin typeface="Malgun Gothic"/>
+              </a:rPr>
+              <a:t>● </a:t>
+            </a:r>
+            <a:r>
+              <a:rPr sz="1100">
+                <a:solidFill>
+                  <a:srgbClr val="334155"/>
+                </a:solidFill>
+                <a:latin typeface="Malgun Gothic"/>
+              </a:rPr>
+              <a:t>2개월 주기로 정리해 학부모 피로 없이 변화를 전달해요.</a:t>
+            </a:r>
+          </a:p>
+          <a:p>
+            <a:pPr>
+              <a:lnSpc>
+                <a:spcPct val="115000"/>
+              </a:lnSpc>
+              <a:spcAft>
+                <a:spcPts val="200"/>
+              </a:spcAft>
+            </a:pPr>
+            <a:r>
+              <a:rPr sz="900" b="1">
+                <a:solidFill>
+                  <a:srgbClr val="0D9488"/>
+                </a:solidFill>
+                <a:latin typeface="Malgun Gothic"/>
+              </a:rPr>
+              <a:t>● </a:t>
+            </a:r>
+            <a:r>
+              <a:rPr sz="1100">
+                <a:solidFill>
+                  <a:srgbClr val="334155"/>
+                </a:solidFill>
+                <a:latin typeface="Malgun Gothic"/>
+              </a:rPr>
+              <a:t>인쇄/PDF 버튼으로 상담용 종이 성적표도 즉시 만들 수 있어요.</a:t>
+            </a:r>
+          </a:p>
+        </p:txBody>
+      </p:sp>
+      <p:sp>
+        <p:nvSpPr>
+          <p:cNvPr id="17" name="Rounded Rectangle 16"/>
+          <p:cNvSpPr/>
+          <p:nvPr/>
+        </p:nvSpPr>
+        <p:spPr>
+          <a:xfrm>
+            <a:off x="457200" y="6208775"/>
+            <a:ext cx="5669280" cy="640080"/>
+          </a:xfrm>
+          <a:prstGeom prst="roundRect">
+            <a:avLst/>
+          </a:prstGeom>
+          <a:solidFill>
+            <a:srgbClr val="FFFBEB"/>
+          </a:solidFill>
+          <a:ln w="12700">
+            <a:solidFill>
+              <a:srgbClr val="F59E0B"/>
+            </a:solidFill>
+          </a:ln>
+          <a:effectLst/>
+        </p:spPr>
+        <p:style>
+          <a:lnRef idx="1">
+            <a:schemeClr val="accent1"/>
+          </a:lnRef>
+          <a:fillRef idx="3">
+            <a:schemeClr val="accent1"/>
+          </a:fillRef>
+          <a:effectRef idx="2">
+            <a:schemeClr val="accent1"/>
+          </a:effectRef>
+          <a:fontRef idx="minor">
+            <a:schemeClr val="lt1"/>
+          </a:fontRef>
+        </p:style>
+        <p:txBody>
+          <a:bodyPr rtlCol="0" anchor="ctr"/>
+          <a:lstStyle/>
+          <a:p>
+            <a:pPr algn="ctr"/>
+          </a:p>
+        </p:txBody>
+      </p:sp>
+      <p:sp>
+        <p:nvSpPr>
+          <p:cNvPr id="18" name="TextBox 17"/>
+          <p:cNvSpPr txBox="1"/>
+          <p:nvPr/>
+        </p:nvSpPr>
+        <p:spPr>
+          <a:xfrm>
+            <a:off x="594360" y="6254495"/>
+            <a:ext cx="5394960" cy="548640"/>
+          </a:xfrm>
+          <a:prstGeom prst="rect">
+            <a:avLst/>
+          </a:prstGeom>
+          <a:noFill/>
+        </p:spPr>
+        <p:txBody>
+          <a:bodyPr wrap="square" anchor="t">
+            <a:spAutoFit/>
+          </a:bodyPr>
+          <a:lstStyle/>
+          <a:p>
+            <a:pPr algn="l">
+              <a:lnSpc>
+                <a:spcPct val="105000"/>
+              </a:lnSpc>
+            </a:pPr>
+            <a:r>
+              <a:rPr sz="1050" b="0">
+                <a:solidFill>
+                  <a:srgbClr val="92670A"/>
+                </a:solidFill>
+                <a:latin typeface="Malgun Gothic"/>
+              </a:rPr>
+              <a:t>⚠️ 알아두기 · 성적표 열람은 승인 게이트를 거쳐요. 관리자는 로그인 세션으로, 학부모는 발급된 링크(토큰)로만 열립니다.</a:t>
+            </a:r>
+          </a:p>
+        </p:txBody>
+      </p:sp>
+      <p:sp>
+        <p:nvSpPr>
+          <p:cNvPr id="19" name="Rounded Rectangle 18"/>
+          <p:cNvSpPr/>
+          <p:nvPr/>
+        </p:nvSpPr>
+        <p:spPr>
+          <a:xfrm>
+            <a:off x="457200" y="6940295"/>
+            <a:ext cx="5669280" cy="658368"/>
+          </a:xfrm>
+          <a:prstGeom prst="roundRect">
+            <a:avLst/>
+          </a:prstGeom>
+          <a:solidFill>
+            <a:srgbClr val="FFF7E6"/>
+          </a:solidFill>
+          <a:ln w="12700">
+            <a:solidFill>
+              <a:srgbClr val="F59E0B"/>
+            </a:solidFill>
+          </a:ln>
+          <a:effectLst/>
+        </p:spPr>
+        <p:style>
+          <a:lnRef idx="1">
+            <a:schemeClr val="accent1"/>
+          </a:lnRef>
+          <a:fillRef idx="3">
+            <a:schemeClr val="accent1"/>
+          </a:fillRef>
+          <a:effectRef idx="2">
+            <a:schemeClr val="accent1"/>
+          </a:effectRef>
+          <a:fontRef idx="minor">
+            <a:schemeClr val="lt1"/>
+          </a:fontRef>
+        </p:style>
+        <p:txBody>
+          <a:bodyPr rtlCol="0" anchor="ctr"/>
+          <a:lstStyle/>
+          <a:p>
+            <a:pPr algn="ctr"/>
+          </a:p>
+        </p:txBody>
+      </p:sp>
+      <p:sp>
+        <p:nvSpPr>
+          <p:cNvPr id="20" name="TextBox 19"/>
+          <p:cNvSpPr txBox="1"/>
+          <p:nvPr/>
+        </p:nvSpPr>
+        <p:spPr>
+          <a:xfrm>
+            <a:off x="594360" y="6986015"/>
+            <a:ext cx="5394960" cy="566928"/>
+          </a:xfrm>
+          <a:prstGeom prst="rect">
+            <a:avLst/>
+          </a:prstGeom>
+          <a:noFill/>
+        </p:spPr>
+        <p:txBody>
+          <a:bodyPr wrap="square" anchor="t">
+            <a:spAutoFit/>
+          </a:bodyPr>
+          <a:lstStyle/>
+          <a:p>
+            <a:pPr algn="l">
+              <a:lnSpc>
+                <a:spcPct val="105000"/>
+              </a:lnSpc>
+            </a:pPr>
+            <a:r>
+              <a:rPr sz="1050" b="0">
+                <a:solidFill>
+                  <a:srgbClr val="5B4A2A"/>
+                </a:solidFill>
+                <a:latin typeface="Malgun Gothic"/>
+              </a:rPr>
+              <a:t>💡 꿀팁 · 상담 예약과 함께 성적표 링크를 미리 보내면 상담이 훨씬 매끄러워요.</a:t>
+            </a:r>
+          </a:p>
+        </p:txBody>
+      </p:sp>
+      <p:sp>
+        <p:nvSpPr>
+          <p:cNvPr id="21" name="Rectangle 20"/>
+          <p:cNvSpPr/>
+          <p:nvPr/>
+        </p:nvSpPr>
+        <p:spPr>
+          <a:xfrm>
+            <a:off x="6300216" y="2345436"/>
+            <a:ext cx="5596128" cy="3538728"/>
+          </a:xfrm>
+          <a:prstGeom prst="rect">
+            <a:avLst/>
+          </a:prstGeom>
+          <a:solidFill>
+            <a:srgbClr val="FFFFFF"/>
+          </a:solidFill>
+          <a:ln w="12700">
+            <a:solidFill>
+              <a:srgbClr val="E2E8F0"/>
+            </a:solidFill>
+          </a:ln>
+          <a:effectLst/>
+        </p:spPr>
+        <p:style>
+          <a:lnRef idx="1">
+            <a:schemeClr val="accent1"/>
+          </a:lnRef>
+          <a:fillRef idx="3">
+            <a:schemeClr val="accent1"/>
+          </a:fillRef>
+          <a:effectRef idx="2">
+            <a:schemeClr val="accent1"/>
+          </a:effectRef>
+          <a:fontRef idx="minor">
+            <a:schemeClr val="lt1"/>
+          </a:fontRef>
+        </p:style>
+        <p:txBody>
+          <a:bodyPr rtlCol="0" anchor="ctr"/>
+          <a:lstStyle/>
+          <a:p>
+            <a:pPr algn="ctr"/>
+          </a:p>
+        </p:txBody>
+      </p:sp>
+      <p:pic>
+        <p:nvPicPr>
+          <p:cNvPr id="22" name="Picture 21" descr="student_report_pentagon.jpg"/>
+          <p:cNvPicPr>
+            <a:picLocks noChangeAspect="1"/>
+          </p:cNvPicPr>
+          <p:nvPr/>
+        </p:nvPicPr>
+        <p:blipFill>
+          <a:blip r:embed="rId2"/>
+          <a:stretch>
+            <a:fillRect/>
+          </a:stretch>
+        </p:blipFill>
+        <p:spPr>
+          <a:xfrm>
+            <a:off x="6355080" y="2400300"/>
+            <a:ext cx="5486400" cy="3429000"/>
+          </a:xfrm>
+          <a:prstGeom prst="rect">
+            <a:avLst/>
+          </a:prstGeom>
+        </p:spPr>
+      </p:pic>
+    </p:spTree>
+  </p:cSld>
+  <p:clrMapOvr>
+    <a:masterClrMapping/>
+  </p:clrMapOvr>
+</p:sld>
+</file>
+
+<file path=ppt/slides/slide27.xml><?xml version="1.0" encoding="utf-8"?>
+<p:sld xmlns:a="http://schemas.openxmlformats.org/drawingml/2006/main" xmlns:p="http://schemas.openxmlformats.org/presentationml/2006/main" xmlns:r="http://schemas.openxmlformats.org/officeDocument/2006/relationships">
+  <p:cSld>
+    <p:bg>
+      <p:bgPr>
+        <a:solidFill>
+          <a:srgbClr val="FFFFFF"/>
+        </a:solidFill>
+        <a:effectLst/>
+      </p:bgPr>
+    </p:bg>
+    <p:spTree>
+      <p:nvGrpSpPr>
+        <p:cNvPr id="1" name=""/>
+        <p:cNvGrpSpPr/>
+        <p:nvPr/>
+      </p:nvGrpSpPr>
+      <p:grpSpPr/>
+      <p:sp>
+        <p:nvSpPr>
+          <p:cNvPr id="2" name="Rectangle 1"/>
+          <p:cNvSpPr/>
+          <p:nvPr/>
+        </p:nvSpPr>
+        <p:spPr>
+          <a:xfrm>
+            <a:off x="0" y="0"/>
+            <a:ext cx="12191695" cy="566928"/>
+          </a:xfrm>
+          <a:prstGeom prst="rect">
+            <a:avLst/>
+          </a:prstGeom>
+          <a:solidFill>
+            <a:srgbClr val="0D9488"/>
+          </a:solidFill>
+          <a:ln>
+            <a:noFill/>
+          </a:ln>
+          <a:effectLst/>
+        </p:spPr>
+        <p:style>
+          <a:lnRef idx="1">
+            <a:schemeClr val="accent1"/>
+          </a:lnRef>
+          <a:fillRef idx="3">
+            <a:schemeClr val="accent1"/>
+          </a:fillRef>
+          <a:effectRef idx="2">
+            <a:schemeClr val="accent1"/>
+          </a:effectRef>
+          <a:fontRef idx="minor">
+            <a:schemeClr val="lt1"/>
+          </a:fontRef>
+        </p:style>
+        <p:txBody>
+          <a:bodyPr rtlCol="0" anchor="ctr"/>
+          <a:lstStyle/>
+          <a:p>
+            <a:pPr algn="ctr"/>
+          </a:p>
+        </p:txBody>
+      </p:sp>
+      <p:sp>
+        <p:nvSpPr>
+          <p:cNvPr id="3" name="Rectangle 2"/>
+          <p:cNvSpPr/>
+          <p:nvPr/>
+        </p:nvSpPr>
+        <p:spPr>
+          <a:xfrm>
+            <a:off x="0" y="566928"/>
+            <a:ext cx="12191695" cy="54864"/>
+          </a:xfrm>
+          <a:prstGeom prst="rect">
+            <a:avLst/>
+          </a:prstGeom>
+          <a:solidFill>
+            <a:srgbClr val="F59E0B"/>
+          </a:solidFill>
+          <a:ln>
+            <a:noFill/>
+          </a:ln>
+          <a:effectLst/>
+        </p:spPr>
+        <p:style>
+          <a:lnRef idx="1">
+            <a:schemeClr val="accent1"/>
+          </a:lnRef>
+          <a:fillRef idx="3">
+            <a:schemeClr val="accent1"/>
+          </a:fillRef>
+          <a:effectRef idx="2">
+            <a:schemeClr val="accent1"/>
+          </a:effectRef>
+          <a:fontRef idx="minor">
+            <a:schemeClr val="lt1"/>
+          </a:fontRef>
+        </p:style>
+        <p:txBody>
+          <a:bodyPr rtlCol="0" anchor="ctr"/>
+          <a:lstStyle/>
+          <a:p>
+            <a:pPr algn="ctr"/>
+          </a:p>
+        </p:txBody>
+      </p:sp>
+      <p:sp>
+        <p:nvSpPr>
+          <p:cNvPr id="4" name="TextBox 3"/>
+          <p:cNvSpPr txBox="1"/>
+          <p:nvPr/>
+        </p:nvSpPr>
+        <p:spPr>
+          <a:xfrm>
+            <a:off x="365760" y="27432"/>
+            <a:ext cx="7315200" cy="502920"/>
+          </a:xfrm>
+          <a:prstGeom prst="rect">
+            <a:avLst/>
+          </a:prstGeom>
+          <a:noFill/>
+        </p:spPr>
+        <p:txBody>
+          <a:bodyPr wrap="square" anchor="ctr">
+            <a:spAutoFit/>
+          </a:bodyPr>
+          <a:lstStyle/>
+          <a:p>
+            <a:pPr algn="l">
+              <a:lnSpc>
+                <a:spcPct val="100000"/>
+              </a:lnSpc>
+            </a:pPr>
+            <a:r>
+              <a:rPr sz="1500" b="1">
+                <a:solidFill>
+                  <a:srgbClr val="FFFFFF"/>
+                </a:solidFill>
+                <a:latin typeface="Malgun Gothic"/>
+              </a:rPr>
+              <a:t>🏢 망고아이 지사용 사용설명서</a:t>
+            </a:r>
+          </a:p>
+        </p:txBody>
+      </p:sp>
+      <p:sp>
+        <p:nvSpPr>
+          <p:cNvPr id="5" name="TextBox 4"/>
+          <p:cNvSpPr txBox="1"/>
+          <p:nvPr/>
+        </p:nvSpPr>
+        <p:spPr>
+          <a:xfrm>
+            <a:off x="8168335" y="27432"/>
+            <a:ext cx="3657600" cy="502920"/>
+          </a:xfrm>
+          <a:prstGeom prst="rect">
+            <a:avLst/>
+          </a:prstGeom>
+          <a:noFill/>
+        </p:spPr>
+        <p:txBody>
+          <a:bodyPr wrap="square" anchor="ctr">
+            <a:spAutoFit/>
+          </a:bodyPr>
+          <a:lstStyle/>
+          <a:p>
+            <a:pPr algn="r">
+              <a:lnSpc>
+                <a:spcPct val="100000"/>
+              </a:lnSpc>
+            </a:pPr>
+            <a:r>
+              <a:rPr sz="1300" b="1">
+                <a:solidFill>
+                  <a:srgbClr val="F1F5F9"/>
+                </a:solidFill>
+                <a:latin typeface="Malgun Gothic"/>
+              </a:rPr>
+              <a:t>기능 요약 · 데이터</a:t>
+            </a:r>
+          </a:p>
+        </p:txBody>
+      </p:sp>
+      <p:sp>
+        <p:nvSpPr>
+          <p:cNvPr id="6" name="Rounded Rectangle 5"/>
+          <p:cNvSpPr/>
+          <p:nvPr/>
+        </p:nvSpPr>
+        <p:spPr>
+          <a:xfrm>
             <a:off x="365760" y="841248"/>
             <a:ext cx="658368" cy="512064"/>
           </a:xfrm>
+          <a:prstGeom prst="roundRect">
+            <a:avLst/>
+          </a:prstGeom>
+          <a:solidFill>
+            <a:srgbClr val="0D9488"/>
+          </a:solidFill>
+          <a:ln>
+            <a:noFill/>
+          </a:ln>
+          <a:effectLst/>
+        </p:spPr>
+        <p:style>
+          <a:lnRef idx="1">
+            <a:schemeClr val="accent1"/>
+          </a:lnRef>
+          <a:fillRef idx="3">
+            <a:schemeClr val="accent1"/>
+          </a:fillRef>
+          <a:effectRef idx="2">
+            <a:schemeClr val="accent1"/>
+          </a:effectRef>
+          <a:fontRef idx="minor">
+            <a:schemeClr val="lt1"/>
+          </a:fontRef>
+        </p:style>
+        <p:txBody>
+          <a:bodyPr rtlCol="0" anchor="ctr"/>
+          <a:lstStyle/>
+          <a:p>
+            <a:pPr algn="ctr"/>
+          </a:p>
+        </p:txBody>
+      </p:sp>
+      <p:sp>
+        <p:nvSpPr>
+          <p:cNvPr id="7" name="TextBox 6"/>
+          <p:cNvSpPr txBox="1"/>
+          <p:nvPr/>
+        </p:nvSpPr>
+        <p:spPr>
+          <a:xfrm>
+            <a:off x="365760" y="841248"/>
+            <a:ext cx="658368" cy="512064"/>
+          </a:xfrm>
           <a:prstGeom prst="rect">
             <a:avLst/>
           </a:prstGeom>
@@ -20044,7 +22186,7 @@
                 </a:solidFill>
                 <a:latin typeface="Malgun Gothic"/>
               </a:rPr>
-              <a:t>22</a:t>
+              <a:t>24</a:t>
             </a:r>
           </a:p>
         </p:txBody>
@@ -20876,7 +23018,7 @@
 </p:sld>
 </file>
 
-<file path=ppt/slides/slide26.xml><?xml version="1.0" encoding="utf-8"?>
+<file path=ppt/slides/slide28.xml><?xml version="1.0" encoding="utf-8"?>
 <p:sld xmlns:a="http://schemas.openxmlformats.org/drawingml/2006/main" xmlns:p="http://schemas.openxmlformats.org/presentationml/2006/main" xmlns:r="http://schemas.openxmlformats.org/officeDocument/2006/relationships">
   <p:cSld>
     <p:bg>
@@ -21138,7 +23280,7 @@
                 </a:solidFill>
                 <a:latin typeface="Malgun Gothic"/>
               </a:rPr>
-              <a:t>23</a:t>
+              <a:t>25</a:t>
             </a:r>
           </a:p>
         </p:txBody>
@@ -21296,1873 +23438,6 @@
           </a:graphicData>
         </a:graphic>
       </p:graphicFrame>
-    </p:spTree>
-  </p:cSld>
-  <p:clrMapOvr>
-    <a:masterClrMapping/>
-  </p:clrMapOvr>
-</p:sld>
-</file>
-
-<file path=ppt/slides/slide27.xml><?xml version="1.0" encoding="utf-8"?>
-<p:sld xmlns:a="http://schemas.openxmlformats.org/drawingml/2006/main" xmlns:p="http://schemas.openxmlformats.org/presentationml/2006/main" xmlns:r="http://schemas.openxmlformats.org/officeDocument/2006/relationships">
-  <p:cSld>
-    <p:bg>
-      <p:bgPr>
-        <a:solidFill>
-          <a:srgbClr val="FFFFFF"/>
-        </a:solidFill>
-        <a:effectLst/>
-      </p:bgPr>
-    </p:bg>
-    <p:spTree>
-      <p:nvGrpSpPr>
-        <p:cNvPr id="1" name=""/>
-        <p:cNvGrpSpPr/>
-        <p:nvPr/>
-      </p:nvGrpSpPr>
-      <p:grpSpPr/>
-      <p:sp>
-        <p:nvSpPr>
-          <p:cNvPr id="2" name="Rectangle 1"/>
-          <p:cNvSpPr/>
-          <p:nvPr/>
-        </p:nvSpPr>
-        <p:spPr>
-          <a:xfrm>
-            <a:off x="0" y="0"/>
-            <a:ext cx="12191695" cy="566928"/>
-          </a:xfrm>
-          <a:prstGeom prst="rect">
-            <a:avLst/>
-          </a:prstGeom>
-          <a:solidFill>
-            <a:srgbClr val="0D9488"/>
-          </a:solidFill>
-          <a:ln>
-            <a:noFill/>
-          </a:ln>
-          <a:effectLst/>
-        </p:spPr>
-        <p:style>
-          <a:lnRef idx="1">
-            <a:schemeClr val="accent1"/>
-          </a:lnRef>
-          <a:fillRef idx="3">
-            <a:schemeClr val="accent1"/>
-          </a:fillRef>
-          <a:effectRef idx="2">
-            <a:schemeClr val="accent1"/>
-          </a:effectRef>
-          <a:fontRef idx="minor">
-            <a:schemeClr val="lt1"/>
-          </a:fontRef>
-        </p:style>
-        <p:txBody>
-          <a:bodyPr rtlCol="0" anchor="ctr"/>
-          <a:lstStyle/>
-          <a:p>
-            <a:pPr algn="ctr"/>
-          </a:p>
-        </p:txBody>
-      </p:sp>
-      <p:sp>
-        <p:nvSpPr>
-          <p:cNvPr id="3" name="Rectangle 2"/>
-          <p:cNvSpPr/>
-          <p:nvPr/>
-        </p:nvSpPr>
-        <p:spPr>
-          <a:xfrm>
-            <a:off x="0" y="566928"/>
-            <a:ext cx="12191695" cy="54864"/>
-          </a:xfrm>
-          <a:prstGeom prst="rect">
-            <a:avLst/>
-          </a:prstGeom>
-          <a:solidFill>
-            <a:srgbClr val="F59E0B"/>
-          </a:solidFill>
-          <a:ln>
-            <a:noFill/>
-          </a:ln>
-          <a:effectLst/>
-        </p:spPr>
-        <p:style>
-          <a:lnRef idx="1">
-            <a:schemeClr val="accent1"/>
-          </a:lnRef>
-          <a:fillRef idx="3">
-            <a:schemeClr val="accent1"/>
-          </a:fillRef>
-          <a:effectRef idx="2">
-            <a:schemeClr val="accent1"/>
-          </a:effectRef>
-          <a:fontRef idx="minor">
-            <a:schemeClr val="lt1"/>
-          </a:fontRef>
-        </p:style>
-        <p:txBody>
-          <a:bodyPr rtlCol="0" anchor="ctr"/>
-          <a:lstStyle/>
-          <a:p>
-            <a:pPr algn="ctr"/>
-          </a:p>
-        </p:txBody>
-      </p:sp>
-      <p:sp>
-        <p:nvSpPr>
-          <p:cNvPr id="4" name="TextBox 3"/>
-          <p:cNvSpPr txBox="1"/>
-          <p:nvPr/>
-        </p:nvSpPr>
-        <p:spPr>
-          <a:xfrm>
-            <a:off x="365760" y="27432"/>
-            <a:ext cx="7315200" cy="502920"/>
-          </a:xfrm>
-          <a:prstGeom prst="rect">
-            <a:avLst/>
-          </a:prstGeom>
-          <a:noFill/>
-        </p:spPr>
-        <p:txBody>
-          <a:bodyPr wrap="square" anchor="ctr">
-            <a:spAutoFit/>
-          </a:bodyPr>
-          <a:lstStyle/>
-          <a:p>
-            <a:pPr algn="l">
-              <a:lnSpc>
-                <a:spcPct val="100000"/>
-              </a:lnSpc>
-            </a:pPr>
-            <a:r>
-              <a:rPr sz="1500" b="1">
-                <a:solidFill>
-                  <a:srgbClr val="FFFFFF"/>
-                </a:solidFill>
-                <a:latin typeface="Malgun Gothic"/>
-              </a:rPr>
-              <a:t>🏢 망고아이 지사용 사용설명서</a:t>
-            </a:r>
-          </a:p>
-        </p:txBody>
-      </p:sp>
-      <p:sp>
-        <p:nvSpPr>
-          <p:cNvPr id="5" name="TextBox 4"/>
-          <p:cNvSpPr txBox="1"/>
-          <p:nvPr/>
-        </p:nvSpPr>
-        <p:spPr>
-          <a:xfrm>
-            <a:off x="8168335" y="27432"/>
-            <a:ext cx="3657600" cy="502920"/>
-          </a:xfrm>
-          <a:prstGeom prst="rect">
-            <a:avLst/>
-          </a:prstGeom>
-          <a:noFill/>
-        </p:spPr>
-        <p:txBody>
-          <a:bodyPr wrap="square" anchor="ctr">
-            <a:spAutoFit/>
-          </a:bodyPr>
-          <a:lstStyle/>
-          <a:p>
-            <a:pPr algn="r">
-              <a:lnSpc>
-                <a:spcPct val="100000"/>
-              </a:lnSpc>
-            </a:pPr>
-            <a:r>
-              <a:rPr sz="1300" b="1">
-                <a:solidFill>
-                  <a:srgbClr val="F1F5F9"/>
-                </a:solidFill>
-                <a:latin typeface="Malgun Gothic"/>
-              </a:rPr>
-              <a:t>자주 묻는 질문 (FAQ)</a:t>
-            </a:r>
-          </a:p>
-        </p:txBody>
-      </p:sp>
-      <p:sp>
-        <p:nvSpPr>
-          <p:cNvPr id="6" name="Rounded Rectangle 5"/>
-          <p:cNvSpPr/>
-          <p:nvPr/>
-        </p:nvSpPr>
-        <p:spPr>
-          <a:xfrm>
-            <a:off x="365760" y="841248"/>
-            <a:ext cx="658368" cy="512064"/>
-          </a:xfrm>
-          <a:prstGeom prst="roundRect">
-            <a:avLst/>
-          </a:prstGeom>
-          <a:solidFill>
-            <a:srgbClr val="0D9488"/>
-          </a:solidFill>
-          <a:ln>
-            <a:noFill/>
-          </a:ln>
-          <a:effectLst/>
-        </p:spPr>
-        <p:style>
-          <a:lnRef idx="1">
-            <a:schemeClr val="accent1"/>
-          </a:lnRef>
-          <a:fillRef idx="3">
-            <a:schemeClr val="accent1"/>
-          </a:fillRef>
-          <a:effectRef idx="2">
-            <a:schemeClr val="accent1"/>
-          </a:effectRef>
-          <a:fontRef idx="minor">
-            <a:schemeClr val="lt1"/>
-          </a:fontRef>
-        </p:style>
-        <p:txBody>
-          <a:bodyPr rtlCol="0" anchor="ctr"/>
-          <a:lstStyle/>
-          <a:p>
-            <a:pPr algn="ctr"/>
-          </a:p>
-        </p:txBody>
-      </p:sp>
-      <p:sp>
-        <p:nvSpPr>
-          <p:cNvPr id="7" name="TextBox 6"/>
-          <p:cNvSpPr txBox="1"/>
-          <p:nvPr/>
-        </p:nvSpPr>
-        <p:spPr>
-          <a:xfrm>
-            <a:off x="365760" y="841248"/>
-            <a:ext cx="658368" cy="512064"/>
-          </a:xfrm>
-          <a:prstGeom prst="rect">
-            <a:avLst/>
-          </a:prstGeom>
-          <a:noFill/>
-        </p:spPr>
-        <p:txBody>
-          <a:bodyPr wrap="square" anchor="ctr">
-            <a:spAutoFit/>
-          </a:bodyPr>
-          <a:lstStyle/>
-          <a:p>
-            <a:pPr algn="ctr">
-              <a:lnSpc>
-                <a:spcPct val="100000"/>
-              </a:lnSpc>
-            </a:pPr>
-            <a:r>
-              <a:rPr sz="1700" b="1">
-                <a:solidFill>
-                  <a:srgbClr val="FFFFFF"/>
-                </a:solidFill>
-                <a:latin typeface="Malgun Gothic"/>
-              </a:rPr>
-              <a:t>24</a:t>
-            </a:r>
-          </a:p>
-        </p:txBody>
-      </p:sp>
-      <p:sp>
-        <p:nvSpPr>
-          <p:cNvPr id="8" name="TextBox 7"/>
-          <p:cNvSpPr txBox="1"/>
-          <p:nvPr/>
-        </p:nvSpPr>
-        <p:spPr>
-          <a:xfrm>
-            <a:off x="1143000" y="868680"/>
-            <a:ext cx="9144000" cy="457200"/>
-          </a:xfrm>
-          <a:prstGeom prst="rect">
-            <a:avLst/>
-          </a:prstGeom>
-          <a:noFill/>
-        </p:spPr>
-        <p:txBody>
-          <a:bodyPr wrap="square" anchor="t">
-            <a:spAutoFit/>
-          </a:bodyPr>
-          <a:lstStyle/>
-          <a:p>
-            <a:pPr algn="l">
-              <a:lnSpc>
-                <a:spcPct val="100000"/>
-              </a:lnSpc>
-            </a:pPr>
-            <a:r>
-              <a:rPr sz="2200" b="1">
-                <a:solidFill>
-                  <a:srgbClr val="0D9488"/>
-                </a:solidFill>
-                <a:latin typeface="Malgun Gothic"/>
-              </a:rPr>
-              <a:t>❓ 자주 묻는 질문 (FAQ)</a:t>
-            </a:r>
-          </a:p>
-        </p:txBody>
-      </p:sp>
-      <p:sp>
-        <p:nvSpPr>
-          <p:cNvPr id="9" name="Rounded Rectangle 8"/>
-          <p:cNvSpPr/>
-          <p:nvPr/>
-        </p:nvSpPr>
-        <p:spPr>
-          <a:xfrm>
-            <a:off x="365760" y="1554480"/>
-            <a:ext cx="11460175" cy="868680"/>
-          </a:xfrm>
-          <a:prstGeom prst="roundRect">
-            <a:avLst/>
-          </a:prstGeom>
-          <a:solidFill>
-            <a:srgbClr val="F8FAFC"/>
-          </a:solidFill>
-          <a:ln w="12700">
-            <a:solidFill>
-              <a:srgbClr val="E2E8F0"/>
-            </a:solidFill>
-          </a:ln>
-          <a:effectLst/>
-        </p:spPr>
-        <p:style>
-          <a:lnRef idx="1">
-            <a:schemeClr val="accent1"/>
-          </a:lnRef>
-          <a:fillRef idx="3">
-            <a:schemeClr val="accent1"/>
-          </a:fillRef>
-          <a:effectRef idx="2">
-            <a:schemeClr val="accent1"/>
-          </a:effectRef>
-          <a:fontRef idx="minor">
-            <a:schemeClr val="lt1"/>
-          </a:fontRef>
-        </p:style>
-        <p:txBody>
-          <a:bodyPr rtlCol="0" anchor="ctr"/>
-          <a:lstStyle/>
-          <a:p>
-            <a:pPr algn="ctr"/>
-          </a:p>
-        </p:txBody>
-      </p:sp>
-      <p:sp>
-        <p:nvSpPr>
-          <p:cNvPr id="10" name="TextBox 9"/>
-          <p:cNvSpPr txBox="1"/>
-          <p:nvPr/>
-        </p:nvSpPr>
-        <p:spPr>
-          <a:xfrm>
-            <a:off x="548640" y="1627632"/>
-            <a:ext cx="11094415" cy="365760"/>
-          </a:xfrm>
-          <a:prstGeom prst="rect">
-            <a:avLst/>
-          </a:prstGeom>
-          <a:noFill/>
-        </p:spPr>
-        <p:txBody>
-          <a:bodyPr wrap="square" anchor="t">
-            <a:spAutoFit/>
-          </a:bodyPr>
-          <a:lstStyle/>
-          <a:p>
-            <a:pPr algn="l">
-              <a:lnSpc>
-                <a:spcPct val="100000"/>
-              </a:lnSpc>
-            </a:pPr>
-            <a:r>
-              <a:rPr sz="1350" b="1">
-                <a:solidFill>
-                  <a:srgbClr val="0D9488"/>
-                </a:solidFill>
-                <a:latin typeface="Malgun Gothic"/>
-              </a:rPr>
-              <a:t>Q. 어디서 접속하나요?</a:t>
-            </a:r>
-          </a:p>
-        </p:txBody>
-      </p:sp>
-      <p:sp>
-        <p:nvSpPr>
-          <p:cNvPr id="11" name="TextBox 10"/>
-          <p:cNvSpPr txBox="1"/>
-          <p:nvPr/>
-        </p:nvSpPr>
-        <p:spPr>
-          <a:xfrm>
-            <a:off x="548640" y="1965960"/>
-            <a:ext cx="11094415" cy="411480"/>
-          </a:xfrm>
-          <a:prstGeom prst="rect">
-            <a:avLst/>
-          </a:prstGeom>
-          <a:noFill/>
-        </p:spPr>
-        <p:txBody>
-          <a:bodyPr wrap="square" anchor="t">
-            <a:spAutoFit/>
-          </a:bodyPr>
-          <a:lstStyle/>
-          <a:p>
-            <a:pPr algn="l">
-              <a:lnSpc>
-                <a:spcPct val="105000"/>
-              </a:lnSpc>
-            </a:pPr>
-            <a:r>
-              <a:rPr sz="1150" b="0">
-                <a:solidFill>
-                  <a:srgbClr val="475569"/>
-                </a:solidFill>
-                <a:latin typeface="Malgun Gothic"/>
-              </a:rPr>
-              <a:t>A. admin.mangoi.co.kr 에서 로그인해요. 권한(지사)에 따라 우리 지사 데이터만 자동으로 보여요.</a:t>
-            </a:r>
-          </a:p>
-        </p:txBody>
-      </p:sp>
-      <p:sp>
-        <p:nvSpPr>
-          <p:cNvPr id="12" name="Rounded Rectangle 11"/>
-          <p:cNvSpPr/>
-          <p:nvPr/>
-        </p:nvSpPr>
-        <p:spPr>
-          <a:xfrm>
-            <a:off x="365760" y="2542032"/>
-            <a:ext cx="11460175" cy="868680"/>
-          </a:xfrm>
-          <a:prstGeom prst="roundRect">
-            <a:avLst/>
-          </a:prstGeom>
-          <a:solidFill>
-            <a:srgbClr val="F8FAFC"/>
-          </a:solidFill>
-          <a:ln w="12700">
-            <a:solidFill>
-              <a:srgbClr val="E2E8F0"/>
-            </a:solidFill>
-          </a:ln>
-          <a:effectLst/>
-        </p:spPr>
-        <p:style>
-          <a:lnRef idx="1">
-            <a:schemeClr val="accent1"/>
-          </a:lnRef>
-          <a:fillRef idx="3">
-            <a:schemeClr val="accent1"/>
-          </a:fillRef>
-          <a:effectRef idx="2">
-            <a:schemeClr val="accent1"/>
-          </a:effectRef>
-          <a:fontRef idx="minor">
-            <a:schemeClr val="lt1"/>
-          </a:fontRef>
-        </p:style>
-        <p:txBody>
-          <a:bodyPr rtlCol="0" anchor="ctr"/>
-          <a:lstStyle/>
-          <a:p>
-            <a:pPr algn="ctr"/>
-          </a:p>
-        </p:txBody>
-      </p:sp>
-      <p:sp>
-        <p:nvSpPr>
-          <p:cNvPr id="13" name="TextBox 12"/>
-          <p:cNvSpPr txBox="1"/>
-          <p:nvPr/>
-        </p:nvSpPr>
-        <p:spPr>
-          <a:xfrm>
-            <a:off x="548640" y="2615184"/>
-            <a:ext cx="11094415" cy="365760"/>
-          </a:xfrm>
-          <a:prstGeom prst="rect">
-            <a:avLst/>
-          </a:prstGeom>
-          <a:noFill/>
-        </p:spPr>
-        <p:txBody>
-          <a:bodyPr wrap="square" anchor="t">
-            <a:spAutoFit/>
-          </a:bodyPr>
-          <a:lstStyle/>
-          <a:p>
-            <a:pPr algn="l">
-              <a:lnSpc>
-                <a:spcPct val="100000"/>
-              </a:lnSpc>
-            </a:pPr>
-            <a:r>
-              <a:rPr sz="1350" b="1">
-                <a:solidFill>
-                  <a:srgbClr val="0D9488"/>
-                </a:solidFill>
-                <a:latin typeface="Malgun Gothic"/>
-              </a:rPr>
-              <a:t>Q. 다른 지사 데이터도 보이나요?</a:t>
-            </a:r>
-          </a:p>
-        </p:txBody>
-      </p:sp>
-      <p:sp>
-        <p:nvSpPr>
-          <p:cNvPr id="14" name="TextBox 13"/>
-          <p:cNvSpPr txBox="1"/>
-          <p:nvPr/>
-        </p:nvSpPr>
-        <p:spPr>
-          <a:xfrm>
-            <a:off x="548640" y="2953512"/>
-            <a:ext cx="11094415" cy="411480"/>
-          </a:xfrm>
-          <a:prstGeom prst="rect">
-            <a:avLst/>
-          </a:prstGeom>
-          <a:noFill/>
-        </p:spPr>
-        <p:txBody>
-          <a:bodyPr wrap="square" anchor="t">
-            <a:spAutoFit/>
-          </a:bodyPr>
-          <a:lstStyle/>
-          <a:p>
-            <a:pPr algn="l">
-              <a:lnSpc>
-                <a:spcPct val="105000"/>
-              </a:lnSpc>
-            </a:pPr>
-            <a:r>
-              <a:rPr sz="1150" b="0">
-                <a:solidFill>
-                  <a:srgbClr val="475569"/>
-                </a:solidFill>
-                <a:latin typeface="Malgun Gothic"/>
-              </a:rPr>
-              <a:t>A. 아니요. 권한 범위상 우리 지사와 산하 대리점 데이터만 보입니다.</a:t>
-            </a:r>
-          </a:p>
-        </p:txBody>
-      </p:sp>
-      <p:sp>
-        <p:nvSpPr>
-          <p:cNvPr id="15" name="Rounded Rectangle 14"/>
-          <p:cNvSpPr/>
-          <p:nvPr/>
-        </p:nvSpPr>
-        <p:spPr>
-          <a:xfrm>
-            <a:off x="365760" y="3529584"/>
-            <a:ext cx="11460175" cy="868680"/>
-          </a:xfrm>
-          <a:prstGeom prst="roundRect">
-            <a:avLst/>
-          </a:prstGeom>
-          <a:solidFill>
-            <a:srgbClr val="F8FAFC"/>
-          </a:solidFill>
-          <a:ln w="12700">
-            <a:solidFill>
-              <a:srgbClr val="E2E8F0"/>
-            </a:solidFill>
-          </a:ln>
-          <a:effectLst/>
-        </p:spPr>
-        <p:style>
-          <a:lnRef idx="1">
-            <a:schemeClr val="accent1"/>
-          </a:lnRef>
-          <a:fillRef idx="3">
-            <a:schemeClr val="accent1"/>
-          </a:fillRef>
-          <a:effectRef idx="2">
-            <a:schemeClr val="accent1"/>
-          </a:effectRef>
-          <a:fontRef idx="minor">
-            <a:schemeClr val="lt1"/>
-          </a:fontRef>
-        </p:style>
-        <p:txBody>
-          <a:bodyPr rtlCol="0" anchor="ctr"/>
-          <a:lstStyle/>
-          <a:p>
-            <a:pPr algn="ctr"/>
-          </a:p>
-        </p:txBody>
-      </p:sp>
-      <p:sp>
-        <p:nvSpPr>
-          <p:cNvPr id="16" name="TextBox 15"/>
-          <p:cNvSpPr txBox="1"/>
-          <p:nvPr/>
-        </p:nvSpPr>
-        <p:spPr>
-          <a:xfrm>
-            <a:off x="548640" y="3602736"/>
-            <a:ext cx="11094415" cy="365760"/>
-          </a:xfrm>
-          <a:prstGeom prst="rect">
-            <a:avLst/>
-          </a:prstGeom>
-          <a:noFill/>
-        </p:spPr>
-        <p:txBody>
-          <a:bodyPr wrap="square" anchor="t">
-            <a:spAutoFit/>
-          </a:bodyPr>
-          <a:lstStyle/>
-          <a:p>
-            <a:pPr algn="l">
-              <a:lnSpc>
-                <a:spcPct val="100000"/>
-              </a:lnSpc>
-            </a:pPr>
-            <a:r>
-              <a:rPr sz="1350" b="1">
-                <a:solidFill>
-                  <a:srgbClr val="0D9488"/>
-                </a:solidFill>
-                <a:latin typeface="Malgun Gothic"/>
-              </a:rPr>
-              <a:t>Q. 정산은 어떻게 계산되나요?</a:t>
-            </a:r>
-          </a:p>
-        </p:txBody>
-      </p:sp>
-      <p:sp>
-        <p:nvSpPr>
-          <p:cNvPr id="17" name="TextBox 16"/>
-          <p:cNvSpPr txBox="1"/>
-          <p:nvPr/>
-        </p:nvSpPr>
-        <p:spPr>
-          <a:xfrm>
-            <a:off x="548640" y="3941064"/>
-            <a:ext cx="11094415" cy="411480"/>
-          </a:xfrm>
-          <a:prstGeom prst="rect">
-            <a:avLst/>
-          </a:prstGeom>
-          <a:noFill/>
-        </p:spPr>
-        <p:txBody>
-          <a:bodyPr wrap="square" anchor="t">
-            <a:spAutoFit/>
-          </a:bodyPr>
-          <a:lstStyle/>
-          <a:p>
-            <a:pPr algn="l">
-              <a:lnSpc>
-                <a:spcPct val="105000"/>
-              </a:lnSpc>
-            </a:pPr>
-            <a:r>
-              <a:rPr sz="1150" b="0">
-                <a:solidFill>
-                  <a:srgbClr val="475569"/>
-                </a:solidFill>
-                <a:latin typeface="Malgun Gothic"/>
-              </a:rPr>
-              <a:t>A. 조직 트리(본사→지사→대리점)를 따라 매출·수수료가 자동 계산됩니다. 월간 리포트에서 확인하세요.</a:t>
-            </a:r>
-          </a:p>
-        </p:txBody>
-      </p:sp>
-      <p:sp>
-        <p:nvSpPr>
-          <p:cNvPr id="18" name="Rounded Rectangle 17"/>
-          <p:cNvSpPr/>
-          <p:nvPr/>
-        </p:nvSpPr>
-        <p:spPr>
-          <a:xfrm>
-            <a:off x="365760" y="4517136"/>
-            <a:ext cx="11460175" cy="868680"/>
-          </a:xfrm>
-          <a:prstGeom prst="roundRect">
-            <a:avLst/>
-          </a:prstGeom>
-          <a:solidFill>
-            <a:srgbClr val="F8FAFC"/>
-          </a:solidFill>
-          <a:ln w="12700">
-            <a:solidFill>
-              <a:srgbClr val="E2E8F0"/>
-            </a:solidFill>
-          </a:ln>
-          <a:effectLst/>
-        </p:spPr>
-        <p:style>
-          <a:lnRef idx="1">
-            <a:schemeClr val="accent1"/>
-          </a:lnRef>
-          <a:fillRef idx="3">
-            <a:schemeClr val="accent1"/>
-          </a:fillRef>
-          <a:effectRef idx="2">
-            <a:schemeClr val="accent1"/>
-          </a:effectRef>
-          <a:fontRef idx="minor">
-            <a:schemeClr val="lt1"/>
-          </a:fontRef>
-        </p:style>
-        <p:txBody>
-          <a:bodyPr rtlCol="0" anchor="ctr"/>
-          <a:lstStyle/>
-          <a:p>
-            <a:pPr algn="ctr"/>
-          </a:p>
-        </p:txBody>
-      </p:sp>
-      <p:sp>
-        <p:nvSpPr>
-          <p:cNvPr id="19" name="TextBox 18"/>
-          <p:cNvSpPr txBox="1"/>
-          <p:nvPr/>
-        </p:nvSpPr>
-        <p:spPr>
-          <a:xfrm>
-            <a:off x="548640" y="4590288"/>
-            <a:ext cx="11094415" cy="365760"/>
-          </a:xfrm>
-          <a:prstGeom prst="rect">
-            <a:avLst/>
-          </a:prstGeom>
-          <a:noFill/>
-        </p:spPr>
-        <p:txBody>
-          <a:bodyPr wrap="square" anchor="t">
-            <a:spAutoFit/>
-          </a:bodyPr>
-          <a:lstStyle/>
-          <a:p>
-            <a:pPr algn="l">
-              <a:lnSpc>
-                <a:spcPct val="100000"/>
-              </a:lnSpc>
-            </a:pPr>
-            <a:r>
-              <a:rPr sz="1350" b="1">
-                <a:solidFill>
-                  <a:srgbClr val="0D9488"/>
-                </a:solidFill>
-                <a:latin typeface="Malgun Gothic"/>
-              </a:rPr>
-              <a:t>Q. 대리점 성과가 부진해요.</a:t>
-            </a:r>
-          </a:p>
-        </p:txBody>
-      </p:sp>
-      <p:sp>
-        <p:nvSpPr>
-          <p:cNvPr id="20" name="TextBox 19"/>
-          <p:cNvSpPr txBox="1"/>
-          <p:nvPr/>
-        </p:nvSpPr>
-        <p:spPr>
-          <a:xfrm>
-            <a:off x="548640" y="4928616"/>
-            <a:ext cx="11094415" cy="411480"/>
-          </a:xfrm>
-          <a:prstGeom prst="rect">
-            <a:avLst/>
-          </a:prstGeom>
-          <a:noFill/>
-        </p:spPr>
-        <p:txBody>
-          <a:bodyPr wrap="square" anchor="t">
-            <a:spAutoFit/>
-          </a:bodyPr>
-          <a:lstStyle/>
-          <a:p>
-            <a:pPr algn="l">
-              <a:lnSpc>
-                <a:spcPct val="105000"/>
-              </a:lnSpc>
-            </a:pPr>
-            <a:r>
-              <a:rPr sz="1150" b="0">
-                <a:solidFill>
-                  <a:srgbClr val="475569"/>
-                </a:solidFill>
-                <a:latin typeface="Malgun Gothic"/>
-              </a:rPr>
-              <a:t>A. 리텐션·회계·리포트로 원인을 찾고, 온보딩·코칭·인센티브로 지원하세요. 우수 사례 공유도 효과적입니다.</a:t>
-            </a:r>
-          </a:p>
-        </p:txBody>
-      </p:sp>
-      <p:sp>
-        <p:nvSpPr>
-          <p:cNvPr id="21" name="Rounded Rectangle 20"/>
-          <p:cNvSpPr/>
-          <p:nvPr/>
-        </p:nvSpPr>
-        <p:spPr>
-          <a:xfrm>
-            <a:off x="365760" y="5504688"/>
-            <a:ext cx="11460175" cy="868680"/>
-          </a:xfrm>
-          <a:prstGeom prst="roundRect">
-            <a:avLst/>
-          </a:prstGeom>
-          <a:solidFill>
-            <a:srgbClr val="F8FAFC"/>
-          </a:solidFill>
-          <a:ln w="12700">
-            <a:solidFill>
-              <a:srgbClr val="E2E8F0"/>
-            </a:solidFill>
-          </a:ln>
-          <a:effectLst/>
-        </p:spPr>
-        <p:style>
-          <a:lnRef idx="1">
-            <a:schemeClr val="accent1"/>
-          </a:lnRef>
-          <a:fillRef idx="3">
-            <a:schemeClr val="accent1"/>
-          </a:fillRef>
-          <a:effectRef idx="2">
-            <a:schemeClr val="accent1"/>
-          </a:effectRef>
-          <a:fontRef idx="minor">
-            <a:schemeClr val="lt1"/>
-          </a:fontRef>
-        </p:style>
-        <p:txBody>
-          <a:bodyPr rtlCol="0" anchor="ctr"/>
-          <a:lstStyle/>
-          <a:p>
-            <a:pPr algn="ctr"/>
-          </a:p>
-        </p:txBody>
-      </p:sp>
-      <p:sp>
-        <p:nvSpPr>
-          <p:cNvPr id="22" name="TextBox 21"/>
-          <p:cNvSpPr txBox="1"/>
-          <p:nvPr/>
-        </p:nvSpPr>
-        <p:spPr>
-          <a:xfrm>
-            <a:off x="548640" y="5577840"/>
-            <a:ext cx="11094415" cy="365760"/>
-          </a:xfrm>
-          <a:prstGeom prst="rect">
-            <a:avLst/>
-          </a:prstGeom>
-          <a:noFill/>
-        </p:spPr>
-        <p:txBody>
-          <a:bodyPr wrap="square" anchor="t">
-            <a:spAutoFit/>
-          </a:bodyPr>
-          <a:lstStyle/>
-          <a:p>
-            <a:pPr algn="l">
-              <a:lnSpc>
-                <a:spcPct val="100000"/>
-              </a:lnSpc>
-            </a:pPr>
-            <a:r>
-              <a:rPr sz="1350" b="1">
-                <a:solidFill>
-                  <a:srgbClr val="0D9488"/>
-                </a:solidFill>
-                <a:latin typeface="Malgun Gothic"/>
-              </a:rPr>
-              <a:t>Q. 시스템 문제가 생겼어요.</a:t>
-            </a:r>
-          </a:p>
-        </p:txBody>
-      </p:sp>
-      <p:sp>
-        <p:nvSpPr>
-          <p:cNvPr id="23" name="TextBox 22"/>
-          <p:cNvSpPr txBox="1"/>
-          <p:nvPr/>
-        </p:nvSpPr>
-        <p:spPr>
-          <a:xfrm>
-            <a:off x="548640" y="5916168"/>
-            <a:ext cx="11094415" cy="411480"/>
-          </a:xfrm>
-          <a:prstGeom prst="rect">
-            <a:avLst/>
-          </a:prstGeom>
-          <a:noFill/>
-        </p:spPr>
-        <p:txBody>
-          <a:bodyPr wrap="square" anchor="t">
-            <a:spAutoFit/>
-          </a:bodyPr>
-          <a:lstStyle/>
-          <a:p>
-            <a:pPr algn="l">
-              <a:lnSpc>
-                <a:spcPct val="105000"/>
-              </a:lnSpc>
-            </a:pPr>
-            <a:r>
-              <a:rPr sz="1150" b="0">
-                <a:solidFill>
-                  <a:srgbClr val="475569"/>
-                </a:solidFill>
-                <a:latin typeface="Malgun Gothic"/>
-              </a:rPr>
-              <a:t>A. 본사 고객센터(전화·이메일·카카오·원격지원)로 문의하면 빠르게 해결됩니다.</a:t>
-            </a:r>
-          </a:p>
-        </p:txBody>
-      </p:sp>
-    </p:spTree>
-  </p:cSld>
-  <p:clrMapOvr>
-    <a:masterClrMapping/>
-  </p:clrMapOvr>
-</p:sld>
-</file>
-
-<file path=ppt/slides/slide28.xml><?xml version="1.0" encoding="utf-8"?>
-<p:sld xmlns:a="http://schemas.openxmlformats.org/drawingml/2006/main" xmlns:p="http://schemas.openxmlformats.org/presentationml/2006/main" xmlns:r="http://schemas.openxmlformats.org/officeDocument/2006/relationships">
-  <p:cSld>
-    <p:bg>
-      <p:bgPr>
-        <a:solidFill>
-          <a:srgbClr val="ECFDF5"/>
-        </a:solidFill>
-        <a:effectLst/>
-      </p:bgPr>
-    </p:bg>
-    <p:spTree>
-      <p:nvGrpSpPr>
-        <p:cNvPr id="1" name=""/>
-        <p:cNvGrpSpPr/>
-        <p:nvPr/>
-      </p:nvGrpSpPr>
-      <p:grpSpPr/>
-      <p:sp>
-        <p:nvSpPr>
-          <p:cNvPr id="2" name="Rectangle 1"/>
-          <p:cNvSpPr/>
-          <p:nvPr/>
-        </p:nvSpPr>
-        <p:spPr>
-          <a:xfrm>
-            <a:off x="0" y="0"/>
-            <a:ext cx="12191695" cy="566928"/>
-          </a:xfrm>
-          <a:prstGeom prst="rect">
-            <a:avLst/>
-          </a:prstGeom>
-          <a:solidFill>
-            <a:srgbClr val="0D9488"/>
-          </a:solidFill>
-          <a:ln>
-            <a:noFill/>
-          </a:ln>
-          <a:effectLst/>
-        </p:spPr>
-        <p:style>
-          <a:lnRef idx="1">
-            <a:schemeClr val="accent1"/>
-          </a:lnRef>
-          <a:fillRef idx="3">
-            <a:schemeClr val="accent1"/>
-          </a:fillRef>
-          <a:effectRef idx="2">
-            <a:schemeClr val="accent1"/>
-          </a:effectRef>
-          <a:fontRef idx="minor">
-            <a:schemeClr val="lt1"/>
-          </a:fontRef>
-        </p:style>
-        <p:txBody>
-          <a:bodyPr rtlCol="0" anchor="ctr"/>
-          <a:lstStyle/>
-          <a:p>
-            <a:pPr algn="ctr"/>
-          </a:p>
-        </p:txBody>
-      </p:sp>
-      <p:sp>
-        <p:nvSpPr>
-          <p:cNvPr id="3" name="Rectangle 2"/>
-          <p:cNvSpPr/>
-          <p:nvPr/>
-        </p:nvSpPr>
-        <p:spPr>
-          <a:xfrm>
-            <a:off x="0" y="566928"/>
-            <a:ext cx="12191695" cy="54864"/>
-          </a:xfrm>
-          <a:prstGeom prst="rect">
-            <a:avLst/>
-          </a:prstGeom>
-          <a:solidFill>
-            <a:srgbClr val="F59E0B"/>
-          </a:solidFill>
-          <a:ln>
-            <a:noFill/>
-          </a:ln>
-          <a:effectLst/>
-        </p:spPr>
-        <p:style>
-          <a:lnRef idx="1">
-            <a:schemeClr val="accent1"/>
-          </a:lnRef>
-          <a:fillRef idx="3">
-            <a:schemeClr val="accent1"/>
-          </a:fillRef>
-          <a:effectRef idx="2">
-            <a:schemeClr val="accent1"/>
-          </a:effectRef>
-          <a:fontRef idx="minor">
-            <a:schemeClr val="lt1"/>
-          </a:fontRef>
-        </p:style>
-        <p:txBody>
-          <a:bodyPr rtlCol="0" anchor="ctr"/>
-          <a:lstStyle/>
-          <a:p>
-            <a:pPr algn="ctr"/>
-          </a:p>
-        </p:txBody>
-      </p:sp>
-      <p:sp>
-        <p:nvSpPr>
-          <p:cNvPr id="4" name="TextBox 3"/>
-          <p:cNvSpPr txBox="1"/>
-          <p:nvPr/>
-        </p:nvSpPr>
-        <p:spPr>
-          <a:xfrm>
-            <a:off x="365760" y="27432"/>
-            <a:ext cx="7315200" cy="502920"/>
-          </a:xfrm>
-          <a:prstGeom prst="rect">
-            <a:avLst/>
-          </a:prstGeom>
-          <a:noFill/>
-        </p:spPr>
-        <p:txBody>
-          <a:bodyPr wrap="square" anchor="ctr">
-            <a:spAutoFit/>
-          </a:bodyPr>
-          <a:lstStyle/>
-          <a:p>
-            <a:pPr algn="l">
-              <a:lnSpc>
-                <a:spcPct val="100000"/>
-              </a:lnSpc>
-            </a:pPr>
-            <a:r>
-              <a:rPr sz="1500" b="1">
-                <a:solidFill>
-                  <a:srgbClr val="FFFFFF"/>
-                </a:solidFill>
-                <a:latin typeface="Malgun Gothic"/>
-              </a:rPr>
-              <a:t>🏢 망고아이 지사용 사용설명서</a:t>
-            </a:r>
-          </a:p>
-        </p:txBody>
-      </p:sp>
-      <p:sp>
-        <p:nvSpPr>
-          <p:cNvPr id="5" name="TextBox 4"/>
-          <p:cNvSpPr txBox="1"/>
-          <p:nvPr/>
-        </p:nvSpPr>
-        <p:spPr>
-          <a:xfrm>
-            <a:off x="8168335" y="27432"/>
-            <a:ext cx="3657600" cy="502920"/>
-          </a:xfrm>
-          <a:prstGeom prst="rect">
-            <a:avLst/>
-          </a:prstGeom>
-          <a:noFill/>
-        </p:spPr>
-        <p:txBody>
-          <a:bodyPr wrap="square" anchor="ctr">
-            <a:spAutoFit/>
-          </a:bodyPr>
-          <a:lstStyle/>
-          <a:p>
-            <a:pPr algn="r">
-              <a:lnSpc>
-                <a:spcPct val="100000"/>
-              </a:lnSpc>
-            </a:pPr>
-            <a:r>
-              <a:rPr sz="1300" b="1">
-                <a:solidFill>
-                  <a:srgbClr val="F1F5F9"/>
-                </a:solidFill>
-                <a:latin typeface="Malgun Gothic"/>
-              </a:rPr>
-              <a:t>체크리스트</a:t>
-            </a:r>
-          </a:p>
-        </p:txBody>
-      </p:sp>
-      <p:sp>
-        <p:nvSpPr>
-          <p:cNvPr id="6" name="Rounded Rectangle 5"/>
-          <p:cNvSpPr/>
-          <p:nvPr/>
-        </p:nvSpPr>
-        <p:spPr>
-          <a:xfrm>
-            <a:off x="365760" y="841248"/>
-            <a:ext cx="658368" cy="512064"/>
-          </a:xfrm>
-          <a:prstGeom prst="roundRect">
-            <a:avLst/>
-          </a:prstGeom>
-          <a:solidFill>
-            <a:srgbClr val="0D9488"/>
-          </a:solidFill>
-          <a:ln>
-            <a:noFill/>
-          </a:ln>
-          <a:effectLst/>
-        </p:spPr>
-        <p:style>
-          <a:lnRef idx="1">
-            <a:schemeClr val="accent1"/>
-          </a:lnRef>
-          <a:fillRef idx="3">
-            <a:schemeClr val="accent1"/>
-          </a:fillRef>
-          <a:effectRef idx="2">
-            <a:schemeClr val="accent1"/>
-          </a:effectRef>
-          <a:fontRef idx="minor">
-            <a:schemeClr val="lt1"/>
-          </a:fontRef>
-        </p:style>
-        <p:txBody>
-          <a:bodyPr rtlCol="0" anchor="ctr"/>
-          <a:lstStyle/>
-          <a:p>
-            <a:pPr algn="ctr"/>
-          </a:p>
-        </p:txBody>
-      </p:sp>
-      <p:sp>
-        <p:nvSpPr>
-          <p:cNvPr id="7" name="TextBox 6"/>
-          <p:cNvSpPr txBox="1"/>
-          <p:nvPr/>
-        </p:nvSpPr>
-        <p:spPr>
-          <a:xfrm>
-            <a:off x="365760" y="841248"/>
-            <a:ext cx="658368" cy="512064"/>
-          </a:xfrm>
-          <a:prstGeom prst="rect">
-            <a:avLst/>
-          </a:prstGeom>
-          <a:noFill/>
-        </p:spPr>
-        <p:txBody>
-          <a:bodyPr wrap="square" anchor="ctr">
-            <a:spAutoFit/>
-          </a:bodyPr>
-          <a:lstStyle/>
-          <a:p>
-            <a:pPr algn="ctr">
-              <a:lnSpc>
-                <a:spcPct val="100000"/>
-              </a:lnSpc>
-            </a:pPr>
-            <a:r>
-              <a:rPr sz="1700" b="1">
-                <a:solidFill>
-                  <a:srgbClr val="FFFFFF"/>
-                </a:solidFill>
-                <a:latin typeface="Malgun Gothic"/>
-              </a:rPr>
-              <a:t>25</a:t>
-            </a:r>
-          </a:p>
-        </p:txBody>
-      </p:sp>
-      <p:sp>
-        <p:nvSpPr>
-          <p:cNvPr id="8" name="TextBox 7"/>
-          <p:cNvSpPr txBox="1"/>
-          <p:nvPr/>
-        </p:nvSpPr>
-        <p:spPr>
-          <a:xfrm>
-            <a:off x="1143000" y="868680"/>
-            <a:ext cx="9144000" cy="457200"/>
-          </a:xfrm>
-          <a:prstGeom prst="rect">
-            <a:avLst/>
-          </a:prstGeom>
-          <a:noFill/>
-        </p:spPr>
-        <p:txBody>
-          <a:bodyPr wrap="square" anchor="t">
-            <a:spAutoFit/>
-          </a:bodyPr>
-          <a:lstStyle/>
-          <a:p>
-            <a:pPr algn="l">
-              <a:lnSpc>
-                <a:spcPct val="100000"/>
-              </a:lnSpc>
-            </a:pPr>
-            <a:r>
-              <a:rPr sz="2200" b="1">
-                <a:solidFill>
-                  <a:srgbClr val="0D9488"/>
-                </a:solidFill>
-                <a:latin typeface="Malgun Gothic"/>
-              </a:rPr>
-              <a:t>✅ 지사 운영 체크리스트</a:t>
-            </a:r>
-          </a:p>
-        </p:txBody>
-      </p:sp>
-      <p:sp>
-        <p:nvSpPr>
-          <p:cNvPr id="9" name="Rounded Rectangle 8"/>
-          <p:cNvSpPr/>
-          <p:nvPr/>
-        </p:nvSpPr>
-        <p:spPr>
-          <a:xfrm>
-            <a:off x="457200" y="1645920"/>
-            <a:ext cx="292608" cy="292608"/>
-          </a:xfrm>
-          <a:prstGeom prst="roundRect">
-            <a:avLst/>
-          </a:prstGeom>
-          <a:solidFill>
-            <a:srgbClr val="FFFFFF"/>
-          </a:solidFill>
-          <a:ln w="12700">
-            <a:solidFill>
-              <a:srgbClr val="0D9488"/>
-            </a:solidFill>
-          </a:ln>
-          <a:effectLst/>
-        </p:spPr>
-        <p:style>
-          <a:lnRef idx="1">
-            <a:schemeClr val="accent1"/>
-          </a:lnRef>
-          <a:fillRef idx="3">
-            <a:schemeClr val="accent1"/>
-          </a:fillRef>
-          <a:effectRef idx="2">
-            <a:schemeClr val="accent1"/>
-          </a:effectRef>
-          <a:fontRef idx="minor">
-            <a:schemeClr val="lt1"/>
-          </a:fontRef>
-        </p:style>
-        <p:txBody>
-          <a:bodyPr rtlCol="0" anchor="ctr"/>
-          <a:lstStyle/>
-          <a:p>
-            <a:pPr algn="ctr"/>
-          </a:p>
-        </p:txBody>
-      </p:sp>
-      <p:sp>
-        <p:nvSpPr>
-          <p:cNvPr id="10" name="TextBox 9"/>
-          <p:cNvSpPr txBox="1"/>
-          <p:nvPr/>
-        </p:nvSpPr>
-        <p:spPr>
-          <a:xfrm>
-            <a:off x="914400" y="1581912"/>
-            <a:ext cx="10058400" cy="411480"/>
-          </a:xfrm>
-          <a:prstGeom prst="rect">
-            <a:avLst/>
-          </a:prstGeom>
-          <a:noFill/>
-        </p:spPr>
-        <p:txBody>
-          <a:bodyPr wrap="square" anchor="t">
-            <a:spAutoFit/>
-          </a:bodyPr>
-          <a:lstStyle/>
-          <a:p>
-            <a:pPr algn="l">
-              <a:lnSpc>
-                <a:spcPct val="100000"/>
-              </a:lnSpc>
-            </a:pPr>
-            <a:r>
-              <a:rPr sz="1500" b="1">
-                <a:solidFill>
-                  <a:srgbClr val="334155"/>
-                </a:solidFill>
-                <a:latin typeface="Malgun Gothic"/>
-              </a:rPr>
-              <a:t>오늘 지사 매출·재원·출석 지표를 확인했나요?</a:t>
-            </a:r>
-          </a:p>
-        </p:txBody>
-      </p:sp>
-      <p:sp>
-        <p:nvSpPr>
-          <p:cNvPr id="11" name="Rounded Rectangle 10"/>
-          <p:cNvSpPr/>
-          <p:nvPr/>
-        </p:nvSpPr>
-        <p:spPr>
-          <a:xfrm>
-            <a:off x="457200" y="2212848"/>
-            <a:ext cx="292608" cy="292608"/>
-          </a:xfrm>
-          <a:prstGeom prst="roundRect">
-            <a:avLst/>
-          </a:prstGeom>
-          <a:solidFill>
-            <a:srgbClr val="FFFFFF"/>
-          </a:solidFill>
-          <a:ln w="12700">
-            <a:solidFill>
-              <a:srgbClr val="0D9488"/>
-            </a:solidFill>
-          </a:ln>
-          <a:effectLst/>
-        </p:spPr>
-        <p:style>
-          <a:lnRef idx="1">
-            <a:schemeClr val="accent1"/>
-          </a:lnRef>
-          <a:fillRef idx="3">
-            <a:schemeClr val="accent1"/>
-          </a:fillRef>
-          <a:effectRef idx="2">
-            <a:schemeClr val="accent1"/>
-          </a:effectRef>
-          <a:fontRef idx="minor">
-            <a:schemeClr val="lt1"/>
-          </a:fontRef>
-        </p:style>
-        <p:txBody>
-          <a:bodyPr rtlCol="0" anchor="ctr"/>
-          <a:lstStyle/>
-          <a:p>
-            <a:pPr algn="ctr"/>
-          </a:p>
-        </p:txBody>
-      </p:sp>
-      <p:sp>
-        <p:nvSpPr>
-          <p:cNvPr id="12" name="TextBox 11"/>
-          <p:cNvSpPr txBox="1"/>
-          <p:nvPr/>
-        </p:nvSpPr>
-        <p:spPr>
-          <a:xfrm>
-            <a:off x="914400" y="2148840"/>
-            <a:ext cx="10058400" cy="411480"/>
-          </a:xfrm>
-          <a:prstGeom prst="rect">
-            <a:avLst/>
-          </a:prstGeom>
-          <a:noFill/>
-        </p:spPr>
-        <p:txBody>
-          <a:bodyPr wrap="square" anchor="t">
-            <a:spAutoFit/>
-          </a:bodyPr>
-          <a:lstStyle/>
-          <a:p>
-            <a:pPr algn="l">
-              <a:lnSpc>
-                <a:spcPct val="100000"/>
-              </a:lnSpc>
-            </a:pPr>
-            <a:r>
-              <a:rPr sz="1500" b="1">
-                <a:solidFill>
-                  <a:srgbClr val="334155"/>
-                </a:solidFill>
-                <a:latin typeface="Malgun Gothic"/>
-              </a:rPr>
-              <a:t>부진한 대리점을 파악하고 지원했나요?</a:t>
-            </a:r>
-          </a:p>
-        </p:txBody>
-      </p:sp>
-      <p:sp>
-        <p:nvSpPr>
-          <p:cNvPr id="13" name="Rounded Rectangle 12"/>
-          <p:cNvSpPr/>
-          <p:nvPr/>
-        </p:nvSpPr>
-        <p:spPr>
-          <a:xfrm>
-            <a:off x="457200" y="2779776"/>
-            <a:ext cx="292608" cy="292608"/>
-          </a:xfrm>
-          <a:prstGeom prst="roundRect">
-            <a:avLst/>
-          </a:prstGeom>
-          <a:solidFill>
-            <a:srgbClr val="FFFFFF"/>
-          </a:solidFill>
-          <a:ln w="12700">
-            <a:solidFill>
-              <a:srgbClr val="0D9488"/>
-            </a:solidFill>
-          </a:ln>
-          <a:effectLst/>
-        </p:spPr>
-        <p:style>
-          <a:lnRef idx="1">
-            <a:schemeClr val="accent1"/>
-          </a:lnRef>
-          <a:fillRef idx="3">
-            <a:schemeClr val="accent1"/>
-          </a:fillRef>
-          <a:effectRef idx="2">
-            <a:schemeClr val="accent1"/>
-          </a:effectRef>
-          <a:fontRef idx="minor">
-            <a:schemeClr val="lt1"/>
-          </a:fontRef>
-        </p:style>
-        <p:txBody>
-          <a:bodyPr rtlCol="0" anchor="ctr"/>
-          <a:lstStyle/>
-          <a:p>
-            <a:pPr algn="ctr"/>
-          </a:p>
-        </p:txBody>
-      </p:sp>
-      <p:sp>
-        <p:nvSpPr>
-          <p:cNvPr id="14" name="TextBox 13"/>
-          <p:cNvSpPr txBox="1"/>
-          <p:nvPr/>
-        </p:nvSpPr>
-        <p:spPr>
-          <a:xfrm>
-            <a:off x="914400" y="2715768"/>
-            <a:ext cx="10058400" cy="411480"/>
-          </a:xfrm>
-          <a:prstGeom prst="rect">
-            <a:avLst/>
-          </a:prstGeom>
-          <a:noFill/>
-        </p:spPr>
-        <p:txBody>
-          <a:bodyPr wrap="square" anchor="t">
-            <a:spAutoFit/>
-          </a:bodyPr>
-          <a:lstStyle/>
-          <a:p>
-            <a:pPr algn="l">
-              <a:lnSpc>
-                <a:spcPct val="100000"/>
-              </a:lnSpc>
-            </a:pPr>
-            <a:r>
-              <a:rPr sz="1500" b="1">
-                <a:solidFill>
-                  <a:srgbClr val="334155"/>
-                </a:solidFill>
-                <a:latin typeface="Malgun Gothic"/>
-              </a:rPr>
-              <a:t>이번 달 정산(수령·배분)을 점검했나요?</a:t>
-            </a:r>
-          </a:p>
-        </p:txBody>
-      </p:sp>
-      <p:sp>
-        <p:nvSpPr>
-          <p:cNvPr id="15" name="Rounded Rectangle 14"/>
-          <p:cNvSpPr/>
-          <p:nvPr/>
-        </p:nvSpPr>
-        <p:spPr>
-          <a:xfrm>
-            <a:off x="457200" y="3346704"/>
-            <a:ext cx="292608" cy="292608"/>
-          </a:xfrm>
-          <a:prstGeom prst="roundRect">
-            <a:avLst/>
-          </a:prstGeom>
-          <a:solidFill>
-            <a:srgbClr val="FFFFFF"/>
-          </a:solidFill>
-          <a:ln w="12700">
-            <a:solidFill>
-              <a:srgbClr val="0D9488"/>
-            </a:solidFill>
-          </a:ln>
-          <a:effectLst/>
-        </p:spPr>
-        <p:style>
-          <a:lnRef idx="1">
-            <a:schemeClr val="accent1"/>
-          </a:lnRef>
-          <a:fillRef idx="3">
-            <a:schemeClr val="accent1"/>
-          </a:fillRef>
-          <a:effectRef idx="2">
-            <a:schemeClr val="accent1"/>
-          </a:effectRef>
-          <a:fontRef idx="minor">
-            <a:schemeClr val="lt1"/>
-          </a:fontRef>
-        </p:style>
-        <p:txBody>
-          <a:bodyPr rtlCol="0" anchor="ctr"/>
-          <a:lstStyle/>
-          <a:p>
-            <a:pPr algn="ctr"/>
-          </a:p>
-        </p:txBody>
-      </p:sp>
-      <p:sp>
-        <p:nvSpPr>
-          <p:cNvPr id="16" name="TextBox 15"/>
-          <p:cNvSpPr txBox="1"/>
-          <p:nvPr/>
-        </p:nvSpPr>
-        <p:spPr>
-          <a:xfrm>
-            <a:off x="914400" y="3282696"/>
-            <a:ext cx="10058400" cy="411480"/>
-          </a:xfrm>
-          <a:prstGeom prst="rect">
-            <a:avLst/>
-          </a:prstGeom>
-          <a:noFill/>
-        </p:spPr>
-        <p:txBody>
-          <a:bodyPr wrap="square" anchor="t">
-            <a:spAutoFit/>
-          </a:bodyPr>
-          <a:lstStyle/>
-          <a:p>
-            <a:pPr algn="l">
-              <a:lnSpc>
-                <a:spcPct val="100000"/>
-              </a:lnSpc>
-            </a:pPr>
-            <a:r>
-              <a:rPr sz="1500" b="1">
-                <a:solidFill>
-                  <a:srgbClr val="334155"/>
-                </a:solidFill>
-                <a:latin typeface="Malgun Gothic"/>
-              </a:rPr>
-              <a:t>미납·환불 건을 확인했나요?</a:t>
-            </a:r>
-          </a:p>
-        </p:txBody>
-      </p:sp>
-      <p:sp>
-        <p:nvSpPr>
-          <p:cNvPr id="17" name="Rounded Rectangle 16"/>
-          <p:cNvSpPr/>
-          <p:nvPr/>
-        </p:nvSpPr>
-        <p:spPr>
-          <a:xfrm>
-            <a:off x="457200" y="3913632"/>
-            <a:ext cx="292608" cy="292608"/>
-          </a:xfrm>
-          <a:prstGeom prst="roundRect">
-            <a:avLst/>
-          </a:prstGeom>
-          <a:solidFill>
-            <a:srgbClr val="FFFFFF"/>
-          </a:solidFill>
-          <a:ln w="12700">
-            <a:solidFill>
-              <a:srgbClr val="0D9488"/>
-            </a:solidFill>
-          </a:ln>
-          <a:effectLst/>
-        </p:spPr>
-        <p:style>
-          <a:lnRef idx="1">
-            <a:schemeClr val="accent1"/>
-          </a:lnRef>
-          <a:fillRef idx="3">
-            <a:schemeClr val="accent1"/>
-          </a:fillRef>
-          <a:effectRef idx="2">
-            <a:schemeClr val="accent1"/>
-          </a:effectRef>
-          <a:fontRef idx="minor">
-            <a:schemeClr val="lt1"/>
-          </a:fontRef>
-        </p:style>
-        <p:txBody>
-          <a:bodyPr rtlCol="0" anchor="ctr"/>
-          <a:lstStyle/>
-          <a:p>
-            <a:pPr algn="ctr"/>
-          </a:p>
-        </p:txBody>
-      </p:sp>
-      <p:sp>
-        <p:nvSpPr>
-          <p:cNvPr id="18" name="TextBox 17"/>
-          <p:cNvSpPr txBox="1"/>
-          <p:nvPr/>
-        </p:nvSpPr>
-        <p:spPr>
-          <a:xfrm>
-            <a:off x="914400" y="3849624"/>
-            <a:ext cx="10058400" cy="411480"/>
-          </a:xfrm>
-          <a:prstGeom prst="rect">
-            <a:avLst/>
-          </a:prstGeom>
-          <a:noFill/>
-        </p:spPr>
-        <p:txBody>
-          <a:bodyPr wrap="square" anchor="t">
-            <a:spAutoFit/>
-          </a:bodyPr>
-          <a:lstStyle/>
-          <a:p>
-            <a:pPr algn="l">
-              <a:lnSpc>
-                <a:spcPct val="100000"/>
-              </a:lnSpc>
-            </a:pPr>
-            <a:r>
-              <a:rPr sz="1500" b="1">
-                <a:solidFill>
-                  <a:srgbClr val="334155"/>
-                </a:solidFill>
-                <a:latin typeface="Malgun Gothic"/>
-              </a:rPr>
-              <a:t>이탈위험 학생·대리점을 챙겼나요?</a:t>
-            </a:r>
-          </a:p>
-        </p:txBody>
-      </p:sp>
-      <p:sp>
-        <p:nvSpPr>
-          <p:cNvPr id="19" name="Rounded Rectangle 18"/>
-          <p:cNvSpPr/>
-          <p:nvPr/>
-        </p:nvSpPr>
-        <p:spPr>
-          <a:xfrm>
-            <a:off x="457200" y="4480560"/>
-            <a:ext cx="292608" cy="292608"/>
-          </a:xfrm>
-          <a:prstGeom prst="roundRect">
-            <a:avLst/>
-          </a:prstGeom>
-          <a:solidFill>
-            <a:srgbClr val="FFFFFF"/>
-          </a:solidFill>
-          <a:ln w="12700">
-            <a:solidFill>
-              <a:srgbClr val="0D9488"/>
-            </a:solidFill>
-          </a:ln>
-          <a:effectLst/>
-        </p:spPr>
-        <p:style>
-          <a:lnRef idx="1">
-            <a:schemeClr val="accent1"/>
-          </a:lnRef>
-          <a:fillRef idx="3">
-            <a:schemeClr val="accent1"/>
-          </a:fillRef>
-          <a:effectRef idx="2">
-            <a:schemeClr val="accent1"/>
-          </a:effectRef>
-          <a:fontRef idx="minor">
-            <a:schemeClr val="lt1"/>
-          </a:fontRef>
-        </p:style>
-        <p:txBody>
-          <a:bodyPr rtlCol="0" anchor="ctr"/>
-          <a:lstStyle/>
-          <a:p>
-            <a:pPr algn="ctr"/>
-          </a:p>
-        </p:txBody>
-      </p:sp>
-      <p:sp>
-        <p:nvSpPr>
-          <p:cNvPr id="20" name="TextBox 19"/>
-          <p:cNvSpPr txBox="1"/>
-          <p:nvPr/>
-        </p:nvSpPr>
-        <p:spPr>
-          <a:xfrm>
-            <a:off x="914400" y="4416552"/>
-            <a:ext cx="10058400" cy="411480"/>
-          </a:xfrm>
-          <a:prstGeom prst="rect">
-            <a:avLst/>
-          </a:prstGeom>
-          <a:noFill/>
-        </p:spPr>
-        <p:txBody>
-          <a:bodyPr wrap="square" anchor="t">
-            <a:spAutoFit/>
-          </a:bodyPr>
-          <a:lstStyle/>
-          <a:p>
-            <a:pPr algn="l">
-              <a:lnSpc>
-                <a:spcPct val="100000"/>
-              </a:lnSpc>
-            </a:pPr>
-            <a:r>
-              <a:rPr sz="1500" b="1">
-                <a:solidFill>
-                  <a:srgbClr val="334155"/>
-                </a:solidFill>
-                <a:latin typeface="Malgun Gothic"/>
-              </a:rPr>
-              <a:t>신규 대리점 온보딩을 진행했나요?</a:t>
-            </a:r>
-          </a:p>
-        </p:txBody>
-      </p:sp>
-      <p:sp>
-        <p:nvSpPr>
-          <p:cNvPr id="21" name="Rounded Rectangle 20"/>
-          <p:cNvSpPr/>
-          <p:nvPr/>
-        </p:nvSpPr>
-        <p:spPr>
-          <a:xfrm>
-            <a:off x="457200" y="5047488"/>
-            <a:ext cx="292608" cy="292608"/>
-          </a:xfrm>
-          <a:prstGeom prst="roundRect">
-            <a:avLst/>
-          </a:prstGeom>
-          <a:solidFill>
-            <a:srgbClr val="FFFFFF"/>
-          </a:solidFill>
-          <a:ln w="12700">
-            <a:solidFill>
-              <a:srgbClr val="0D9488"/>
-            </a:solidFill>
-          </a:ln>
-          <a:effectLst/>
-        </p:spPr>
-        <p:style>
-          <a:lnRef idx="1">
-            <a:schemeClr val="accent1"/>
-          </a:lnRef>
-          <a:fillRef idx="3">
-            <a:schemeClr val="accent1"/>
-          </a:fillRef>
-          <a:effectRef idx="2">
-            <a:schemeClr val="accent1"/>
-          </a:effectRef>
-          <a:fontRef idx="minor">
-            <a:schemeClr val="lt1"/>
-          </a:fontRef>
-        </p:style>
-        <p:txBody>
-          <a:bodyPr rtlCol="0" anchor="ctr"/>
-          <a:lstStyle/>
-          <a:p>
-            <a:pPr algn="ctr"/>
-          </a:p>
-        </p:txBody>
-      </p:sp>
-      <p:sp>
-        <p:nvSpPr>
-          <p:cNvPr id="22" name="TextBox 21"/>
-          <p:cNvSpPr txBox="1"/>
-          <p:nvPr/>
-        </p:nvSpPr>
-        <p:spPr>
-          <a:xfrm>
-            <a:off x="914400" y="4983480"/>
-            <a:ext cx="10058400" cy="411480"/>
-          </a:xfrm>
-          <a:prstGeom prst="rect">
-            <a:avLst/>
-          </a:prstGeom>
-          <a:noFill/>
-        </p:spPr>
-        <p:txBody>
-          <a:bodyPr wrap="square" anchor="t">
-            <a:spAutoFit/>
-          </a:bodyPr>
-          <a:lstStyle/>
-          <a:p>
-            <a:pPr algn="l">
-              <a:lnSpc>
-                <a:spcPct val="100000"/>
-              </a:lnSpc>
-            </a:pPr>
-            <a:r>
-              <a:rPr sz="1500" b="1">
-                <a:solidFill>
-                  <a:srgbClr val="334155"/>
-                </a:solidFill>
-                <a:latin typeface="Malgun Gothic"/>
-              </a:rPr>
-              <a:t>월간 리포트를 공유했나요?</a:t>
-            </a:r>
-          </a:p>
-        </p:txBody>
-      </p:sp>
-      <p:pic>
-        <p:nvPicPr>
-          <p:cNvPr id="23" name="Picture 22" descr="mango_char.png"/>
-          <p:cNvPicPr>
-            <a:picLocks noChangeAspect="1"/>
-          </p:cNvPicPr>
-          <p:nvPr/>
-        </p:nvPicPr>
-        <p:blipFill>
-          <a:blip r:embed="rId2"/>
-          <a:stretch>
-            <a:fillRect/>
-          </a:stretch>
-        </p:blipFill>
-        <p:spPr>
-          <a:xfrm>
-            <a:off x="9153162" y="4480559"/>
-            <a:ext cx="2489892" cy="2011680"/>
-          </a:xfrm>
-          <a:prstGeom prst="rect">
-            <a:avLst/>
-          </a:prstGeom>
-        </p:spPr>
-      </p:pic>
     </p:spTree>
   </p:cSld>
   <p:clrMapOvr>
@@ -23350,7 +23625,7 @@
                 </a:solidFill>
                 <a:latin typeface="Malgun Gothic"/>
               </a:rPr>
-              <a:t>마무리</a:t>
+              <a:t>자주 묻는 질문 (FAQ)</a:t>
             </a:r>
           </a:p>
         </p:txBody>
@@ -23466,13 +23741,13 @@
               </a:lnSpc>
             </a:pPr>
             <a:r>
-              <a:rPr sz="2100" b="1">
+              <a:rPr sz="2200" b="1">
                 <a:solidFill>
                   <a:srgbClr val="0D9488"/>
                 </a:solidFill>
                 <a:latin typeface="Malgun Gothic"/>
               </a:rPr>
-              <a:t>🏁 마무리 · 지사 성장을 위한 실천 가이드</a:t>
+              <a:t>❓ 자주 묻는 질문 (FAQ)</a:t>
             </a:r>
           </a:p>
         </p:txBody>
@@ -23485,17 +23760,19 @@
         </p:nvSpPr>
         <p:spPr>
           <a:xfrm>
-            <a:off x="365760" y="1371600"/>
-            <a:ext cx="11430000" cy="868680"/>
+            <a:off x="365760" y="1554480"/>
+            <a:ext cx="11460175" cy="868680"/>
           </a:xfrm>
           <a:prstGeom prst="roundRect">
             <a:avLst/>
           </a:prstGeom>
           <a:solidFill>
-            <a:srgbClr val="ECFDF5"/>
+            <a:srgbClr val="F8FAFC"/>
           </a:solidFill>
-          <a:ln>
-            <a:noFill/>
+          <a:ln w="12700">
+            <a:solidFill>
+              <a:srgbClr val="E2E8F0"/>
+            </a:solidFill>
           </a:ln>
           <a:effectLst/>
         </p:spPr>
@@ -23529,8 +23806,8 @@
         </p:nvSpPr>
         <p:spPr>
           <a:xfrm>
-            <a:off x="548640" y="1426464"/>
-            <a:ext cx="11064240" cy="777240"/>
+            <a:off x="548640" y="1627632"/>
+            <a:ext cx="11094415" cy="365760"/>
           </a:xfrm>
           <a:prstGeom prst="rect">
             <a:avLst/>
@@ -23545,56 +23822,56 @@
           <a:p>
             <a:pPr algn="l">
               <a:lnSpc>
-                <a:spcPct val="115000"/>
+                <a:spcPct val="100000"/>
+              </a:lnSpc>
+            </a:pPr>
+            <a:r>
+              <a:rPr sz="1350" b="1">
+                <a:solidFill>
+                  <a:srgbClr val="0D9488"/>
+                </a:solidFill>
+                <a:latin typeface="Malgun Gothic"/>
+              </a:rPr>
+              <a:t>Q. 어디서 접속하나요?</a:t>
+            </a:r>
+          </a:p>
+        </p:txBody>
+      </p:sp>
+      <p:sp>
+        <p:nvSpPr>
+          <p:cNvPr id="11" name="TextBox 10"/>
+          <p:cNvSpPr txBox="1"/>
+          <p:nvPr/>
+        </p:nvSpPr>
+        <p:spPr>
+          <a:xfrm>
+            <a:off x="548640" y="1965960"/>
+            <a:ext cx="11094415" cy="411480"/>
+          </a:xfrm>
+          <a:prstGeom prst="rect">
+            <a:avLst/>
+          </a:prstGeom>
+          <a:noFill/>
+        </p:spPr>
+        <p:txBody>
+          <a:bodyPr wrap="square" anchor="t">
+            <a:spAutoFit/>
+          </a:bodyPr>
+          <a:lstStyle/>
+          <a:p>
+            <a:pPr algn="l">
+              <a:lnSpc>
+                <a:spcPct val="105000"/>
               </a:lnSpc>
             </a:pPr>
             <a:r>
               <a:rPr sz="1150" b="0">
                 <a:solidFill>
-                  <a:srgbClr val="334155"/>
-                </a:solidFill>
-                <a:latin typeface="Malgun Gothic"/>
-              </a:rPr>
-              <a:t>지사의 역할은 본사와 대리점을 잇는 다리예요. 우리 지사 지표를 챙기고, 산하 대리점이 잘 크도록 지원하며, 정산을 투명하게 처리하면 지사 전체가 함께 성장합니다. 이 리듬만 지켜도 운영이 훨씬 안정적이에요.</a:t>
-            </a:r>
-          </a:p>
-        </p:txBody>
-      </p:sp>
-      <p:sp>
-        <p:nvSpPr>
-          <p:cNvPr id="11" name="TextBox 10"/>
-          <p:cNvSpPr txBox="1"/>
-          <p:nvPr/>
-        </p:nvSpPr>
-        <p:spPr>
-          <a:xfrm>
-            <a:off x="457200" y="2423160"/>
-            <a:ext cx="5760720" cy="320040"/>
-          </a:xfrm>
-          <a:prstGeom prst="rect">
-            <a:avLst/>
-          </a:prstGeom>
-          <a:noFill/>
-        </p:spPr>
-        <p:txBody>
-          <a:bodyPr wrap="square" anchor="t">
-            <a:spAutoFit/>
-          </a:bodyPr>
-          <a:lstStyle/>
-          <a:p>
-            <a:pPr algn="l">
-              <a:lnSpc>
-                <a:spcPct val="100000"/>
-              </a:lnSpc>
-            </a:pPr>
-            <a:r>
-              <a:rPr sz="1350" b="1">
-                <a:solidFill>
-                  <a:srgbClr val="0D9488"/>
-                </a:solidFill>
-                <a:latin typeface="Malgun Gothic"/>
-              </a:rPr>
-              <a:t>🔄 하루 흐름 한눈에</a:t>
+                  <a:srgbClr val="475569"/>
+                </a:solidFill>
+                <a:latin typeface="Malgun Gothic"/>
+              </a:rPr>
+              <a:t>A. admin.mangoi.co.kr 에서 로그인해요. 권한(지사)에 따라 우리 지사 데이터만 자동으로 보여요.</a:t>
             </a:r>
           </a:p>
         </p:txBody>
@@ -23607,17 +23884,19 @@
         </p:nvSpPr>
         <p:spPr>
           <a:xfrm>
-            <a:off x="457200" y="2788920"/>
-            <a:ext cx="1600200" cy="384048"/>
+            <a:off x="365760" y="2542032"/>
+            <a:ext cx="11460175" cy="868680"/>
           </a:xfrm>
           <a:prstGeom prst="roundRect">
             <a:avLst/>
           </a:prstGeom>
           <a:solidFill>
-            <a:srgbClr val="0D9488"/>
+            <a:srgbClr val="F8FAFC"/>
           </a:solidFill>
-          <a:ln>
-            <a:noFill/>
+          <a:ln w="12700">
+            <a:solidFill>
+              <a:srgbClr val="E2E8F0"/>
+            </a:solidFill>
           </a:ln>
           <a:effectLst/>
         </p:spPr>
@@ -23651,33 +23930,33 @@
         </p:nvSpPr>
         <p:spPr>
           <a:xfrm>
-            <a:off x="457200" y="2788920"/>
-            <a:ext cx="1600200" cy="384048"/>
-          </a:xfrm>
-          <a:prstGeom prst="rect">
-            <a:avLst/>
-          </a:prstGeom>
-          <a:noFill/>
-        </p:spPr>
-        <p:txBody>
-          <a:bodyPr wrap="square" anchor="ctr">
-            <a:spAutoFit/>
-          </a:bodyPr>
-          <a:lstStyle/>
-          <a:p>
-            <a:pPr algn="ctr">
+            <a:off x="548640" y="2615184"/>
+            <a:ext cx="11094415" cy="365760"/>
+          </a:xfrm>
+          <a:prstGeom prst="rect">
+            <a:avLst/>
+          </a:prstGeom>
+          <a:noFill/>
+        </p:spPr>
+        <p:txBody>
+          <a:bodyPr wrap="square" anchor="t">
+            <a:spAutoFit/>
+          </a:bodyPr>
+          <a:lstStyle/>
+          <a:p>
+            <a:pPr algn="l">
               <a:lnSpc>
                 <a:spcPct val="100000"/>
               </a:lnSpc>
             </a:pPr>
             <a:r>
-              <a:rPr sz="850" b="1">
-                <a:solidFill>
-                  <a:srgbClr val="FFFFFF"/>
-                </a:solidFill>
-                <a:latin typeface="Malgun Gothic"/>
-              </a:rPr>
-              <a:t>아침 (5분)</a:t>
+              <a:rPr sz="1350" b="1">
+                <a:solidFill>
+                  <a:srgbClr val="0D9488"/>
+                </a:solidFill>
+                <a:latin typeface="Malgun Gothic"/>
+              </a:rPr>
+              <a:t>Q. 다른 지사 데이터도 보이나요?</a:t>
             </a:r>
           </a:p>
         </p:txBody>
@@ -23690,33 +23969,33 @@
         </p:nvSpPr>
         <p:spPr>
           <a:xfrm>
-            <a:off x="2148840" y="2770632"/>
-            <a:ext cx="4114800" cy="420624"/>
-          </a:xfrm>
-          <a:prstGeom prst="rect">
-            <a:avLst/>
-          </a:prstGeom>
-          <a:noFill/>
-        </p:spPr>
-        <p:txBody>
-          <a:bodyPr wrap="square" anchor="ctr">
+            <a:off x="548640" y="2953512"/>
+            <a:ext cx="11094415" cy="411480"/>
+          </a:xfrm>
+          <a:prstGeom prst="rect">
+            <a:avLst/>
+          </a:prstGeom>
+          <a:noFill/>
+        </p:spPr>
+        <p:txBody>
+          <a:bodyPr wrap="square" anchor="t">
             <a:spAutoFit/>
           </a:bodyPr>
           <a:lstStyle/>
           <a:p>
             <a:pPr algn="l">
               <a:lnSpc>
-                <a:spcPct val="100000"/>
-              </a:lnSpc>
-            </a:pPr>
-            <a:r>
-              <a:rPr sz="850" b="0">
-                <a:solidFill>
-                  <a:srgbClr val="334155"/>
-                </a:solidFill>
-                <a:latin typeface="Malgun Gothic"/>
-              </a:rPr>
-              <a:t>지사 대시보드에서 매출·재원·출석 확인, AI 인사이트로 상태 파악</a:t>
+                <a:spcPct val="105000"/>
+              </a:lnSpc>
+            </a:pPr>
+            <a:r>
+              <a:rPr sz="1150" b="0">
+                <a:solidFill>
+                  <a:srgbClr val="475569"/>
+                </a:solidFill>
+                <a:latin typeface="Malgun Gothic"/>
+              </a:rPr>
+              <a:t>A. 아니요. 권한 범위상 우리 지사와 산하 대리점 데이터만 보입니다.</a:t>
             </a:r>
           </a:p>
         </p:txBody>
@@ -23729,17 +24008,19 @@
         </p:nvSpPr>
         <p:spPr>
           <a:xfrm>
-            <a:off x="457200" y="3246120"/>
-            <a:ext cx="1600200" cy="384048"/>
+            <a:off x="365760" y="3529584"/>
+            <a:ext cx="11460175" cy="868680"/>
           </a:xfrm>
           <a:prstGeom prst="roundRect">
             <a:avLst/>
           </a:prstGeom>
           <a:solidFill>
-            <a:srgbClr val="0D9488"/>
+            <a:srgbClr val="F8FAFC"/>
           </a:solidFill>
-          <a:ln>
-            <a:noFill/>
+          <a:ln w="12700">
+            <a:solidFill>
+              <a:srgbClr val="E2E8F0"/>
+            </a:solidFill>
           </a:ln>
           <a:effectLst/>
         </p:spPr>
@@ -23773,33 +24054,33 @@
         </p:nvSpPr>
         <p:spPr>
           <a:xfrm>
-            <a:off x="457200" y="3246120"/>
-            <a:ext cx="1600200" cy="384048"/>
-          </a:xfrm>
-          <a:prstGeom prst="rect">
-            <a:avLst/>
-          </a:prstGeom>
-          <a:noFill/>
-        </p:spPr>
-        <p:txBody>
-          <a:bodyPr wrap="square" anchor="ctr">
-            <a:spAutoFit/>
-          </a:bodyPr>
-          <a:lstStyle/>
-          <a:p>
-            <a:pPr algn="ctr">
+            <a:off x="548640" y="3602736"/>
+            <a:ext cx="11094415" cy="365760"/>
+          </a:xfrm>
+          <a:prstGeom prst="rect">
+            <a:avLst/>
+          </a:prstGeom>
+          <a:noFill/>
+        </p:spPr>
+        <p:txBody>
+          <a:bodyPr wrap="square" anchor="t">
+            <a:spAutoFit/>
+          </a:bodyPr>
+          <a:lstStyle/>
+          <a:p>
+            <a:pPr algn="l">
               <a:lnSpc>
                 <a:spcPct val="100000"/>
               </a:lnSpc>
             </a:pPr>
             <a:r>
-              <a:rPr sz="850" b="1">
-                <a:solidFill>
-                  <a:srgbClr val="FFFFFF"/>
-                </a:solidFill>
-                <a:latin typeface="Malgun Gothic"/>
-              </a:rPr>
-              <a:t>오전</a:t>
+              <a:rPr sz="1350" b="1">
+                <a:solidFill>
+                  <a:srgbClr val="0D9488"/>
+                </a:solidFill>
+                <a:latin typeface="Malgun Gothic"/>
+              </a:rPr>
+              <a:t>Q. 정산은 어떻게 계산되나요?</a:t>
             </a:r>
           </a:p>
         </p:txBody>
@@ -23812,33 +24093,33 @@
         </p:nvSpPr>
         <p:spPr>
           <a:xfrm>
-            <a:off x="2148840" y="3227832"/>
-            <a:ext cx="4114800" cy="420624"/>
-          </a:xfrm>
-          <a:prstGeom prst="rect">
-            <a:avLst/>
-          </a:prstGeom>
-          <a:noFill/>
-        </p:spPr>
-        <p:txBody>
-          <a:bodyPr wrap="square" anchor="ctr">
+            <a:off x="548640" y="3941064"/>
+            <a:ext cx="11094415" cy="411480"/>
+          </a:xfrm>
+          <a:prstGeom prst="rect">
+            <a:avLst/>
+          </a:prstGeom>
+          <a:noFill/>
+        </p:spPr>
+        <p:txBody>
+          <a:bodyPr wrap="square" anchor="t">
             <a:spAutoFit/>
           </a:bodyPr>
           <a:lstStyle/>
           <a:p>
             <a:pPr algn="l">
               <a:lnSpc>
-                <a:spcPct val="100000"/>
-              </a:lnSpc>
-            </a:pPr>
-            <a:r>
-              <a:rPr sz="850" b="0">
-                <a:solidFill>
-                  <a:srgbClr val="334155"/>
-                </a:solidFill>
-                <a:latin typeface="Malgun Gothic"/>
-              </a:rPr>
-              <a:t>대리점별 성과·수납 점검, 미납·환불 확인</a:t>
+                <a:spcPct val="105000"/>
+              </a:lnSpc>
+            </a:pPr>
+            <a:r>
+              <a:rPr sz="1150" b="0">
+                <a:solidFill>
+                  <a:srgbClr val="475569"/>
+                </a:solidFill>
+                <a:latin typeface="Malgun Gothic"/>
+              </a:rPr>
+              <a:t>A. 조직 트리(본사→지사→대리점)를 따라 매출·수수료가 자동 계산됩니다. 월간 리포트에서 확인하세요.</a:t>
             </a:r>
           </a:p>
         </p:txBody>
@@ -23851,17 +24132,19 @@
         </p:nvSpPr>
         <p:spPr>
           <a:xfrm>
-            <a:off x="457200" y="3703320"/>
-            <a:ext cx="1600200" cy="384048"/>
+            <a:off x="365760" y="4517136"/>
+            <a:ext cx="11460175" cy="868680"/>
           </a:xfrm>
           <a:prstGeom prst="roundRect">
             <a:avLst/>
           </a:prstGeom>
           <a:solidFill>
-            <a:srgbClr val="0D9488"/>
+            <a:srgbClr val="F8FAFC"/>
           </a:solidFill>
-          <a:ln>
-            <a:noFill/>
+          <a:ln w="12700">
+            <a:solidFill>
+              <a:srgbClr val="E2E8F0"/>
+            </a:solidFill>
           </a:ln>
           <a:effectLst/>
         </p:spPr>
@@ -23895,33 +24178,33 @@
         </p:nvSpPr>
         <p:spPr>
           <a:xfrm>
-            <a:off x="457200" y="3703320"/>
-            <a:ext cx="1600200" cy="384048"/>
-          </a:xfrm>
-          <a:prstGeom prst="rect">
-            <a:avLst/>
-          </a:prstGeom>
-          <a:noFill/>
-        </p:spPr>
-        <p:txBody>
-          <a:bodyPr wrap="square" anchor="ctr">
-            <a:spAutoFit/>
-          </a:bodyPr>
-          <a:lstStyle/>
-          <a:p>
-            <a:pPr algn="ctr">
+            <a:off x="548640" y="4590288"/>
+            <a:ext cx="11094415" cy="365760"/>
+          </a:xfrm>
+          <a:prstGeom prst="rect">
+            <a:avLst/>
+          </a:prstGeom>
+          <a:noFill/>
+        </p:spPr>
+        <p:txBody>
+          <a:bodyPr wrap="square" anchor="t">
+            <a:spAutoFit/>
+          </a:bodyPr>
+          <a:lstStyle/>
+          <a:p>
+            <a:pPr algn="l">
               <a:lnSpc>
                 <a:spcPct val="100000"/>
               </a:lnSpc>
             </a:pPr>
             <a:r>
-              <a:rPr sz="850" b="1">
-                <a:solidFill>
-                  <a:srgbClr val="FFFFFF"/>
-                </a:solidFill>
-                <a:latin typeface="Malgun Gothic"/>
-              </a:rPr>
-              <a:t>오후</a:t>
+              <a:rPr sz="1350" b="1">
+                <a:solidFill>
+                  <a:srgbClr val="0D9488"/>
+                </a:solidFill>
+                <a:latin typeface="Malgun Gothic"/>
+              </a:rPr>
+              <a:t>Q. 대리점 성과가 부진해요.</a:t>
             </a:r>
           </a:p>
         </p:txBody>
@@ -23934,33 +24217,33 @@
         </p:nvSpPr>
         <p:spPr>
           <a:xfrm>
-            <a:off x="2148840" y="3685032"/>
-            <a:ext cx="4114800" cy="420624"/>
-          </a:xfrm>
-          <a:prstGeom prst="rect">
-            <a:avLst/>
-          </a:prstGeom>
-          <a:noFill/>
-        </p:spPr>
-        <p:txBody>
-          <a:bodyPr wrap="square" anchor="ctr">
+            <a:off x="548640" y="4928616"/>
+            <a:ext cx="11094415" cy="411480"/>
+          </a:xfrm>
+          <a:prstGeom prst="rect">
+            <a:avLst/>
+          </a:prstGeom>
+          <a:noFill/>
+        </p:spPr>
+        <p:txBody>
+          <a:bodyPr wrap="square" anchor="t">
             <a:spAutoFit/>
           </a:bodyPr>
           <a:lstStyle/>
           <a:p>
             <a:pPr algn="l">
               <a:lnSpc>
-                <a:spcPct val="100000"/>
-              </a:lnSpc>
-            </a:pPr>
-            <a:r>
-              <a:rPr sz="850" b="0">
-                <a:solidFill>
-                  <a:srgbClr val="334155"/>
-                </a:solidFill>
-                <a:latin typeface="Malgun Gothic"/>
-              </a:rPr>
-              <a:t>부진 대리점 지원·코칭, 이탈위험 학생 케어(리텐션)</a:t>
+                <a:spcPct val="105000"/>
+              </a:lnSpc>
+            </a:pPr>
+            <a:r>
+              <a:rPr sz="1150" b="0">
+                <a:solidFill>
+                  <a:srgbClr val="475569"/>
+                </a:solidFill>
+                <a:latin typeface="Malgun Gothic"/>
+              </a:rPr>
+              <a:t>A. 리텐션·회계·리포트로 원인을 찾고, 온보딩·코칭·인센티브로 지원하세요. 우수 사례 공유도 효과적입니다.</a:t>
             </a:r>
           </a:p>
         </p:txBody>
@@ -23973,17 +24256,19 @@
         </p:nvSpPr>
         <p:spPr>
           <a:xfrm>
-            <a:off x="457200" y="4160520"/>
-            <a:ext cx="1600200" cy="384048"/>
+            <a:off x="365760" y="5504688"/>
+            <a:ext cx="11460175" cy="868680"/>
           </a:xfrm>
           <a:prstGeom prst="roundRect">
             <a:avLst/>
           </a:prstGeom>
           <a:solidFill>
-            <a:srgbClr val="0D9488"/>
+            <a:srgbClr val="F8FAFC"/>
           </a:solidFill>
-          <a:ln>
-            <a:noFill/>
+          <a:ln w="12700">
+            <a:solidFill>
+              <a:srgbClr val="E2E8F0"/>
+            </a:solidFill>
           </a:ln>
           <a:effectLst/>
         </p:spPr>
@@ -24017,33 +24302,33 @@
         </p:nvSpPr>
         <p:spPr>
           <a:xfrm>
-            <a:off x="457200" y="4160520"/>
-            <a:ext cx="1600200" cy="384048"/>
-          </a:xfrm>
-          <a:prstGeom prst="rect">
-            <a:avLst/>
-          </a:prstGeom>
-          <a:noFill/>
-        </p:spPr>
-        <p:txBody>
-          <a:bodyPr wrap="square" anchor="ctr">
-            <a:spAutoFit/>
-          </a:bodyPr>
-          <a:lstStyle/>
-          <a:p>
-            <a:pPr algn="ctr">
+            <a:off x="548640" y="5577840"/>
+            <a:ext cx="11094415" cy="365760"/>
+          </a:xfrm>
+          <a:prstGeom prst="rect">
+            <a:avLst/>
+          </a:prstGeom>
+          <a:noFill/>
+        </p:spPr>
+        <p:txBody>
+          <a:bodyPr wrap="square" anchor="t">
+            <a:spAutoFit/>
+          </a:bodyPr>
+          <a:lstStyle/>
+          <a:p>
+            <a:pPr algn="l">
               <a:lnSpc>
                 <a:spcPct val="100000"/>
               </a:lnSpc>
             </a:pPr>
             <a:r>
-              <a:rPr sz="850" b="1">
-                <a:solidFill>
-                  <a:srgbClr val="FFFFFF"/>
-                </a:solidFill>
-                <a:latin typeface="Malgun Gothic"/>
-              </a:rPr>
-              <a:t>주간</a:t>
+              <a:rPr sz="1350" b="1">
+                <a:solidFill>
+                  <a:srgbClr val="0D9488"/>
+                </a:solidFill>
+                <a:latin typeface="Malgun Gothic"/>
+              </a:rPr>
+              <a:t>Q. 시스템 문제가 생겼어요.</a:t>
             </a:r>
           </a:p>
         </p:txBody>
@@ -24056,616 +24341,33 @@
         </p:nvSpPr>
         <p:spPr>
           <a:xfrm>
-            <a:off x="2148840" y="4142232"/>
-            <a:ext cx="4114800" cy="420624"/>
-          </a:xfrm>
-          <a:prstGeom prst="rect">
-            <a:avLst/>
-          </a:prstGeom>
-          <a:noFill/>
-        </p:spPr>
-        <p:txBody>
-          <a:bodyPr wrap="square" anchor="ctr">
+            <a:off x="548640" y="5916168"/>
+            <a:ext cx="11094415" cy="411480"/>
+          </a:xfrm>
+          <a:prstGeom prst="rect">
+            <a:avLst/>
+          </a:prstGeom>
+          <a:noFill/>
+        </p:spPr>
+        <p:txBody>
+          <a:bodyPr wrap="square" anchor="t">
             <a:spAutoFit/>
           </a:bodyPr>
           <a:lstStyle/>
           <a:p>
             <a:pPr algn="l">
               <a:lnSpc>
-                <a:spcPct val="100000"/>
-              </a:lnSpc>
-            </a:pPr>
-            <a:r>
-              <a:rPr sz="850" b="0">
-                <a:solidFill>
-                  <a:srgbClr val="334155"/>
-                </a:solidFill>
-                <a:latin typeface="Malgun Gothic"/>
-              </a:rPr>
-              <a:t>신규 대리점 온보딩, 우수 사례 공유</a:t>
-            </a:r>
-          </a:p>
-        </p:txBody>
-      </p:sp>
-      <p:sp>
-        <p:nvSpPr>
-          <p:cNvPr id="24" name="Rounded Rectangle 23"/>
-          <p:cNvSpPr/>
-          <p:nvPr/>
-        </p:nvSpPr>
-        <p:spPr>
-          <a:xfrm>
-            <a:off x="457200" y="4617720"/>
-            <a:ext cx="1600200" cy="384048"/>
-          </a:xfrm>
-          <a:prstGeom prst="roundRect">
-            <a:avLst/>
-          </a:prstGeom>
-          <a:solidFill>
-            <a:srgbClr val="0D9488"/>
-          </a:solidFill>
-          <a:ln>
-            <a:noFill/>
-          </a:ln>
-          <a:effectLst/>
-        </p:spPr>
-        <p:style>
-          <a:lnRef idx="1">
-            <a:schemeClr val="accent1"/>
-          </a:lnRef>
-          <a:fillRef idx="3">
-            <a:schemeClr val="accent1"/>
-          </a:fillRef>
-          <a:effectRef idx="2">
-            <a:schemeClr val="accent1"/>
-          </a:effectRef>
-          <a:fontRef idx="minor">
-            <a:schemeClr val="lt1"/>
-          </a:fontRef>
-        </p:style>
-        <p:txBody>
-          <a:bodyPr rtlCol="0" anchor="ctr"/>
-          <a:lstStyle/>
-          <a:p>
-            <a:pPr algn="ctr"/>
-          </a:p>
-        </p:txBody>
-      </p:sp>
-      <p:sp>
-        <p:nvSpPr>
-          <p:cNvPr id="25" name="TextBox 24"/>
-          <p:cNvSpPr txBox="1"/>
-          <p:nvPr/>
-        </p:nvSpPr>
-        <p:spPr>
-          <a:xfrm>
-            <a:off x="457200" y="4617720"/>
-            <a:ext cx="1600200" cy="384048"/>
-          </a:xfrm>
-          <a:prstGeom prst="rect">
-            <a:avLst/>
-          </a:prstGeom>
-          <a:noFill/>
-        </p:spPr>
-        <p:txBody>
-          <a:bodyPr wrap="square" anchor="ctr">
-            <a:spAutoFit/>
-          </a:bodyPr>
-          <a:lstStyle/>
-          <a:p>
-            <a:pPr algn="ctr">
-              <a:lnSpc>
-                <a:spcPct val="100000"/>
-              </a:lnSpc>
-            </a:pPr>
-            <a:r>
-              <a:rPr sz="850" b="1">
-                <a:solidFill>
-                  <a:srgbClr val="FFFFFF"/>
-                </a:solidFill>
-                <a:latin typeface="Malgun Gothic"/>
-              </a:rPr>
-              <a:t>월간</a:t>
-            </a:r>
-          </a:p>
-        </p:txBody>
-      </p:sp>
-      <p:sp>
-        <p:nvSpPr>
-          <p:cNvPr id="26" name="TextBox 25"/>
-          <p:cNvSpPr txBox="1"/>
-          <p:nvPr/>
-        </p:nvSpPr>
-        <p:spPr>
-          <a:xfrm>
-            <a:off x="2148840" y="4599432"/>
-            <a:ext cx="4114800" cy="420624"/>
-          </a:xfrm>
-          <a:prstGeom prst="rect">
-            <a:avLst/>
-          </a:prstGeom>
-          <a:noFill/>
-        </p:spPr>
-        <p:txBody>
-          <a:bodyPr wrap="square" anchor="ctr">
-            <a:spAutoFit/>
-          </a:bodyPr>
-          <a:lstStyle/>
-          <a:p>
-            <a:pPr algn="l">
-              <a:lnSpc>
-                <a:spcPct val="100000"/>
-              </a:lnSpc>
-            </a:pPr>
-            <a:r>
-              <a:rPr sz="850" b="0">
-                <a:solidFill>
-                  <a:srgbClr val="334155"/>
-                </a:solidFill>
-                <a:latin typeface="Malgun Gothic"/>
-              </a:rPr>
-              <a:t>본사→지사→대리점 정산 확인·배포, 월간 리포트 공유</a:t>
-            </a:r>
-          </a:p>
-        </p:txBody>
-      </p:sp>
-      <p:sp>
-        <p:nvSpPr>
-          <p:cNvPr id="27" name="TextBox 26"/>
-          <p:cNvSpPr txBox="1"/>
-          <p:nvPr/>
-        </p:nvSpPr>
-        <p:spPr>
-          <a:xfrm>
-            <a:off x="6400800" y="2423160"/>
-            <a:ext cx="5486400" cy="320040"/>
-          </a:xfrm>
-          <a:prstGeom prst="rect">
-            <a:avLst/>
-          </a:prstGeom>
-          <a:noFill/>
-        </p:spPr>
-        <p:txBody>
-          <a:bodyPr wrap="square" anchor="t">
-            <a:spAutoFit/>
-          </a:bodyPr>
-          <a:lstStyle/>
-          <a:p>
-            <a:pPr algn="l">
-              <a:lnSpc>
-                <a:spcPct val="100000"/>
-              </a:lnSpc>
-            </a:pPr>
-            <a:r>
-              <a:rPr sz="1350" b="1">
-                <a:solidFill>
-                  <a:srgbClr val="0D9488"/>
-                </a:solidFill>
-                <a:latin typeface="Malgun Gothic"/>
-              </a:rPr>
-              <a:t>⭐ 핵심 원칙</a:t>
-            </a:r>
-          </a:p>
-        </p:txBody>
-      </p:sp>
-      <p:sp>
-        <p:nvSpPr>
-          <p:cNvPr id="28" name="TextBox 27"/>
-          <p:cNvSpPr txBox="1"/>
-          <p:nvPr/>
-        </p:nvSpPr>
-        <p:spPr>
-          <a:xfrm>
-            <a:off x="6400800" y="2788920"/>
-            <a:ext cx="5394960" cy="2103120"/>
-          </a:xfrm>
-          <a:prstGeom prst="rect">
-            <a:avLst/>
-          </a:prstGeom>
-          <a:noFill/>
-        </p:spPr>
-        <p:txBody>
-          <a:bodyPr wrap="square">
-            <a:spAutoFit/>
-          </a:bodyPr>
-          <a:lstStyle/>
-          <a:p>
-            <a:pPr>
-              <a:lnSpc>
-                <a:spcPct val="115000"/>
-              </a:lnSpc>
-              <a:spcAft>
-                <a:spcPts val="500"/>
-              </a:spcAft>
-            </a:pPr>
-            <a:r>
-              <a:rPr sz="900" b="1">
-                <a:solidFill>
-                  <a:srgbClr val="0D9488"/>
-                </a:solidFill>
-                <a:latin typeface="Malgun Gothic"/>
-              </a:rPr>
-              <a:t>● </a:t>
-            </a:r>
-            <a:r>
-              <a:rPr sz="1100">
-                <a:solidFill>
-                  <a:srgbClr val="334155"/>
-                </a:solidFill>
-                <a:latin typeface="Malgun Gothic"/>
-              </a:rPr>
-              <a:t>지표는 매일 아침 5분 — 지사·대리점 이상 신호를 빨리 잡아요.</a:t>
-            </a:r>
-          </a:p>
-          <a:p>
-            <a:pPr>
-              <a:lnSpc>
-                <a:spcPct val="115000"/>
-              </a:lnSpc>
-              <a:spcAft>
-                <a:spcPts val="500"/>
-              </a:spcAft>
-            </a:pPr>
-            <a:r>
-              <a:rPr sz="900" b="1">
-                <a:solidFill>
-                  <a:srgbClr val="0D9488"/>
-                </a:solidFill>
-                <a:latin typeface="Malgun Gothic"/>
-              </a:rPr>
-              <a:t>● </a:t>
-            </a:r>
-            <a:r>
-              <a:rPr sz="1100">
-                <a:solidFill>
-                  <a:srgbClr val="334155"/>
-                </a:solidFill>
-                <a:latin typeface="Malgun Gothic"/>
-              </a:rPr>
-              <a:t>대리점을 파트너로 — 성과 편차를 코칭·지원으로 좁혀요.</a:t>
-            </a:r>
-          </a:p>
-          <a:p>
-            <a:pPr>
-              <a:lnSpc>
-                <a:spcPct val="115000"/>
-              </a:lnSpc>
-              <a:spcAft>
-                <a:spcPts val="500"/>
-              </a:spcAft>
-            </a:pPr>
-            <a:r>
-              <a:rPr sz="900" b="1">
-                <a:solidFill>
-                  <a:srgbClr val="0D9488"/>
-                </a:solidFill>
-                <a:latin typeface="Malgun Gothic"/>
-              </a:rPr>
-              <a:t>● </a:t>
-            </a:r>
-            <a:r>
-              <a:rPr sz="1100">
-                <a:solidFill>
-                  <a:srgbClr val="334155"/>
-                </a:solidFill>
-                <a:latin typeface="Malgun Gothic"/>
-              </a:rPr>
-              <a:t>정산은 투명하게 — 기준을 미리 공지하면 신뢰가 쌓여요.</a:t>
-            </a:r>
-          </a:p>
-          <a:p>
-            <a:pPr>
-              <a:lnSpc>
-                <a:spcPct val="115000"/>
-              </a:lnSpc>
-              <a:spcAft>
-                <a:spcPts val="500"/>
-              </a:spcAft>
-            </a:pPr>
-            <a:r>
-              <a:rPr sz="900" b="1">
-                <a:solidFill>
-                  <a:srgbClr val="0D9488"/>
-                </a:solidFill>
-                <a:latin typeface="Malgun Gothic"/>
-              </a:rPr>
-              <a:t>● </a:t>
-            </a:r>
-            <a:r>
-              <a:rPr sz="1100">
-                <a:solidFill>
-                  <a:srgbClr val="334155"/>
-                </a:solidFill>
-                <a:latin typeface="Malgun Gothic"/>
-              </a:rPr>
-              <a:t>이탈은 조기 개입 — 위험 대리점·학생을 먼저 챙겨요.</a:t>
-            </a:r>
-          </a:p>
-          <a:p>
-            <a:pPr>
-              <a:lnSpc>
-                <a:spcPct val="115000"/>
-              </a:lnSpc>
-              <a:spcAft>
-                <a:spcPts val="500"/>
-              </a:spcAft>
-            </a:pPr>
-            <a:r>
-              <a:rPr sz="900" b="1">
-                <a:solidFill>
-                  <a:srgbClr val="0D9488"/>
-                </a:solidFill>
-                <a:latin typeface="Malgun Gothic"/>
-              </a:rPr>
-              <a:t>● </a:t>
-            </a:r>
-            <a:r>
-              <a:rPr sz="1100">
-                <a:solidFill>
-                  <a:srgbClr val="334155"/>
-                </a:solidFill>
-                <a:latin typeface="Malgun Gothic"/>
-              </a:rPr>
-              <a:t>우수 사례를 확산 — 잘하는 대리점 방식을 전체로 공유해요.</a:t>
-            </a:r>
-          </a:p>
-        </p:txBody>
-      </p:sp>
-      <p:sp>
-        <p:nvSpPr>
-          <p:cNvPr id="29" name="TextBox 28"/>
-          <p:cNvSpPr txBox="1"/>
-          <p:nvPr/>
-        </p:nvSpPr>
-        <p:spPr>
-          <a:xfrm>
-            <a:off x="6400800" y="4892040"/>
-            <a:ext cx="5486400" cy="320040"/>
-          </a:xfrm>
-          <a:prstGeom prst="rect">
-            <a:avLst/>
-          </a:prstGeom>
-          <a:noFill/>
-        </p:spPr>
-        <p:txBody>
-          <a:bodyPr wrap="square" anchor="t">
-            <a:spAutoFit/>
-          </a:bodyPr>
-          <a:lstStyle/>
-          <a:p>
-            <a:pPr algn="l">
-              <a:lnSpc>
-                <a:spcPct val="100000"/>
-              </a:lnSpc>
-            </a:pPr>
-            <a:r>
-              <a:rPr sz="1350" b="1">
-                <a:solidFill>
-                  <a:srgbClr val="0D9488"/>
-                </a:solidFill>
-                <a:latin typeface="Malgun Gothic"/>
-              </a:rPr>
-              <a:t>📌 꼭 기억하세요</a:t>
-            </a:r>
-          </a:p>
-        </p:txBody>
-      </p:sp>
-      <p:sp>
-        <p:nvSpPr>
-          <p:cNvPr id="30" name="TextBox 29"/>
-          <p:cNvSpPr txBox="1"/>
-          <p:nvPr/>
-        </p:nvSpPr>
-        <p:spPr>
-          <a:xfrm>
-            <a:off x="6400800" y="5257800"/>
-            <a:ext cx="5394960" cy="1645920"/>
-          </a:xfrm>
-          <a:prstGeom prst="rect">
-            <a:avLst/>
-          </a:prstGeom>
-          <a:noFill/>
-        </p:spPr>
-        <p:txBody>
-          <a:bodyPr wrap="square">
-            <a:spAutoFit/>
-          </a:bodyPr>
-          <a:lstStyle/>
-          <a:p>
-            <a:pPr>
-              <a:lnSpc>
-                <a:spcPct val="115000"/>
-              </a:lnSpc>
-              <a:spcAft>
-                <a:spcPts val="400"/>
-              </a:spcAft>
-            </a:pPr>
-            <a:r>
-              <a:rPr sz="850" b="1">
-                <a:solidFill>
-                  <a:srgbClr val="F59E0B"/>
-                </a:solidFill>
-                <a:latin typeface="Malgun Gothic"/>
-              </a:rPr>
-              <a:t>● </a:t>
-            </a:r>
-            <a:r>
-              <a:rPr sz="1050">
-                <a:solidFill>
-                  <a:srgbClr val="334155"/>
-                </a:solidFill>
-                <a:latin typeface="Malgun Gothic"/>
-              </a:rPr>
-              <a:t>접속은 admin.mangoi.co.kr, 데이터는 우리 지사 범위로 자동 한정돼요</a:t>
-            </a:r>
-          </a:p>
-          <a:p>
-            <a:pPr>
-              <a:lnSpc>
-                <a:spcPct val="115000"/>
-              </a:lnSpc>
-              <a:spcAft>
-                <a:spcPts val="400"/>
-              </a:spcAft>
-            </a:pPr>
-            <a:r>
-              <a:rPr sz="850" b="1">
-                <a:solidFill>
-                  <a:srgbClr val="F59E0B"/>
-                </a:solidFill>
-                <a:latin typeface="Malgun Gothic"/>
-              </a:rPr>
-              <a:t>● </a:t>
-            </a:r>
-            <a:r>
-              <a:rPr sz="1050">
-                <a:solidFill>
-                  <a:srgbClr val="334155"/>
-                </a:solidFill>
-                <a:latin typeface="Malgun Gothic"/>
-              </a:rPr>
-              <a:t>정산은 본사→지사→대리점 트리 구조로 자동 계산돼요</a:t>
-            </a:r>
-          </a:p>
-          <a:p>
-            <a:pPr>
-              <a:lnSpc>
-                <a:spcPct val="115000"/>
-              </a:lnSpc>
-              <a:spcAft>
-                <a:spcPts val="400"/>
-              </a:spcAft>
-            </a:pPr>
-            <a:r>
-              <a:rPr sz="850" b="1">
-                <a:solidFill>
-                  <a:srgbClr val="F59E0B"/>
-                </a:solidFill>
-                <a:latin typeface="Malgun Gothic"/>
-              </a:rPr>
-              <a:t>● </a:t>
-            </a:r>
-            <a:r>
-              <a:rPr sz="1050">
-                <a:solidFill>
-                  <a:srgbClr val="334155"/>
-                </a:solidFill>
-                <a:latin typeface="Malgun Gothic"/>
-              </a:rPr>
-              <a:t>‘입장 안 됨’ 등 현장 문의의 대부분은 브라우저·권한 문제예요</a:t>
-            </a:r>
-          </a:p>
-          <a:p>
-            <a:pPr>
-              <a:lnSpc>
-                <a:spcPct val="115000"/>
-              </a:lnSpc>
-              <a:spcAft>
-                <a:spcPts val="400"/>
-              </a:spcAft>
-            </a:pPr>
-            <a:r>
-              <a:rPr sz="850" b="1">
-                <a:solidFill>
-                  <a:srgbClr val="F59E0B"/>
-                </a:solidFill>
-                <a:latin typeface="Malgun Gothic"/>
-              </a:rPr>
-              <a:t>● </a:t>
-            </a:r>
-            <a:r>
-              <a:rPr sz="1050">
-                <a:solidFill>
-                  <a:srgbClr val="334155"/>
-                </a:solidFill>
-                <a:latin typeface="Malgun Gothic"/>
-              </a:rPr>
-              <a:t>운영 리듬은 ‘점검 → 지원 → 정산 → 리포트’!</a:t>
-            </a:r>
-          </a:p>
-        </p:txBody>
-      </p:sp>
-      <p:sp>
-        <p:nvSpPr>
-          <p:cNvPr id="31" name="Rounded Rectangle 30"/>
-          <p:cNvSpPr/>
-          <p:nvPr/>
-        </p:nvSpPr>
-        <p:spPr>
-          <a:xfrm>
-            <a:off x="457200" y="6172200"/>
-            <a:ext cx="11338560" cy="566928"/>
-          </a:xfrm>
-          <a:prstGeom prst="roundRect">
-            <a:avLst/>
-          </a:prstGeom>
-          <a:solidFill>
-            <a:srgbClr val="ECFDF5"/>
-          </a:solidFill>
-          <a:ln w="12700">
-            <a:solidFill>
-              <a:srgbClr val="F59E0B"/>
-            </a:solidFill>
-          </a:ln>
-          <a:effectLst/>
-        </p:spPr>
-        <p:style>
-          <a:lnRef idx="1">
-            <a:schemeClr val="accent1"/>
-          </a:lnRef>
-          <a:fillRef idx="3">
-            <a:schemeClr val="accent1"/>
-          </a:fillRef>
-          <a:effectRef idx="2">
-            <a:schemeClr val="accent1"/>
-          </a:effectRef>
-          <a:fontRef idx="minor">
-            <a:schemeClr val="lt1"/>
-          </a:fontRef>
-        </p:style>
-        <p:txBody>
-          <a:bodyPr rtlCol="0" anchor="ctr"/>
-          <a:lstStyle/>
-          <a:p>
-            <a:pPr algn="ctr"/>
-          </a:p>
-        </p:txBody>
-      </p:sp>
-      <p:sp>
-        <p:nvSpPr>
-          <p:cNvPr id="32" name="TextBox 31"/>
-          <p:cNvSpPr txBox="1"/>
-          <p:nvPr/>
-        </p:nvSpPr>
-        <p:spPr>
-          <a:xfrm>
-            <a:off x="640080" y="6208776"/>
-            <a:ext cx="10972800" cy="502920"/>
-          </a:xfrm>
-          <a:prstGeom prst="rect">
-            <a:avLst/>
-          </a:prstGeom>
-          <a:noFill/>
-        </p:spPr>
-        <p:txBody>
-          <a:bodyPr wrap="square" anchor="t">
-            <a:spAutoFit/>
-          </a:bodyPr>
-          <a:lstStyle/>
-          <a:p>
-            <a:pPr algn="l">
-              <a:lnSpc>
-                <a:spcPct val="102000"/>
-              </a:lnSpc>
-            </a:pPr>
-            <a:r>
-              <a:rPr sz="1000" b="0">
-                <a:solidFill>
-                  <a:srgbClr val="5B4A2A"/>
-                </a:solidFill>
-                <a:latin typeface="Malgun Gothic"/>
-              </a:rPr>
-              <a:t>🍊 좋은 지사는 대리점이 잘되게 돕는 지사예요. 지표로 상황을 읽고, 파트너를 지원하고, 정산을 투명하게 하면 지사와 대리점이 함께 성장합니다. 궁금한 점은 언제든 본사 고객센터로 — 든든한 지사 운영을 응원합니다! 🍊</a:t>
+                <a:spcPct val="105000"/>
+              </a:lnSpc>
+            </a:pPr>
+            <a:r>
+              <a:rPr sz="1150" b="0">
+                <a:solidFill>
+                  <a:srgbClr val="475569"/>
+                </a:solidFill>
+                <a:latin typeface="Malgun Gothic"/>
+              </a:rPr>
+              <a:t>A. 본사 고객센터(전화·이메일·카카오·원격지원)로 문의하면 빠르게 해결됩니다.</a:t>
             </a:r>
           </a:p>
         </p:txBody>
@@ -27080,7 +26782,7 @@
         </p:nvSpPr>
         <p:spPr>
           <a:xfrm>
-            <a:off x="6141567" y="1481328"/>
+            <a:off x="411480" y="5321808"/>
             <a:ext cx="384048" cy="228600"/>
           </a:xfrm>
           <a:prstGeom prst="roundRect">
@@ -27124,7 +26826,7 @@
         </p:nvSpPr>
         <p:spPr>
           <a:xfrm>
-            <a:off x="6141567" y="1463040"/>
+            <a:off x="411480" y="5303520"/>
             <a:ext cx="384048" cy="265176"/>
           </a:xfrm>
           <a:prstGeom prst="rect">
@@ -27163,7 +26865,7 @@
         </p:nvSpPr>
         <p:spPr>
           <a:xfrm>
-            <a:off x="6617055" y="1453896"/>
+            <a:off x="886968" y="5294376"/>
             <a:ext cx="4587087" cy="274320"/>
           </a:xfrm>
           <a:prstGeom prst="rect">
@@ -27202,7 +26904,7 @@
         </p:nvSpPr>
         <p:spPr>
           <a:xfrm>
-            <a:off x="11213287" y="1453896"/>
+            <a:off x="5483199" y="5294376"/>
             <a:ext cx="457200" cy="274320"/>
           </a:xfrm>
           <a:prstGeom prst="rect">
@@ -27241,7 +26943,7 @@
         </p:nvSpPr>
         <p:spPr>
           <a:xfrm>
-            <a:off x="6141567" y="1755648"/>
+            <a:off x="6141567" y="1481328"/>
             <a:ext cx="384048" cy="228600"/>
           </a:xfrm>
           <a:prstGeom prst="roundRect">
@@ -27285,7 +26987,7 @@
         </p:nvSpPr>
         <p:spPr>
           <a:xfrm>
-            <a:off x="6141567" y="1737360"/>
+            <a:off x="6141567" y="1463040"/>
             <a:ext cx="384048" cy="265176"/>
           </a:xfrm>
           <a:prstGeom prst="rect">
@@ -27324,7 +27026,7 @@
         </p:nvSpPr>
         <p:spPr>
           <a:xfrm>
-            <a:off x="6617055" y="1728216"/>
+            <a:off x="6617055" y="1453896"/>
             <a:ext cx="4587087" cy="274320"/>
           </a:xfrm>
           <a:prstGeom prst="rect">
@@ -27363,7 +27065,7 @@
         </p:nvSpPr>
         <p:spPr>
           <a:xfrm>
-            <a:off x="11213287" y="1728216"/>
+            <a:off x="11213287" y="1453896"/>
             <a:ext cx="457200" cy="274320"/>
           </a:xfrm>
           <a:prstGeom prst="rect">
@@ -27402,7 +27104,7 @@
         </p:nvSpPr>
         <p:spPr>
           <a:xfrm>
-            <a:off x="6141567" y="2029968"/>
+            <a:off x="6141567" y="1755648"/>
             <a:ext cx="384048" cy="228600"/>
           </a:xfrm>
           <a:prstGeom prst="roundRect">
@@ -27446,7 +27148,7 @@
         </p:nvSpPr>
         <p:spPr>
           <a:xfrm>
-            <a:off x="6141567" y="2011680"/>
+            <a:off x="6141567" y="1737360"/>
             <a:ext cx="384048" cy="265176"/>
           </a:xfrm>
           <a:prstGeom prst="rect">
@@ -27485,7 +27187,7 @@
         </p:nvSpPr>
         <p:spPr>
           <a:xfrm>
-            <a:off x="6617055" y="2002536"/>
+            <a:off x="6617055" y="1728216"/>
             <a:ext cx="4587087" cy="274320"/>
           </a:xfrm>
           <a:prstGeom prst="rect">
@@ -27524,7 +27226,7 @@
         </p:nvSpPr>
         <p:spPr>
           <a:xfrm>
-            <a:off x="11213287" y="2002536"/>
+            <a:off x="11213287" y="1728216"/>
             <a:ext cx="457200" cy="274320"/>
           </a:xfrm>
           <a:prstGeom prst="rect">
@@ -27563,7 +27265,7 @@
         </p:nvSpPr>
         <p:spPr>
           <a:xfrm>
-            <a:off x="6141567" y="2304288"/>
+            <a:off x="6141567" y="2029968"/>
             <a:ext cx="384048" cy="228600"/>
           </a:xfrm>
           <a:prstGeom prst="roundRect">
@@ -27607,7 +27309,7 @@
         </p:nvSpPr>
         <p:spPr>
           <a:xfrm>
-            <a:off x="6141567" y="2286000"/>
+            <a:off x="6141567" y="2011680"/>
             <a:ext cx="384048" cy="265176"/>
           </a:xfrm>
           <a:prstGeom prst="rect">
@@ -27646,7 +27348,7 @@
         </p:nvSpPr>
         <p:spPr>
           <a:xfrm>
-            <a:off x="6617055" y="2276856"/>
+            <a:off x="6617055" y="2002536"/>
             <a:ext cx="4587087" cy="274320"/>
           </a:xfrm>
           <a:prstGeom prst="rect">
@@ -27685,7 +27387,7 @@
         </p:nvSpPr>
         <p:spPr>
           <a:xfrm>
-            <a:off x="11213287" y="2276856"/>
+            <a:off x="11213287" y="2002536"/>
             <a:ext cx="457200" cy="274320"/>
           </a:xfrm>
           <a:prstGeom prst="rect">
@@ -27724,7 +27426,7 @@
         </p:nvSpPr>
         <p:spPr>
           <a:xfrm>
-            <a:off x="6141567" y="2578608"/>
+            <a:off x="6141567" y="2304288"/>
             <a:ext cx="384048" cy="228600"/>
           </a:xfrm>
           <a:prstGeom prst="roundRect">
@@ -27768,7 +27470,7 @@
         </p:nvSpPr>
         <p:spPr>
           <a:xfrm>
-            <a:off x="6141567" y="2560320"/>
+            <a:off x="6141567" y="2286000"/>
             <a:ext cx="384048" cy="265176"/>
           </a:xfrm>
           <a:prstGeom prst="rect">
@@ -27807,7 +27509,7 @@
         </p:nvSpPr>
         <p:spPr>
           <a:xfrm>
-            <a:off x="6617055" y="2551176"/>
+            <a:off x="6617055" y="2276856"/>
             <a:ext cx="4587087" cy="274320"/>
           </a:xfrm>
           <a:prstGeom prst="rect">
@@ -27846,7 +27548,7 @@
         </p:nvSpPr>
         <p:spPr>
           <a:xfrm>
-            <a:off x="11213287" y="2551176"/>
+            <a:off x="11213287" y="2276856"/>
             <a:ext cx="457200" cy="274320"/>
           </a:xfrm>
           <a:prstGeom prst="rect">
@@ -27885,7 +27587,7 @@
         </p:nvSpPr>
         <p:spPr>
           <a:xfrm>
-            <a:off x="6141567" y="2852928"/>
+            <a:off x="6141567" y="2578608"/>
             <a:ext cx="384048" cy="228600"/>
           </a:xfrm>
           <a:prstGeom prst="roundRect">
@@ -27929,7 +27631,7 @@
         </p:nvSpPr>
         <p:spPr>
           <a:xfrm>
-            <a:off x="6141567" y="2834640"/>
+            <a:off x="6141567" y="2560320"/>
             <a:ext cx="384048" cy="265176"/>
           </a:xfrm>
           <a:prstGeom prst="rect">
@@ -27968,7 +27670,7 @@
         </p:nvSpPr>
         <p:spPr>
           <a:xfrm>
-            <a:off x="6617055" y="2825496"/>
+            <a:off x="6617055" y="2551176"/>
             <a:ext cx="4587087" cy="274320"/>
           </a:xfrm>
           <a:prstGeom prst="rect">
@@ -28007,7 +27709,7 @@
         </p:nvSpPr>
         <p:spPr>
           <a:xfrm>
-            <a:off x="11213287" y="2825496"/>
+            <a:off x="11213287" y="2551176"/>
             <a:ext cx="457200" cy="274320"/>
           </a:xfrm>
           <a:prstGeom prst="rect">
@@ -28046,7 +27748,7 @@
         </p:nvSpPr>
         <p:spPr>
           <a:xfrm>
-            <a:off x="6141567" y="3127248"/>
+            <a:off x="6141567" y="2852928"/>
             <a:ext cx="384048" cy="228600"/>
           </a:xfrm>
           <a:prstGeom prst="roundRect">
@@ -28090,7 +27792,7 @@
         </p:nvSpPr>
         <p:spPr>
           <a:xfrm>
-            <a:off x="6141567" y="3108960"/>
+            <a:off x="6141567" y="2834640"/>
             <a:ext cx="384048" cy="265176"/>
           </a:xfrm>
           <a:prstGeom prst="rect">
@@ -28129,7 +27831,7 @@
         </p:nvSpPr>
         <p:spPr>
           <a:xfrm>
-            <a:off x="6617055" y="3099816"/>
+            <a:off x="6617055" y="2825496"/>
             <a:ext cx="4587087" cy="274320"/>
           </a:xfrm>
           <a:prstGeom prst="rect">
@@ -28168,7 +27870,7 @@
         </p:nvSpPr>
         <p:spPr>
           <a:xfrm>
-            <a:off x="11213287" y="3099816"/>
+            <a:off x="11213287" y="2825496"/>
             <a:ext cx="457200" cy="274320"/>
           </a:xfrm>
           <a:prstGeom prst="rect">
@@ -28207,7 +27909,7 @@
         </p:nvSpPr>
         <p:spPr>
           <a:xfrm>
-            <a:off x="6141567" y="3401568"/>
+            <a:off x="6141567" y="3127248"/>
             <a:ext cx="384048" cy="228600"/>
           </a:xfrm>
           <a:prstGeom prst="roundRect">
@@ -28251,7 +27953,7 @@
         </p:nvSpPr>
         <p:spPr>
           <a:xfrm>
-            <a:off x="6141567" y="3383280"/>
+            <a:off x="6141567" y="3108960"/>
             <a:ext cx="384048" cy="265176"/>
           </a:xfrm>
           <a:prstGeom prst="rect">
@@ -28290,7 +27992,7 @@
         </p:nvSpPr>
         <p:spPr>
           <a:xfrm>
-            <a:off x="6617055" y="3374136"/>
+            <a:off x="6617055" y="3099816"/>
             <a:ext cx="4587087" cy="274320"/>
           </a:xfrm>
           <a:prstGeom prst="rect">
@@ -28329,7 +28031,7 @@
         </p:nvSpPr>
         <p:spPr>
           <a:xfrm>
-            <a:off x="11213287" y="3374136"/>
+            <a:off x="11213287" y="3099816"/>
             <a:ext cx="457200" cy="274320"/>
           </a:xfrm>
           <a:prstGeom prst="rect">
@@ -28368,7 +28070,7 @@
         </p:nvSpPr>
         <p:spPr>
           <a:xfrm>
-            <a:off x="6141567" y="3675887"/>
+            <a:off x="6141567" y="3401568"/>
             <a:ext cx="384048" cy="228600"/>
           </a:xfrm>
           <a:prstGeom prst="roundRect">
@@ -28412,7 +28114,7 @@
         </p:nvSpPr>
         <p:spPr>
           <a:xfrm>
-            <a:off x="6141567" y="3657599"/>
+            <a:off x="6141567" y="3383280"/>
             <a:ext cx="384048" cy="265176"/>
           </a:xfrm>
           <a:prstGeom prst="rect">
@@ -28451,7 +28153,7 @@
         </p:nvSpPr>
         <p:spPr>
           <a:xfrm>
-            <a:off x="6617055" y="3648456"/>
+            <a:off x="6617055" y="3374136"/>
             <a:ext cx="4587087" cy="274320"/>
           </a:xfrm>
           <a:prstGeom prst="rect">
@@ -28477,7 +28179,7 @@
                 </a:solidFill>
                 <a:latin typeface="Malgun Gothic"/>
               </a:rPr>
-              <a:t>기능 요약 · 데이터</a:t>
+              <a:t>강사 통합 관리 개편 (명부 필터 · 그룹 · 상세 탭)</a:t>
             </a:r>
           </a:p>
         </p:txBody>
@@ -28490,7 +28192,7 @@
         </p:nvSpPr>
         <p:spPr>
           <a:xfrm>
-            <a:off x="11213287" y="3648456"/>
+            <a:off x="11213287" y="3374136"/>
             <a:ext cx="457200" cy="274320"/>
           </a:xfrm>
           <a:prstGeom prst="rect">
@@ -28529,7 +28231,7 @@
         </p:nvSpPr>
         <p:spPr>
           <a:xfrm>
-            <a:off x="6141567" y="3950208"/>
+            <a:off x="6141567" y="3675887"/>
             <a:ext cx="384048" cy="228600"/>
           </a:xfrm>
           <a:prstGeom prst="roundRect">
@@ -28573,7 +28275,7 @@
         </p:nvSpPr>
         <p:spPr>
           <a:xfrm>
-            <a:off x="6141567" y="3931920"/>
+            <a:off x="6141567" y="3657599"/>
             <a:ext cx="384048" cy="265176"/>
           </a:xfrm>
           <a:prstGeom prst="rect">
@@ -28612,7 +28314,7 @@
         </p:nvSpPr>
         <p:spPr>
           <a:xfrm>
-            <a:off x="6617055" y="3922776"/>
+            <a:off x="6617055" y="3648456"/>
             <a:ext cx="4587087" cy="274320"/>
           </a:xfrm>
           <a:prstGeom prst="rect">
@@ -28638,7 +28340,7 @@
                 </a:solidFill>
                 <a:latin typeface="Malgun Gothic"/>
               </a:rPr>
-              <a:t>한눈에 보는 데이터</a:t>
+              <a:t>학부모 월간 성적표 (오각형) 발송</a:t>
             </a:r>
           </a:p>
         </p:txBody>
@@ -28651,7 +28353,7 @@
         </p:nvSpPr>
         <p:spPr>
           <a:xfrm>
-            <a:off x="11213287" y="3922776"/>
+            <a:off x="11213287" y="3648456"/>
             <a:ext cx="457200" cy="274320"/>
           </a:xfrm>
           <a:prstGeom prst="rect">
@@ -28690,7 +28392,7 @@
         </p:nvSpPr>
         <p:spPr>
           <a:xfrm>
-            <a:off x="6141567" y="4224528"/>
+            <a:off x="6141567" y="3950208"/>
             <a:ext cx="384048" cy="228600"/>
           </a:xfrm>
           <a:prstGeom prst="roundRect">
@@ -28734,7 +28436,7 @@
         </p:nvSpPr>
         <p:spPr>
           <a:xfrm>
-            <a:off x="6141567" y="4206240"/>
+            <a:off x="6141567" y="3931920"/>
             <a:ext cx="384048" cy="265176"/>
           </a:xfrm>
           <a:prstGeom prst="rect">
@@ -28773,7 +28475,7 @@
         </p:nvSpPr>
         <p:spPr>
           <a:xfrm>
-            <a:off x="6617055" y="4197096"/>
+            <a:off x="6617055" y="3922776"/>
             <a:ext cx="4587087" cy="274320"/>
           </a:xfrm>
           <a:prstGeom prst="rect">
@@ -28799,7 +28501,7 @@
                 </a:solidFill>
                 <a:latin typeface="Malgun Gothic"/>
               </a:rPr>
-              <a:t>자주 묻는 질문 (FAQ)</a:t>
+              <a:t>기능 요약 · 데이터</a:t>
             </a:r>
           </a:p>
         </p:txBody>
@@ -28812,7 +28514,7 @@
         </p:nvSpPr>
         <p:spPr>
           <a:xfrm>
-            <a:off x="11213287" y="4197096"/>
+            <a:off x="11213287" y="3922776"/>
             <a:ext cx="457200" cy="274320"/>
           </a:xfrm>
           <a:prstGeom prst="rect">
@@ -28851,7 +28553,7 @@
         </p:nvSpPr>
         <p:spPr>
           <a:xfrm>
-            <a:off x="6141567" y="4498848"/>
+            <a:off x="6141567" y="4224528"/>
             <a:ext cx="384048" cy="228600"/>
           </a:xfrm>
           <a:prstGeom prst="roundRect">
@@ -28895,7 +28597,7 @@
         </p:nvSpPr>
         <p:spPr>
           <a:xfrm>
-            <a:off x="6141567" y="4480560"/>
+            <a:off x="6141567" y="4206240"/>
             <a:ext cx="384048" cy="265176"/>
           </a:xfrm>
           <a:prstGeom prst="rect">
@@ -28934,7 +28636,7 @@
         </p:nvSpPr>
         <p:spPr>
           <a:xfrm>
-            <a:off x="6617055" y="4471416"/>
+            <a:off x="6617055" y="4197096"/>
             <a:ext cx="4587087" cy="274320"/>
           </a:xfrm>
           <a:prstGeom prst="rect">
@@ -28960,7 +28662,7 @@
                 </a:solidFill>
                 <a:latin typeface="Malgun Gothic"/>
               </a:rPr>
-              <a:t>체크리스트</a:t>
+              <a:t>한눈에 보는 데이터</a:t>
             </a:r>
           </a:p>
         </p:txBody>
@@ -28973,7 +28675,7 @@
         </p:nvSpPr>
         <p:spPr>
           <a:xfrm>
-            <a:off x="11213287" y="4471416"/>
+            <a:off x="11213287" y="4197096"/>
             <a:ext cx="457200" cy="274320"/>
           </a:xfrm>
           <a:prstGeom prst="rect">
@@ -29012,7 +28714,7 @@
         </p:nvSpPr>
         <p:spPr>
           <a:xfrm>
-            <a:off x="6141567" y="4773168"/>
+            <a:off x="6141567" y="4498848"/>
             <a:ext cx="384048" cy="228600"/>
           </a:xfrm>
           <a:prstGeom prst="roundRect">
@@ -29056,6 +28758,167 @@
         </p:nvSpPr>
         <p:spPr>
           <a:xfrm>
+            <a:off x="6141567" y="4480560"/>
+            <a:ext cx="384048" cy="265176"/>
+          </a:xfrm>
+          <a:prstGeom prst="rect">
+            <a:avLst/>
+          </a:prstGeom>
+          <a:noFill/>
+        </p:spPr>
+        <p:txBody>
+          <a:bodyPr wrap="square" anchor="ctr">
+            <a:spAutoFit/>
+          </a:bodyPr>
+          <a:lstStyle/>
+          <a:p>
+            <a:pPr algn="ctr">
+              <a:lnSpc>
+                <a:spcPct val="100000"/>
+              </a:lnSpc>
+            </a:pPr>
+            <a:r>
+              <a:rPr sz="900" b="1">
+                <a:solidFill>
+                  <a:srgbClr val="FFFFFF"/>
+                </a:solidFill>
+                <a:latin typeface="Malgun Gothic"/>
+              </a:rPr>
+              <a:t>26</a:t>
+            </a:r>
+          </a:p>
+        </p:txBody>
+      </p:sp>
+      <p:sp>
+        <p:nvSpPr>
+          <p:cNvPr id="111" name="TextBox 110"/>
+          <p:cNvSpPr txBox="1"/>
+          <p:nvPr/>
+        </p:nvSpPr>
+        <p:spPr>
+          <a:xfrm>
+            <a:off x="6617055" y="4471416"/>
+            <a:ext cx="4587087" cy="274320"/>
+          </a:xfrm>
+          <a:prstGeom prst="rect">
+            <a:avLst/>
+          </a:prstGeom>
+          <a:noFill/>
+        </p:spPr>
+        <p:txBody>
+          <a:bodyPr wrap="square" anchor="ctr">
+            <a:spAutoFit/>
+          </a:bodyPr>
+          <a:lstStyle/>
+          <a:p>
+            <a:pPr algn="l">
+              <a:lnSpc>
+                <a:spcPct val="100000"/>
+              </a:lnSpc>
+            </a:pPr>
+            <a:r>
+              <a:rPr sz="1050" b="1">
+                <a:solidFill>
+                  <a:srgbClr val="334155"/>
+                </a:solidFill>
+                <a:latin typeface="Malgun Gothic"/>
+              </a:rPr>
+              <a:t>자주 묻는 질문 (FAQ)</a:t>
+            </a:r>
+          </a:p>
+        </p:txBody>
+      </p:sp>
+      <p:sp>
+        <p:nvSpPr>
+          <p:cNvPr id="112" name="TextBox 111"/>
+          <p:cNvSpPr txBox="1"/>
+          <p:nvPr/>
+        </p:nvSpPr>
+        <p:spPr>
+          <a:xfrm>
+            <a:off x="11213287" y="4471416"/>
+            <a:ext cx="457200" cy="274320"/>
+          </a:xfrm>
+          <a:prstGeom prst="rect">
+            <a:avLst/>
+          </a:prstGeom>
+          <a:noFill/>
+        </p:spPr>
+        <p:txBody>
+          <a:bodyPr wrap="square" anchor="ctr">
+            <a:spAutoFit/>
+          </a:bodyPr>
+          <a:lstStyle/>
+          <a:p>
+            <a:pPr algn="r">
+              <a:lnSpc>
+                <a:spcPct val="100000"/>
+              </a:lnSpc>
+            </a:pPr>
+            <a:r>
+              <a:rPr sz="1050" b="1">
+                <a:solidFill>
+                  <a:srgbClr val="0D9488"/>
+                </a:solidFill>
+                <a:latin typeface="Malgun Gothic"/>
+              </a:rPr>
+              <a:t>29</a:t>
+            </a:r>
+          </a:p>
+        </p:txBody>
+      </p:sp>
+      <p:sp>
+        <p:nvSpPr>
+          <p:cNvPr id="113" name="Rounded Rectangle 112"/>
+          <p:cNvSpPr/>
+          <p:nvPr/>
+        </p:nvSpPr>
+        <p:spPr>
+          <a:xfrm>
+            <a:off x="6141567" y="4773168"/>
+            <a:ext cx="384048" cy="228600"/>
+          </a:xfrm>
+          <a:prstGeom prst="roundRect">
+            <a:avLst/>
+          </a:prstGeom>
+          <a:solidFill>
+            <a:srgbClr val="0D9488"/>
+          </a:solidFill>
+          <a:ln>
+            <a:noFill/>
+          </a:ln>
+          <a:effectLst/>
+        </p:spPr>
+        <p:style>
+          <a:lnRef idx="1">
+            <a:schemeClr val="accent1"/>
+          </a:lnRef>
+          <a:fillRef idx="3">
+            <a:schemeClr val="accent1"/>
+          </a:fillRef>
+          <a:effectRef idx="2">
+            <a:schemeClr val="accent1"/>
+          </a:effectRef>
+          <a:fontRef idx="minor">
+            <a:schemeClr val="lt1"/>
+          </a:fontRef>
+        </p:style>
+        <p:txBody>
+          <a:bodyPr rtlCol="0" anchor="ctr"/>
+          <a:lstStyle/>
+          <a:p>
+            <a:pPr algn="ctr"/>
+          </a:p>
+        </p:txBody>
+      </p:sp>
+      <p:sp>
+        <p:nvSpPr>
+          <p:cNvPr id="114" name="TextBox 113"/>
+          <p:cNvSpPr txBox="1"/>
+          <p:nvPr/>
+        </p:nvSpPr>
+        <p:spPr>
+          <a:xfrm>
             <a:off x="6141567" y="4754880"/>
             <a:ext cx="384048" cy="265176"/>
           </a:xfrm>
@@ -29082,14 +28945,14 @@
                 </a:solidFill>
                 <a:latin typeface="Malgun Gothic"/>
               </a:rPr>
-              <a:t>26</a:t>
-            </a:r>
-          </a:p>
-        </p:txBody>
-      </p:sp>
-      <p:sp>
-        <p:nvSpPr>
-          <p:cNvPr id="111" name="TextBox 110"/>
+              <a:t>27</a:t>
+            </a:r>
+          </a:p>
+        </p:txBody>
+      </p:sp>
+      <p:sp>
+        <p:nvSpPr>
+          <p:cNvPr id="115" name="TextBox 114"/>
           <p:cNvSpPr txBox="1"/>
           <p:nvPr/>
         </p:nvSpPr>
@@ -29121,14 +28984,14 @@
                 </a:solidFill>
                 <a:latin typeface="Malgun Gothic"/>
               </a:rPr>
-              <a:t>마무리</a:t>
-            </a:r>
-          </a:p>
-        </p:txBody>
-      </p:sp>
-      <p:sp>
-        <p:nvSpPr>
-          <p:cNvPr id="112" name="TextBox 111"/>
+              <a:t>체크리스트</a:t>
+            </a:r>
+          </a:p>
+        </p:txBody>
+      </p:sp>
+      <p:sp>
+        <p:nvSpPr>
+          <p:cNvPr id="116" name="TextBox 115"/>
           <p:cNvSpPr txBox="1"/>
           <p:nvPr/>
         </p:nvSpPr>
@@ -29160,7 +29023,168 @@
                 </a:solidFill>
                 <a:latin typeface="Malgun Gothic"/>
               </a:rPr>
-              <a:t>29</a:t>
+              <a:t>30</a:t>
+            </a:r>
+          </a:p>
+        </p:txBody>
+      </p:sp>
+      <p:sp>
+        <p:nvSpPr>
+          <p:cNvPr id="117" name="Rounded Rectangle 116"/>
+          <p:cNvSpPr/>
+          <p:nvPr/>
+        </p:nvSpPr>
+        <p:spPr>
+          <a:xfrm>
+            <a:off x="6141567" y="5047488"/>
+            <a:ext cx="384048" cy="228600"/>
+          </a:xfrm>
+          <a:prstGeom prst="roundRect">
+            <a:avLst/>
+          </a:prstGeom>
+          <a:solidFill>
+            <a:srgbClr val="0D9488"/>
+          </a:solidFill>
+          <a:ln>
+            <a:noFill/>
+          </a:ln>
+          <a:effectLst/>
+        </p:spPr>
+        <p:style>
+          <a:lnRef idx="1">
+            <a:schemeClr val="accent1"/>
+          </a:lnRef>
+          <a:fillRef idx="3">
+            <a:schemeClr val="accent1"/>
+          </a:fillRef>
+          <a:effectRef idx="2">
+            <a:schemeClr val="accent1"/>
+          </a:effectRef>
+          <a:fontRef idx="minor">
+            <a:schemeClr val="lt1"/>
+          </a:fontRef>
+        </p:style>
+        <p:txBody>
+          <a:bodyPr rtlCol="0" anchor="ctr"/>
+          <a:lstStyle/>
+          <a:p>
+            <a:pPr algn="ctr"/>
+          </a:p>
+        </p:txBody>
+      </p:sp>
+      <p:sp>
+        <p:nvSpPr>
+          <p:cNvPr id="118" name="TextBox 117"/>
+          <p:cNvSpPr txBox="1"/>
+          <p:nvPr/>
+        </p:nvSpPr>
+        <p:spPr>
+          <a:xfrm>
+            <a:off x="6141567" y="5029200"/>
+            <a:ext cx="384048" cy="265176"/>
+          </a:xfrm>
+          <a:prstGeom prst="rect">
+            <a:avLst/>
+          </a:prstGeom>
+          <a:noFill/>
+        </p:spPr>
+        <p:txBody>
+          <a:bodyPr wrap="square" anchor="ctr">
+            <a:spAutoFit/>
+          </a:bodyPr>
+          <a:lstStyle/>
+          <a:p>
+            <a:pPr algn="ctr">
+              <a:lnSpc>
+                <a:spcPct val="100000"/>
+              </a:lnSpc>
+            </a:pPr>
+            <a:r>
+              <a:rPr sz="900" b="1">
+                <a:solidFill>
+                  <a:srgbClr val="FFFFFF"/>
+                </a:solidFill>
+                <a:latin typeface="Malgun Gothic"/>
+              </a:rPr>
+              <a:t>28</a:t>
+            </a:r>
+          </a:p>
+        </p:txBody>
+      </p:sp>
+      <p:sp>
+        <p:nvSpPr>
+          <p:cNvPr id="119" name="TextBox 118"/>
+          <p:cNvSpPr txBox="1"/>
+          <p:nvPr/>
+        </p:nvSpPr>
+        <p:spPr>
+          <a:xfrm>
+            <a:off x="6617055" y="5020055"/>
+            <a:ext cx="4587087" cy="274320"/>
+          </a:xfrm>
+          <a:prstGeom prst="rect">
+            <a:avLst/>
+          </a:prstGeom>
+          <a:noFill/>
+        </p:spPr>
+        <p:txBody>
+          <a:bodyPr wrap="square" anchor="ctr">
+            <a:spAutoFit/>
+          </a:bodyPr>
+          <a:lstStyle/>
+          <a:p>
+            <a:pPr algn="l">
+              <a:lnSpc>
+                <a:spcPct val="100000"/>
+              </a:lnSpc>
+            </a:pPr>
+            <a:r>
+              <a:rPr sz="1050" b="1">
+                <a:solidFill>
+                  <a:srgbClr val="334155"/>
+                </a:solidFill>
+                <a:latin typeface="Malgun Gothic"/>
+              </a:rPr>
+              <a:t>마무리</a:t>
+            </a:r>
+          </a:p>
+        </p:txBody>
+      </p:sp>
+      <p:sp>
+        <p:nvSpPr>
+          <p:cNvPr id="120" name="TextBox 119"/>
+          <p:cNvSpPr txBox="1"/>
+          <p:nvPr/>
+        </p:nvSpPr>
+        <p:spPr>
+          <a:xfrm>
+            <a:off x="11213287" y="5020055"/>
+            <a:ext cx="457200" cy="274320"/>
+          </a:xfrm>
+          <a:prstGeom prst="rect">
+            <a:avLst/>
+          </a:prstGeom>
+          <a:noFill/>
+        </p:spPr>
+        <p:txBody>
+          <a:bodyPr wrap="square" anchor="ctr">
+            <a:spAutoFit/>
+          </a:bodyPr>
+          <a:lstStyle/>
+          <a:p>
+            <a:pPr algn="r">
+              <a:lnSpc>
+                <a:spcPct val="100000"/>
+              </a:lnSpc>
+            </a:pPr>
+            <a:r>
+              <a:rPr sz="1050" b="1">
+                <a:solidFill>
+                  <a:srgbClr val="0D9488"/>
+                </a:solidFill>
+                <a:latin typeface="Malgun Gothic"/>
+              </a:rPr>
+              <a:t>31</a:t>
             </a:r>
           </a:p>
         </p:txBody>
@@ -29174,6 +29198,2446 @@
 </file>
 
 <file path=ppt/slides/slide30.xml><?xml version="1.0" encoding="utf-8"?>
+<p:sld xmlns:a="http://schemas.openxmlformats.org/drawingml/2006/main" xmlns:p="http://schemas.openxmlformats.org/presentationml/2006/main" xmlns:r="http://schemas.openxmlformats.org/officeDocument/2006/relationships">
+  <p:cSld>
+    <p:bg>
+      <p:bgPr>
+        <a:solidFill>
+          <a:srgbClr val="ECFDF5"/>
+        </a:solidFill>
+        <a:effectLst/>
+      </p:bgPr>
+    </p:bg>
+    <p:spTree>
+      <p:nvGrpSpPr>
+        <p:cNvPr id="1" name=""/>
+        <p:cNvGrpSpPr/>
+        <p:nvPr/>
+      </p:nvGrpSpPr>
+      <p:grpSpPr/>
+      <p:sp>
+        <p:nvSpPr>
+          <p:cNvPr id="2" name="Rectangle 1"/>
+          <p:cNvSpPr/>
+          <p:nvPr/>
+        </p:nvSpPr>
+        <p:spPr>
+          <a:xfrm>
+            <a:off x="0" y="0"/>
+            <a:ext cx="12191695" cy="566928"/>
+          </a:xfrm>
+          <a:prstGeom prst="rect">
+            <a:avLst/>
+          </a:prstGeom>
+          <a:solidFill>
+            <a:srgbClr val="0D9488"/>
+          </a:solidFill>
+          <a:ln>
+            <a:noFill/>
+          </a:ln>
+          <a:effectLst/>
+        </p:spPr>
+        <p:style>
+          <a:lnRef idx="1">
+            <a:schemeClr val="accent1"/>
+          </a:lnRef>
+          <a:fillRef idx="3">
+            <a:schemeClr val="accent1"/>
+          </a:fillRef>
+          <a:effectRef idx="2">
+            <a:schemeClr val="accent1"/>
+          </a:effectRef>
+          <a:fontRef idx="minor">
+            <a:schemeClr val="lt1"/>
+          </a:fontRef>
+        </p:style>
+        <p:txBody>
+          <a:bodyPr rtlCol="0" anchor="ctr"/>
+          <a:lstStyle/>
+          <a:p>
+            <a:pPr algn="ctr"/>
+          </a:p>
+        </p:txBody>
+      </p:sp>
+      <p:sp>
+        <p:nvSpPr>
+          <p:cNvPr id="3" name="Rectangle 2"/>
+          <p:cNvSpPr/>
+          <p:nvPr/>
+        </p:nvSpPr>
+        <p:spPr>
+          <a:xfrm>
+            <a:off x="0" y="566928"/>
+            <a:ext cx="12191695" cy="54864"/>
+          </a:xfrm>
+          <a:prstGeom prst="rect">
+            <a:avLst/>
+          </a:prstGeom>
+          <a:solidFill>
+            <a:srgbClr val="F59E0B"/>
+          </a:solidFill>
+          <a:ln>
+            <a:noFill/>
+          </a:ln>
+          <a:effectLst/>
+        </p:spPr>
+        <p:style>
+          <a:lnRef idx="1">
+            <a:schemeClr val="accent1"/>
+          </a:lnRef>
+          <a:fillRef idx="3">
+            <a:schemeClr val="accent1"/>
+          </a:fillRef>
+          <a:effectRef idx="2">
+            <a:schemeClr val="accent1"/>
+          </a:effectRef>
+          <a:fontRef idx="minor">
+            <a:schemeClr val="lt1"/>
+          </a:fontRef>
+        </p:style>
+        <p:txBody>
+          <a:bodyPr rtlCol="0" anchor="ctr"/>
+          <a:lstStyle/>
+          <a:p>
+            <a:pPr algn="ctr"/>
+          </a:p>
+        </p:txBody>
+      </p:sp>
+      <p:sp>
+        <p:nvSpPr>
+          <p:cNvPr id="4" name="TextBox 3"/>
+          <p:cNvSpPr txBox="1"/>
+          <p:nvPr/>
+        </p:nvSpPr>
+        <p:spPr>
+          <a:xfrm>
+            <a:off x="365760" y="27432"/>
+            <a:ext cx="7315200" cy="502920"/>
+          </a:xfrm>
+          <a:prstGeom prst="rect">
+            <a:avLst/>
+          </a:prstGeom>
+          <a:noFill/>
+        </p:spPr>
+        <p:txBody>
+          <a:bodyPr wrap="square" anchor="ctr">
+            <a:spAutoFit/>
+          </a:bodyPr>
+          <a:lstStyle/>
+          <a:p>
+            <a:pPr algn="l">
+              <a:lnSpc>
+                <a:spcPct val="100000"/>
+              </a:lnSpc>
+            </a:pPr>
+            <a:r>
+              <a:rPr sz="1500" b="1">
+                <a:solidFill>
+                  <a:srgbClr val="FFFFFF"/>
+                </a:solidFill>
+                <a:latin typeface="Malgun Gothic"/>
+              </a:rPr>
+              <a:t>🏢 망고아이 지사용 사용설명서</a:t>
+            </a:r>
+          </a:p>
+        </p:txBody>
+      </p:sp>
+      <p:sp>
+        <p:nvSpPr>
+          <p:cNvPr id="5" name="TextBox 4"/>
+          <p:cNvSpPr txBox="1"/>
+          <p:nvPr/>
+        </p:nvSpPr>
+        <p:spPr>
+          <a:xfrm>
+            <a:off x="8168335" y="27432"/>
+            <a:ext cx="3657600" cy="502920"/>
+          </a:xfrm>
+          <a:prstGeom prst="rect">
+            <a:avLst/>
+          </a:prstGeom>
+          <a:noFill/>
+        </p:spPr>
+        <p:txBody>
+          <a:bodyPr wrap="square" anchor="ctr">
+            <a:spAutoFit/>
+          </a:bodyPr>
+          <a:lstStyle/>
+          <a:p>
+            <a:pPr algn="r">
+              <a:lnSpc>
+                <a:spcPct val="100000"/>
+              </a:lnSpc>
+            </a:pPr>
+            <a:r>
+              <a:rPr sz="1300" b="1">
+                <a:solidFill>
+                  <a:srgbClr val="F1F5F9"/>
+                </a:solidFill>
+                <a:latin typeface="Malgun Gothic"/>
+              </a:rPr>
+              <a:t>체크리스트</a:t>
+            </a:r>
+          </a:p>
+        </p:txBody>
+      </p:sp>
+      <p:sp>
+        <p:nvSpPr>
+          <p:cNvPr id="6" name="Rounded Rectangle 5"/>
+          <p:cNvSpPr/>
+          <p:nvPr/>
+        </p:nvSpPr>
+        <p:spPr>
+          <a:xfrm>
+            <a:off x="365760" y="841248"/>
+            <a:ext cx="658368" cy="512064"/>
+          </a:xfrm>
+          <a:prstGeom prst="roundRect">
+            <a:avLst/>
+          </a:prstGeom>
+          <a:solidFill>
+            <a:srgbClr val="0D9488"/>
+          </a:solidFill>
+          <a:ln>
+            <a:noFill/>
+          </a:ln>
+          <a:effectLst/>
+        </p:spPr>
+        <p:style>
+          <a:lnRef idx="1">
+            <a:schemeClr val="accent1"/>
+          </a:lnRef>
+          <a:fillRef idx="3">
+            <a:schemeClr val="accent1"/>
+          </a:fillRef>
+          <a:effectRef idx="2">
+            <a:schemeClr val="accent1"/>
+          </a:effectRef>
+          <a:fontRef idx="minor">
+            <a:schemeClr val="lt1"/>
+          </a:fontRef>
+        </p:style>
+        <p:txBody>
+          <a:bodyPr rtlCol="0" anchor="ctr"/>
+          <a:lstStyle/>
+          <a:p>
+            <a:pPr algn="ctr"/>
+          </a:p>
+        </p:txBody>
+      </p:sp>
+      <p:sp>
+        <p:nvSpPr>
+          <p:cNvPr id="7" name="TextBox 6"/>
+          <p:cNvSpPr txBox="1"/>
+          <p:nvPr/>
+        </p:nvSpPr>
+        <p:spPr>
+          <a:xfrm>
+            <a:off x="365760" y="841248"/>
+            <a:ext cx="658368" cy="512064"/>
+          </a:xfrm>
+          <a:prstGeom prst="rect">
+            <a:avLst/>
+          </a:prstGeom>
+          <a:noFill/>
+        </p:spPr>
+        <p:txBody>
+          <a:bodyPr wrap="square" anchor="ctr">
+            <a:spAutoFit/>
+          </a:bodyPr>
+          <a:lstStyle/>
+          <a:p>
+            <a:pPr algn="ctr">
+              <a:lnSpc>
+                <a:spcPct val="100000"/>
+              </a:lnSpc>
+            </a:pPr>
+            <a:r>
+              <a:rPr sz="1700" b="1">
+                <a:solidFill>
+                  <a:srgbClr val="FFFFFF"/>
+                </a:solidFill>
+                <a:latin typeface="Malgun Gothic"/>
+              </a:rPr>
+              <a:t>27</a:t>
+            </a:r>
+          </a:p>
+        </p:txBody>
+      </p:sp>
+      <p:sp>
+        <p:nvSpPr>
+          <p:cNvPr id="8" name="TextBox 7"/>
+          <p:cNvSpPr txBox="1"/>
+          <p:nvPr/>
+        </p:nvSpPr>
+        <p:spPr>
+          <a:xfrm>
+            <a:off x="1143000" y="868680"/>
+            <a:ext cx="9144000" cy="457200"/>
+          </a:xfrm>
+          <a:prstGeom prst="rect">
+            <a:avLst/>
+          </a:prstGeom>
+          <a:noFill/>
+        </p:spPr>
+        <p:txBody>
+          <a:bodyPr wrap="square" anchor="t">
+            <a:spAutoFit/>
+          </a:bodyPr>
+          <a:lstStyle/>
+          <a:p>
+            <a:pPr algn="l">
+              <a:lnSpc>
+                <a:spcPct val="100000"/>
+              </a:lnSpc>
+            </a:pPr>
+            <a:r>
+              <a:rPr sz="2200" b="1">
+                <a:solidFill>
+                  <a:srgbClr val="0D9488"/>
+                </a:solidFill>
+                <a:latin typeface="Malgun Gothic"/>
+              </a:rPr>
+              <a:t>✅ 지사 운영 체크리스트</a:t>
+            </a:r>
+          </a:p>
+        </p:txBody>
+      </p:sp>
+      <p:sp>
+        <p:nvSpPr>
+          <p:cNvPr id="9" name="Rounded Rectangle 8"/>
+          <p:cNvSpPr/>
+          <p:nvPr/>
+        </p:nvSpPr>
+        <p:spPr>
+          <a:xfrm>
+            <a:off x="457200" y="1645920"/>
+            <a:ext cx="292608" cy="292608"/>
+          </a:xfrm>
+          <a:prstGeom prst="roundRect">
+            <a:avLst/>
+          </a:prstGeom>
+          <a:solidFill>
+            <a:srgbClr val="FFFFFF"/>
+          </a:solidFill>
+          <a:ln w="12700">
+            <a:solidFill>
+              <a:srgbClr val="0D9488"/>
+            </a:solidFill>
+          </a:ln>
+          <a:effectLst/>
+        </p:spPr>
+        <p:style>
+          <a:lnRef idx="1">
+            <a:schemeClr val="accent1"/>
+          </a:lnRef>
+          <a:fillRef idx="3">
+            <a:schemeClr val="accent1"/>
+          </a:fillRef>
+          <a:effectRef idx="2">
+            <a:schemeClr val="accent1"/>
+          </a:effectRef>
+          <a:fontRef idx="minor">
+            <a:schemeClr val="lt1"/>
+          </a:fontRef>
+        </p:style>
+        <p:txBody>
+          <a:bodyPr rtlCol="0" anchor="ctr"/>
+          <a:lstStyle/>
+          <a:p>
+            <a:pPr algn="ctr"/>
+          </a:p>
+        </p:txBody>
+      </p:sp>
+      <p:sp>
+        <p:nvSpPr>
+          <p:cNvPr id="10" name="TextBox 9"/>
+          <p:cNvSpPr txBox="1"/>
+          <p:nvPr/>
+        </p:nvSpPr>
+        <p:spPr>
+          <a:xfrm>
+            <a:off x="914400" y="1581912"/>
+            <a:ext cx="10058400" cy="411480"/>
+          </a:xfrm>
+          <a:prstGeom prst="rect">
+            <a:avLst/>
+          </a:prstGeom>
+          <a:noFill/>
+        </p:spPr>
+        <p:txBody>
+          <a:bodyPr wrap="square" anchor="t">
+            <a:spAutoFit/>
+          </a:bodyPr>
+          <a:lstStyle/>
+          <a:p>
+            <a:pPr algn="l">
+              <a:lnSpc>
+                <a:spcPct val="100000"/>
+              </a:lnSpc>
+            </a:pPr>
+            <a:r>
+              <a:rPr sz="1500" b="1">
+                <a:solidFill>
+                  <a:srgbClr val="334155"/>
+                </a:solidFill>
+                <a:latin typeface="Malgun Gothic"/>
+              </a:rPr>
+              <a:t>오늘 지사 매출·재원·출석 지표를 확인했나요?</a:t>
+            </a:r>
+          </a:p>
+        </p:txBody>
+      </p:sp>
+      <p:sp>
+        <p:nvSpPr>
+          <p:cNvPr id="11" name="Rounded Rectangle 10"/>
+          <p:cNvSpPr/>
+          <p:nvPr/>
+        </p:nvSpPr>
+        <p:spPr>
+          <a:xfrm>
+            <a:off x="457200" y="2212848"/>
+            <a:ext cx="292608" cy="292608"/>
+          </a:xfrm>
+          <a:prstGeom prst="roundRect">
+            <a:avLst/>
+          </a:prstGeom>
+          <a:solidFill>
+            <a:srgbClr val="FFFFFF"/>
+          </a:solidFill>
+          <a:ln w="12700">
+            <a:solidFill>
+              <a:srgbClr val="0D9488"/>
+            </a:solidFill>
+          </a:ln>
+          <a:effectLst/>
+        </p:spPr>
+        <p:style>
+          <a:lnRef idx="1">
+            <a:schemeClr val="accent1"/>
+          </a:lnRef>
+          <a:fillRef idx="3">
+            <a:schemeClr val="accent1"/>
+          </a:fillRef>
+          <a:effectRef idx="2">
+            <a:schemeClr val="accent1"/>
+          </a:effectRef>
+          <a:fontRef idx="minor">
+            <a:schemeClr val="lt1"/>
+          </a:fontRef>
+        </p:style>
+        <p:txBody>
+          <a:bodyPr rtlCol="0" anchor="ctr"/>
+          <a:lstStyle/>
+          <a:p>
+            <a:pPr algn="ctr"/>
+          </a:p>
+        </p:txBody>
+      </p:sp>
+      <p:sp>
+        <p:nvSpPr>
+          <p:cNvPr id="12" name="TextBox 11"/>
+          <p:cNvSpPr txBox="1"/>
+          <p:nvPr/>
+        </p:nvSpPr>
+        <p:spPr>
+          <a:xfrm>
+            <a:off x="914400" y="2148840"/>
+            <a:ext cx="10058400" cy="411480"/>
+          </a:xfrm>
+          <a:prstGeom prst="rect">
+            <a:avLst/>
+          </a:prstGeom>
+          <a:noFill/>
+        </p:spPr>
+        <p:txBody>
+          <a:bodyPr wrap="square" anchor="t">
+            <a:spAutoFit/>
+          </a:bodyPr>
+          <a:lstStyle/>
+          <a:p>
+            <a:pPr algn="l">
+              <a:lnSpc>
+                <a:spcPct val="100000"/>
+              </a:lnSpc>
+            </a:pPr>
+            <a:r>
+              <a:rPr sz="1500" b="1">
+                <a:solidFill>
+                  <a:srgbClr val="334155"/>
+                </a:solidFill>
+                <a:latin typeface="Malgun Gothic"/>
+              </a:rPr>
+              <a:t>부진한 대리점을 파악하고 지원했나요?</a:t>
+            </a:r>
+          </a:p>
+        </p:txBody>
+      </p:sp>
+      <p:sp>
+        <p:nvSpPr>
+          <p:cNvPr id="13" name="Rounded Rectangle 12"/>
+          <p:cNvSpPr/>
+          <p:nvPr/>
+        </p:nvSpPr>
+        <p:spPr>
+          <a:xfrm>
+            <a:off x="457200" y="2779776"/>
+            <a:ext cx="292608" cy="292608"/>
+          </a:xfrm>
+          <a:prstGeom prst="roundRect">
+            <a:avLst/>
+          </a:prstGeom>
+          <a:solidFill>
+            <a:srgbClr val="FFFFFF"/>
+          </a:solidFill>
+          <a:ln w="12700">
+            <a:solidFill>
+              <a:srgbClr val="0D9488"/>
+            </a:solidFill>
+          </a:ln>
+          <a:effectLst/>
+        </p:spPr>
+        <p:style>
+          <a:lnRef idx="1">
+            <a:schemeClr val="accent1"/>
+          </a:lnRef>
+          <a:fillRef idx="3">
+            <a:schemeClr val="accent1"/>
+          </a:fillRef>
+          <a:effectRef idx="2">
+            <a:schemeClr val="accent1"/>
+          </a:effectRef>
+          <a:fontRef idx="minor">
+            <a:schemeClr val="lt1"/>
+          </a:fontRef>
+        </p:style>
+        <p:txBody>
+          <a:bodyPr rtlCol="0" anchor="ctr"/>
+          <a:lstStyle/>
+          <a:p>
+            <a:pPr algn="ctr"/>
+          </a:p>
+        </p:txBody>
+      </p:sp>
+      <p:sp>
+        <p:nvSpPr>
+          <p:cNvPr id="14" name="TextBox 13"/>
+          <p:cNvSpPr txBox="1"/>
+          <p:nvPr/>
+        </p:nvSpPr>
+        <p:spPr>
+          <a:xfrm>
+            <a:off x="914400" y="2715768"/>
+            <a:ext cx="10058400" cy="411480"/>
+          </a:xfrm>
+          <a:prstGeom prst="rect">
+            <a:avLst/>
+          </a:prstGeom>
+          <a:noFill/>
+        </p:spPr>
+        <p:txBody>
+          <a:bodyPr wrap="square" anchor="t">
+            <a:spAutoFit/>
+          </a:bodyPr>
+          <a:lstStyle/>
+          <a:p>
+            <a:pPr algn="l">
+              <a:lnSpc>
+                <a:spcPct val="100000"/>
+              </a:lnSpc>
+            </a:pPr>
+            <a:r>
+              <a:rPr sz="1500" b="1">
+                <a:solidFill>
+                  <a:srgbClr val="334155"/>
+                </a:solidFill>
+                <a:latin typeface="Malgun Gothic"/>
+              </a:rPr>
+              <a:t>이번 달 정산(수령·배분)을 점검했나요?</a:t>
+            </a:r>
+          </a:p>
+        </p:txBody>
+      </p:sp>
+      <p:sp>
+        <p:nvSpPr>
+          <p:cNvPr id="15" name="Rounded Rectangle 14"/>
+          <p:cNvSpPr/>
+          <p:nvPr/>
+        </p:nvSpPr>
+        <p:spPr>
+          <a:xfrm>
+            <a:off x="457200" y="3346704"/>
+            <a:ext cx="292608" cy="292608"/>
+          </a:xfrm>
+          <a:prstGeom prst="roundRect">
+            <a:avLst/>
+          </a:prstGeom>
+          <a:solidFill>
+            <a:srgbClr val="FFFFFF"/>
+          </a:solidFill>
+          <a:ln w="12700">
+            <a:solidFill>
+              <a:srgbClr val="0D9488"/>
+            </a:solidFill>
+          </a:ln>
+          <a:effectLst/>
+        </p:spPr>
+        <p:style>
+          <a:lnRef idx="1">
+            <a:schemeClr val="accent1"/>
+          </a:lnRef>
+          <a:fillRef idx="3">
+            <a:schemeClr val="accent1"/>
+          </a:fillRef>
+          <a:effectRef idx="2">
+            <a:schemeClr val="accent1"/>
+          </a:effectRef>
+          <a:fontRef idx="minor">
+            <a:schemeClr val="lt1"/>
+          </a:fontRef>
+        </p:style>
+        <p:txBody>
+          <a:bodyPr rtlCol="0" anchor="ctr"/>
+          <a:lstStyle/>
+          <a:p>
+            <a:pPr algn="ctr"/>
+          </a:p>
+        </p:txBody>
+      </p:sp>
+      <p:sp>
+        <p:nvSpPr>
+          <p:cNvPr id="16" name="TextBox 15"/>
+          <p:cNvSpPr txBox="1"/>
+          <p:nvPr/>
+        </p:nvSpPr>
+        <p:spPr>
+          <a:xfrm>
+            <a:off x="914400" y="3282696"/>
+            <a:ext cx="10058400" cy="411480"/>
+          </a:xfrm>
+          <a:prstGeom prst="rect">
+            <a:avLst/>
+          </a:prstGeom>
+          <a:noFill/>
+        </p:spPr>
+        <p:txBody>
+          <a:bodyPr wrap="square" anchor="t">
+            <a:spAutoFit/>
+          </a:bodyPr>
+          <a:lstStyle/>
+          <a:p>
+            <a:pPr algn="l">
+              <a:lnSpc>
+                <a:spcPct val="100000"/>
+              </a:lnSpc>
+            </a:pPr>
+            <a:r>
+              <a:rPr sz="1500" b="1">
+                <a:solidFill>
+                  <a:srgbClr val="334155"/>
+                </a:solidFill>
+                <a:latin typeface="Malgun Gothic"/>
+              </a:rPr>
+              <a:t>미납·환불 건을 확인했나요?</a:t>
+            </a:r>
+          </a:p>
+        </p:txBody>
+      </p:sp>
+      <p:sp>
+        <p:nvSpPr>
+          <p:cNvPr id="17" name="Rounded Rectangle 16"/>
+          <p:cNvSpPr/>
+          <p:nvPr/>
+        </p:nvSpPr>
+        <p:spPr>
+          <a:xfrm>
+            <a:off x="457200" y="3913632"/>
+            <a:ext cx="292608" cy="292608"/>
+          </a:xfrm>
+          <a:prstGeom prst="roundRect">
+            <a:avLst/>
+          </a:prstGeom>
+          <a:solidFill>
+            <a:srgbClr val="FFFFFF"/>
+          </a:solidFill>
+          <a:ln w="12700">
+            <a:solidFill>
+              <a:srgbClr val="0D9488"/>
+            </a:solidFill>
+          </a:ln>
+          <a:effectLst/>
+        </p:spPr>
+        <p:style>
+          <a:lnRef idx="1">
+            <a:schemeClr val="accent1"/>
+          </a:lnRef>
+          <a:fillRef idx="3">
+            <a:schemeClr val="accent1"/>
+          </a:fillRef>
+          <a:effectRef idx="2">
+            <a:schemeClr val="accent1"/>
+          </a:effectRef>
+          <a:fontRef idx="minor">
+            <a:schemeClr val="lt1"/>
+          </a:fontRef>
+        </p:style>
+        <p:txBody>
+          <a:bodyPr rtlCol="0" anchor="ctr"/>
+          <a:lstStyle/>
+          <a:p>
+            <a:pPr algn="ctr"/>
+          </a:p>
+        </p:txBody>
+      </p:sp>
+      <p:sp>
+        <p:nvSpPr>
+          <p:cNvPr id="18" name="TextBox 17"/>
+          <p:cNvSpPr txBox="1"/>
+          <p:nvPr/>
+        </p:nvSpPr>
+        <p:spPr>
+          <a:xfrm>
+            <a:off x="914400" y="3849624"/>
+            <a:ext cx="10058400" cy="411480"/>
+          </a:xfrm>
+          <a:prstGeom prst="rect">
+            <a:avLst/>
+          </a:prstGeom>
+          <a:noFill/>
+        </p:spPr>
+        <p:txBody>
+          <a:bodyPr wrap="square" anchor="t">
+            <a:spAutoFit/>
+          </a:bodyPr>
+          <a:lstStyle/>
+          <a:p>
+            <a:pPr algn="l">
+              <a:lnSpc>
+                <a:spcPct val="100000"/>
+              </a:lnSpc>
+            </a:pPr>
+            <a:r>
+              <a:rPr sz="1500" b="1">
+                <a:solidFill>
+                  <a:srgbClr val="334155"/>
+                </a:solidFill>
+                <a:latin typeface="Malgun Gothic"/>
+              </a:rPr>
+              <a:t>이탈위험 학생·대리점을 챙겼나요?</a:t>
+            </a:r>
+          </a:p>
+        </p:txBody>
+      </p:sp>
+      <p:sp>
+        <p:nvSpPr>
+          <p:cNvPr id="19" name="Rounded Rectangle 18"/>
+          <p:cNvSpPr/>
+          <p:nvPr/>
+        </p:nvSpPr>
+        <p:spPr>
+          <a:xfrm>
+            <a:off x="457200" y="4480560"/>
+            <a:ext cx="292608" cy="292608"/>
+          </a:xfrm>
+          <a:prstGeom prst="roundRect">
+            <a:avLst/>
+          </a:prstGeom>
+          <a:solidFill>
+            <a:srgbClr val="FFFFFF"/>
+          </a:solidFill>
+          <a:ln w="12700">
+            <a:solidFill>
+              <a:srgbClr val="0D9488"/>
+            </a:solidFill>
+          </a:ln>
+          <a:effectLst/>
+        </p:spPr>
+        <p:style>
+          <a:lnRef idx="1">
+            <a:schemeClr val="accent1"/>
+          </a:lnRef>
+          <a:fillRef idx="3">
+            <a:schemeClr val="accent1"/>
+          </a:fillRef>
+          <a:effectRef idx="2">
+            <a:schemeClr val="accent1"/>
+          </a:effectRef>
+          <a:fontRef idx="minor">
+            <a:schemeClr val="lt1"/>
+          </a:fontRef>
+        </p:style>
+        <p:txBody>
+          <a:bodyPr rtlCol="0" anchor="ctr"/>
+          <a:lstStyle/>
+          <a:p>
+            <a:pPr algn="ctr"/>
+          </a:p>
+        </p:txBody>
+      </p:sp>
+      <p:sp>
+        <p:nvSpPr>
+          <p:cNvPr id="20" name="TextBox 19"/>
+          <p:cNvSpPr txBox="1"/>
+          <p:nvPr/>
+        </p:nvSpPr>
+        <p:spPr>
+          <a:xfrm>
+            <a:off x="914400" y="4416552"/>
+            <a:ext cx="10058400" cy="411480"/>
+          </a:xfrm>
+          <a:prstGeom prst="rect">
+            <a:avLst/>
+          </a:prstGeom>
+          <a:noFill/>
+        </p:spPr>
+        <p:txBody>
+          <a:bodyPr wrap="square" anchor="t">
+            <a:spAutoFit/>
+          </a:bodyPr>
+          <a:lstStyle/>
+          <a:p>
+            <a:pPr algn="l">
+              <a:lnSpc>
+                <a:spcPct val="100000"/>
+              </a:lnSpc>
+            </a:pPr>
+            <a:r>
+              <a:rPr sz="1500" b="1">
+                <a:solidFill>
+                  <a:srgbClr val="334155"/>
+                </a:solidFill>
+                <a:latin typeface="Malgun Gothic"/>
+              </a:rPr>
+              <a:t>신규 대리점 온보딩을 진행했나요?</a:t>
+            </a:r>
+          </a:p>
+        </p:txBody>
+      </p:sp>
+      <p:sp>
+        <p:nvSpPr>
+          <p:cNvPr id="21" name="Rounded Rectangle 20"/>
+          <p:cNvSpPr/>
+          <p:nvPr/>
+        </p:nvSpPr>
+        <p:spPr>
+          <a:xfrm>
+            <a:off x="457200" y="5047488"/>
+            <a:ext cx="292608" cy="292608"/>
+          </a:xfrm>
+          <a:prstGeom prst="roundRect">
+            <a:avLst/>
+          </a:prstGeom>
+          <a:solidFill>
+            <a:srgbClr val="FFFFFF"/>
+          </a:solidFill>
+          <a:ln w="12700">
+            <a:solidFill>
+              <a:srgbClr val="0D9488"/>
+            </a:solidFill>
+          </a:ln>
+          <a:effectLst/>
+        </p:spPr>
+        <p:style>
+          <a:lnRef idx="1">
+            <a:schemeClr val="accent1"/>
+          </a:lnRef>
+          <a:fillRef idx="3">
+            <a:schemeClr val="accent1"/>
+          </a:fillRef>
+          <a:effectRef idx="2">
+            <a:schemeClr val="accent1"/>
+          </a:effectRef>
+          <a:fontRef idx="minor">
+            <a:schemeClr val="lt1"/>
+          </a:fontRef>
+        </p:style>
+        <p:txBody>
+          <a:bodyPr rtlCol="0" anchor="ctr"/>
+          <a:lstStyle/>
+          <a:p>
+            <a:pPr algn="ctr"/>
+          </a:p>
+        </p:txBody>
+      </p:sp>
+      <p:sp>
+        <p:nvSpPr>
+          <p:cNvPr id="22" name="TextBox 21"/>
+          <p:cNvSpPr txBox="1"/>
+          <p:nvPr/>
+        </p:nvSpPr>
+        <p:spPr>
+          <a:xfrm>
+            <a:off x="914400" y="4983480"/>
+            <a:ext cx="10058400" cy="411480"/>
+          </a:xfrm>
+          <a:prstGeom prst="rect">
+            <a:avLst/>
+          </a:prstGeom>
+          <a:noFill/>
+        </p:spPr>
+        <p:txBody>
+          <a:bodyPr wrap="square" anchor="t">
+            <a:spAutoFit/>
+          </a:bodyPr>
+          <a:lstStyle/>
+          <a:p>
+            <a:pPr algn="l">
+              <a:lnSpc>
+                <a:spcPct val="100000"/>
+              </a:lnSpc>
+            </a:pPr>
+            <a:r>
+              <a:rPr sz="1500" b="1">
+                <a:solidFill>
+                  <a:srgbClr val="334155"/>
+                </a:solidFill>
+                <a:latin typeface="Malgun Gothic"/>
+              </a:rPr>
+              <a:t>월간 리포트를 공유했나요?</a:t>
+            </a:r>
+          </a:p>
+        </p:txBody>
+      </p:sp>
+      <p:pic>
+        <p:nvPicPr>
+          <p:cNvPr id="23" name="Picture 22" descr="mango_char.png"/>
+          <p:cNvPicPr>
+            <a:picLocks noChangeAspect="1"/>
+          </p:cNvPicPr>
+          <p:nvPr/>
+        </p:nvPicPr>
+        <p:blipFill>
+          <a:blip r:embed="rId2"/>
+          <a:stretch>
+            <a:fillRect/>
+          </a:stretch>
+        </p:blipFill>
+        <p:spPr>
+          <a:xfrm>
+            <a:off x="9153162" y="4480559"/>
+            <a:ext cx="2489892" cy="2011680"/>
+          </a:xfrm>
+          <a:prstGeom prst="rect">
+            <a:avLst/>
+          </a:prstGeom>
+        </p:spPr>
+      </p:pic>
+    </p:spTree>
+  </p:cSld>
+  <p:clrMapOvr>
+    <a:masterClrMapping/>
+  </p:clrMapOvr>
+</p:sld>
+</file>
+
+<file path=ppt/slides/slide31.xml><?xml version="1.0" encoding="utf-8"?>
+<p:sld xmlns:a="http://schemas.openxmlformats.org/drawingml/2006/main" xmlns:p="http://schemas.openxmlformats.org/presentationml/2006/main" xmlns:r="http://schemas.openxmlformats.org/officeDocument/2006/relationships">
+  <p:cSld>
+    <p:bg>
+      <p:bgPr>
+        <a:solidFill>
+          <a:srgbClr val="FFFFFF"/>
+        </a:solidFill>
+        <a:effectLst/>
+      </p:bgPr>
+    </p:bg>
+    <p:spTree>
+      <p:nvGrpSpPr>
+        <p:cNvPr id="1" name=""/>
+        <p:cNvGrpSpPr/>
+        <p:nvPr/>
+      </p:nvGrpSpPr>
+      <p:grpSpPr/>
+      <p:sp>
+        <p:nvSpPr>
+          <p:cNvPr id="2" name="Rectangle 1"/>
+          <p:cNvSpPr/>
+          <p:nvPr/>
+        </p:nvSpPr>
+        <p:spPr>
+          <a:xfrm>
+            <a:off x="0" y="0"/>
+            <a:ext cx="12191695" cy="566928"/>
+          </a:xfrm>
+          <a:prstGeom prst="rect">
+            <a:avLst/>
+          </a:prstGeom>
+          <a:solidFill>
+            <a:srgbClr val="0D9488"/>
+          </a:solidFill>
+          <a:ln>
+            <a:noFill/>
+          </a:ln>
+          <a:effectLst/>
+        </p:spPr>
+        <p:style>
+          <a:lnRef idx="1">
+            <a:schemeClr val="accent1"/>
+          </a:lnRef>
+          <a:fillRef idx="3">
+            <a:schemeClr val="accent1"/>
+          </a:fillRef>
+          <a:effectRef idx="2">
+            <a:schemeClr val="accent1"/>
+          </a:effectRef>
+          <a:fontRef idx="minor">
+            <a:schemeClr val="lt1"/>
+          </a:fontRef>
+        </p:style>
+        <p:txBody>
+          <a:bodyPr rtlCol="0" anchor="ctr"/>
+          <a:lstStyle/>
+          <a:p>
+            <a:pPr algn="ctr"/>
+          </a:p>
+        </p:txBody>
+      </p:sp>
+      <p:sp>
+        <p:nvSpPr>
+          <p:cNvPr id="3" name="Rectangle 2"/>
+          <p:cNvSpPr/>
+          <p:nvPr/>
+        </p:nvSpPr>
+        <p:spPr>
+          <a:xfrm>
+            <a:off x="0" y="566928"/>
+            <a:ext cx="12191695" cy="54864"/>
+          </a:xfrm>
+          <a:prstGeom prst="rect">
+            <a:avLst/>
+          </a:prstGeom>
+          <a:solidFill>
+            <a:srgbClr val="F59E0B"/>
+          </a:solidFill>
+          <a:ln>
+            <a:noFill/>
+          </a:ln>
+          <a:effectLst/>
+        </p:spPr>
+        <p:style>
+          <a:lnRef idx="1">
+            <a:schemeClr val="accent1"/>
+          </a:lnRef>
+          <a:fillRef idx="3">
+            <a:schemeClr val="accent1"/>
+          </a:fillRef>
+          <a:effectRef idx="2">
+            <a:schemeClr val="accent1"/>
+          </a:effectRef>
+          <a:fontRef idx="minor">
+            <a:schemeClr val="lt1"/>
+          </a:fontRef>
+        </p:style>
+        <p:txBody>
+          <a:bodyPr rtlCol="0" anchor="ctr"/>
+          <a:lstStyle/>
+          <a:p>
+            <a:pPr algn="ctr"/>
+          </a:p>
+        </p:txBody>
+      </p:sp>
+      <p:sp>
+        <p:nvSpPr>
+          <p:cNvPr id="4" name="TextBox 3"/>
+          <p:cNvSpPr txBox="1"/>
+          <p:nvPr/>
+        </p:nvSpPr>
+        <p:spPr>
+          <a:xfrm>
+            <a:off x="365760" y="27432"/>
+            <a:ext cx="7315200" cy="502920"/>
+          </a:xfrm>
+          <a:prstGeom prst="rect">
+            <a:avLst/>
+          </a:prstGeom>
+          <a:noFill/>
+        </p:spPr>
+        <p:txBody>
+          <a:bodyPr wrap="square" anchor="ctr">
+            <a:spAutoFit/>
+          </a:bodyPr>
+          <a:lstStyle/>
+          <a:p>
+            <a:pPr algn="l">
+              <a:lnSpc>
+                <a:spcPct val="100000"/>
+              </a:lnSpc>
+            </a:pPr>
+            <a:r>
+              <a:rPr sz="1500" b="1">
+                <a:solidFill>
+                  <a:srgbClr val="FFFFFF"/>
+                </a:solidFill>
+                <a:latin typeface="Malgun Gothic"/>
+              </a:rPr>
+              <a:t>🏢 망고아이 지사용 사용설명서</a:t>
+            </a:r>
+          </a:p>
+        </p:txBody>
+      </p:sp>
+      <p:sp>
+        <p:nvSpPr>
+          <p:cNvPr id="5" name="TextBox 4"/>
+          <p:cNvSpPr txBox="1"/>
+          <p:nvPr/>
+        </p:nvSpPr>
+        <p:spPr>
+          <a:xfrm>
+            <a:off x="8168335" y="27432"/>
+            <a:ext cx="3657600" cy="502920"/>
+          </a:xfrm>
+          <a:prstGeom prst="rect">
+            <a:avLst/>
+          </a:prstGeom>
+          <a:noFill/>
+        </p:spPr>
+        <p:txBody>
+          <a:bodyPr wrap="square" anchor="ctr">
+            <a:spAutoFit/>
+          </a:bodyPr>
+          <a:lstStyle/>
+          <a:p>
+            <a:pPr algn="r">
+              <a:lnSpc>
+                <a:spcPct val="100000"/>
+              </a:lnSpc>
+            </a:pPr>
+            <a:r>
+              <a:rPr sz="1300" b="1">
+                <a:solidFill>
+                  <a:srgbClr val="F1F5F9"/>
+                </a:solidFill>
+                <a:latin typeface="Malgun Gothic"/>
+              </a:rPr>
+              <a:t>마무리</a:t>
+            </a:r>
+          </a:p>
+        </p:txBody>
+      </p:sp>
+      <p:sp>
+        <p:nvSpPr>
+          <p:cNvPr id="6" name="Rounded Rectangle 5"/>
+          <p:cNvSpPr/>
+          <p:nvPr/>
+        </p:nvSpPr>
+        <p:spPr>
+          <a:xfrm>
+            <a:off x="365760" y="841248"/>
+            <a:ext cx="658368" cy="512064"/>
+          </a:xfrm>
+          <a:prstGeom prst="roundRect">
+            <a:avLst/>
+          </a:prstGeom>
+          <a:solidFill>
+            <a:srgbClr val="0D9488"/>
+          </a:solidFill>
+          <a:ln>
+            <a:noFill/>
+          </a:ln>
+          <a:effectLst/>
+        </p:spPr>
+        <p:style>
+          <a:lnRef idx="1">
+            <a:schemeClr val="accent1"/>
+          </a:lnRef>
+          <a:fillRef idx="3">
+            <a:schemeClr val="accent1"/>
+          </a:fillRef>
+          <a:effectRef idx="2">
+            <a:schemeClr val="accent1"/>
+          </a:effectRef>
+          <a:fontRef idx="minor">
+            <a:schemeClr val="lt1"/>
+          </a:fontRef>
+        </p:style>
+        <p:txBody>
+          <a:bodyPr rtlCol="0" anchor="ctr"/>
+          <a:lstStyle/>
+          <a:p>
+            <a:pPr algn="ctr"/>
+          </a:p>
+        </p:txBody>
+      </p:sp>
+      <p:sp>
+        <p:nvSpPr>
+          <p:cNvPr id="7" name="TextBox 6"/>
+          <p:cNvSpPr txBox="1"/>
+          <p:nvPr/>
+        </p:nvSpPr>
+        <p:spPr>
+          <a:xfrm>
+            <a:off x="365760" y="841248"/>
+            <a:ext cx="658368" cy="512064"/>
+          </a:xfrm>
+          <a:prstGeom prst="rect">
+            <a:avLst/>
+          </a:prstGeom>
+          <a:noFill/>
+        </p:spPr>
+        <p:txBody>
+          <a:bodyPr wrap="square" anchor="ctr">
+            <a:spAutoFit/>
+          </a:bodyPr>
+          <a:lstStyle/>
+          <a:p>
+            <a:pPr algn="ctr">
+              <a:lnSpc>
+                <a:spcPct val="100000"/>
+              </a:lnSpc>
+            </a:pPr>
+            <a:r>
+              <a:rPr sz="1700" b="1">
+                <a:solidFill>
+                  <a:srgbClr val="FFFFFF"/>
+                </a:solidFill>
+                <a:latin typeface="Malgun Gothic"/>
+              </a:rPr>
+              <a:t>28</a:t>
+            </a:r>
+          </a:p>
+        </p:txBody>
+      </p:sp>
+      <p:sp>
+        <p:nvSpPr>
+          <p:cNvPr id="8" name="TextBox 7"/>
+          <p:cNvSpPr txBox="1"/>
+          <p:nvPr/>
+        </p:nvSpPr>
+        <p:spPr>
+          <a:xfrm>
+            <a:off x="1143000" y="868680"/>
+            <a:ext cx="9144000" cy="457200"/>
+          </a:xfrm>
+          <a:prstGeom prst="rect">
+            <a:avLst/>
+          </a:prstGeom>
+          <a:noFill/>
+        </p:spPr>
+        <p:txBody>
+          <a:bodyPr wrap="square" anchor="t">
+            <a:spAutoFit/>
+          </a:bodyPr>
+          <a:lstStyle/>
+          <a:p>
+            <a:pPr algn="l">
+              <a:lnSpc>
+                <a:spcPct val="100000"/>
+              </a:lnSpc>
+            </a:pPr>
+            <a:r>
+              <a:rPr sz="2100" b="1">
+                <a:solidFill>
+                  <a:srgbClr val="0D9488"/>
+                </a:solidFill>
+                <a:latin typeface="Malgun Gothic"/>
+              </a:rPr>
+              <a:t>🏁 마무리 · 지사 성장을 위한 실천 가이드</a:t>
+            </a:r>
+          </a:p>
+        </p:txBody>
+      </p:sp>
+      <p:sp>
+        <p:nvSpPr>
+          <p:cNvPr id="9" name="Rounded Rectangle 8"/>
+          <p:cNvSpPr/>
+          <p:nvPr/>
+        </p:nvSpPr>
+        <p:spPr>
+          <a:xfrm>
+            <a:off x="365760" y="1371600"/>
+            <a:ext cx="11430000" cy="868680"/>
+          </a:xfrm>
+          <a:prstGeom prst="roundRect">
+            <a:avLst/>
+          </a:prstGeom>
+          <a:solidFill>
+            <a:srgbClr val="ECFDF5"/>
+          </a:solidFill>
+          <a:ln>
+            <a:noFill/>
+          </a:ln>
+          <a:effectLst/>
+        </p:spPr>
+        <p:style>
+          <a:lnRef idx="1">
+            <a:schemeClr val="accent1"/>
+          </a:lnRef>
+          <a:fillRef idx="3">
+            <a:schemeClr val="accent1"/>
+          </a:fillRef>
+          <a:effectRef idx="2">
+            <a:schemeClr val="accent1"/>
+          </a:effectRef>
+          <a:fontRef idx="minor">
+            <a:schemeClr val="lt1"/>
+          </a:fontRef>
+        </p:style>
+        <p:txBody>
+          <a:bodyPr rtlCol="0" anchor="ctr"/>
+          <a:lstStyle/>
+          <a:p>
+            <a:pPr algn="ctr"/>
+          </a:p>
+        </p:txBody>
+      </p:sp>
+      <p:sp>
+        <p:nvSpPr>
+          <p:cNvPr id="10" name="TextBox 9"/>
+          <p:cNvSpPr txBox="1"/>
+          <p:nvPr/>
+        </p:nvSpPr>
+        <p:spPr>
+          <a:xfrm>
+            <a:off x="548640" y="1426464"/>
+            <a:ext cx="11064240" cy="777240"/>
+          </a:xfrm>
+          <a:prstGeom prst="rect">
+            <a:avLst/>
+          </a:prstGeom>
+          <a:noFill/>
+        </p:spPr>
+        <p:txBody>
+          <a:bodyPr wrap="square" anchor="t">
+            <a:spAutoFit/>
+          </a:bodyPr>
+          <a:lstStyle/>
+          <a:p>
+            <a:pPr algn="l">
+              <a:lnSpc>
+                <a:spcPct val="115000"/>
+              </a:lnSpc>
+            </a:pPr>
+            <a:r>
+              <a:rPr sz="1150" b="0">
+                <a:solidFill>
+                  <a:srgbClr val="334155"/>
+                </a:solidFill>
+                <a:latin typeface="Malgun Gothic"/>
+              </a:rPr>
+              <a:t>지사의 역할은 본사와 대리점을 잇는 다리예요. 우리 지사 지표를 챙기고, 산하 대리점이 잘 크도록 지원하며, 정산을 투명하게 처리하면 지사 전체가 함께 성장합니다. 이 리듬만 지켜도 운영이 훨씬 안정적이에요.</a:t>
+            </a:r>
+          </a:p>
+        </p:txBody>
+      </p:sp>
+      <p:sp>
+        <p:nvSpPr>
+          <p:cNvPr id="11" name="TextBox 10"/>
+          <p:cNvSpPr txBox="1"/>
+          <p:nvPr/>
+        </p:nvSpPr>
+        <p:spPr>
+          <a:xfrm>
+            <a:off x="457200" y="2423160"/>
+            <a:ext cx="5760720" cy="320040"/>
+          </a:xfrm>
+          <a:prstGeom prst="rect">
+            <a:avLst/>
+          </a:prstGeom>
+          <a:noFill/>
+        </p:spPr>
+        <p:txBody>
+          <a:bodyPr wrap="square" anchor="t">
+            <a:spAutoFit/>
+          </a:bodyPr>
+          <a:lstStyle/>
+          <a:p>
+            <a:pPr algn="l">
+              <a:lnSpc>
+                <a:spcPct val="100000"/>
+              </a:lnSpc>
+            </a:pPr>
+            <a:r>
+              <a:rPr sz="1350" b="1">
+                <a:solidFill>
+                  <a:srgbClr val="0D9488"/>
+                </a:solidFill>
+                <a:latin typeface="Malgun Gothic"/>
+              </a:rPr>
+              <a:t>🔄 하루 흐름 한눈에</a:t>
+            </a:r>
+          </a:p>
+        </p:txBody>
+      </p:sp>
+      <p:sp>
+        <p:nvSpPr>
+          <p:cNvPr id="12" name="Rounded Rectangle 11"/>
+          <p:cNvSpPr/>
+          <p:nvPr/>
+        </p:nvSpPr>
+        <p:spPr>
+          <a:xfrm>
+            <a:off x="457200" y="2788920"/>
+            <a:ext cx="1600200" cy="384048"/>
+          </a:xfrm>
+          <a:prstGeom prst="roundRect">
+            <a:avLst/>
+          </a:prstGeom>
+          <a:solidFill>
+            <a:srgbClr val="0D9488"/>
+          </a:solidFill>
+          <a:ln>
+            <a:noFill/>
+          </a:ln>
+          <a:effectLst/>
+        </p:spPr>
+        <p:style>
+          <a:lnRef idx="1">
+            <a:schemeClr val="accent1"/>
+          </a:lnRef>
+          <a:fillRef idx="3">
+            <a:schemeClr val="accent1"/>
+          </a:fillRef>
+          <a:effectRef idx="2">
+            <a:schemeClr val="accent1"/>
+          </a:effectRef>
+          <a:fontRef idx="minor">
+            <a:schemeClr val="lt1"/>
+          </a:fontRef>
+        </p:style>
+        <p:txBody>
+          <a:bodyPr rtlCol="0" anchor="ctr"/>
+          <a:lstStyle/>
+          <a:p>
+            <a:pPr algn="ctr"/>
+          </a:p>
+        </p:txBody>
+      </p:sp>
+      <p:sp>
+        <p:nvSpPr>
+          <p:cNvPr id="13" name="TextBox 12"/>
+          <p:cNvSpPr txBox="1"/>
+          <p:nvPr/>
+        </p:nvSpPr>
+        <p:spPr>
+          <a:xfrm>
+            <a:off x="457200" y="2788920"/>
+            <a:ext cx="1600200" cy="384048"/>
+          </a:xfrm>
+          <a:prstGeom prst="rect">
+            <a:avLst/>
+          </a:prstGeom>
+          <a:noFill/>
+        </p:spPr>
+        <p:txBody>
+          <a:bodyPr wrap="square" anchor="ctr">
+            <a:spAutoFit/>
+          </a:bodyPr>
+          <a:lstStyle/>
+          <a:p>
+            <a:pPr algn="ctr">
+              <a:lnSpc>
+                <a:spcPct val="100000"/>
+              </a:lnSpc>
+            </a:pPr>
+            <a:r>
+              <a:rPr sz="850" b="1">
+                <a:solidFill>
+                  <a:srgbClr val="FFFFFF"/>
+                </a:solidFill>
+                <a:latin typeface="Malgun Gothic"/>
+              </a:rPr>
+              <a:t>아침 (5분)</a:t>
+            </a:r>
+          </a:p>
+        </p:txBody>
+      </p:sp>
+      <p:sp>
+        <p:nvSpPr>
+          <p:cNvPr id="14" name="TextBox 13"/>
+          <p:cNvSpPr txBox="1"/>
+          <p:nvPr/>
+        </p:nvSpPr>
+        <p:spPr>
+          <a:xfrm>
+            <a:off x="2148840" y="2770632"/>
+            <a:ext cx="4114800" cy="420624"/>
+          </a:xfrm>
+          <a:prstGeom prst="rect">
+            <a:avLst/>
+          </a:prstGeom>
+          <a:noFill/>
+        </p:spPr>
+        <p:txBody>
+          <a:bodyPr wrap="square" anchor="ctr">
+            <a:spAutoFit/>
+          </a:bodyPr>
+          <a:lstStyle/>
+          <a:p>
+            <a:pPr algn="l">
+              <a:lnSpc>
+                <a:spcPct val="100000"/>
+              </a:lnSpc>
+            </a:pPr>
+            <a:r>
+              <a:rPr sz="850" b="0">
+                <a:solidFill>
+                  <a:srgbClr val="334155"/>
+                </a:solidFill>
+                <a:latin typeface="Malgun Gothic"/>
+              </a:rPr>
+              <a:t>지사 대시보드에서 매출·재원·출석 확인, AI 인사이트로 상태 파악</a:t>
+            </a:r>
+          </a:p>
+        </p:txBody>
+      </p:sp>
+      <p:sp>
+        <p:nvSpPr>
+          <p:cNvPr id="15" name="Rounded Rectangle 14"/>
+          <p:cNvSpPr/>
+          <p:nvPr/>
+        </p:nvSpPr>
+        <p:spPr>
+          <a:xfrm>
+            <a:off x="457200" y="3246120"/>
+            <a:ext cx="1600200" cy="384048"/>
+          </a:xfrm>
+          <a:prstGeom prst="roundRect">
+            <a:avLst/>
+          </a:prstGeom>
+          <a:solidFill>
+            <a:srgbClr val="0D9488"/>
+          </a:solidFill>
+          <a:ln>
+            <a:noFill/>
+          </a:ln>
+          <a:effectLst/>
+        </p:spPr>
+        <p:style>
+          <a:lnRef idx="1">
+            <a:schemeClr val="accent1"/>
+          </a:lnRef>
+          <a:fillRef idx="3">
+            <a:schemeClr val="accent1"/>
+          </a:fillRef>
+          <a:effectRef idx="2">
+            <a:schemeClr val="accent1"/>
+          </a:effectRef>
+          <a:fontRef idx="minor">
+            <a:schemeClr val="lt1"/>
+          </a:fontRef>
+        </p:style>
+        <p:txBody>
+          <a:bodyPr rtlCol="0" anchor="ctr"/>
+          <a:lstStyle/>
+          <a:p>
+            <a:pPr algn="ctr"/>
+          </a:p>
+        </p:txBody>
+      </p:sp>
+      <p:sp>
+        <p:nvSpPr>
+          <p:cNvPr id="16" name="TextBox 15"/>
+          <p:cNvSpPr txBox="1"/>
+          <p:nvPr/>
+        </p:nvSpPr>
+        <p:spPr>
+          <a:xfrm>
+            <a:off x="457200" y="3246120"/>
+            <a:ext cx="1600200" cy="384048"/>
+          </a:xfrm>
+          <a:prstGeom prst="rect">
+            <a:avLst/>
+          </a:prstGeom>
+          <a:noFill/>
+        </p:spPr>
+        <p:txBody>
+          <a:bodyPr wrap="square" anchor="ctr">
+            <a:spAutoFit/>
+          </a:bodyPr>
+          <a:lstStyle/>
+          <a:p>
+            <a:pPr algn="ctr">
+              <a:lnSpc>
+                <a:spcPct val="100000"/>
+              </a:lnSpc>
+            </a:pPr>
+            <a:r>
+              <a:rPr sz="850" b="1">
+                <a:solidFill>
+                  <a:srgbClr val="FFFFFF"/>
+                </a:solidFill>
+                <a:latin typeface="Malgun Gothic"/>
+              </a:rPr>
+              <a:t>오전</a:t>
+            </a:r>
+          </a:p>
+        </p:txBody>
+      </p:sp>
+      <p:sp>
+        <p:nvSpPr>
+          <p:cNvPr id="17" name="TextBox 16"/>
+          <p:cNvSpPr txBox="1"/>
+          <p:nvPr/>
+        </p:nvSpPr>
+        <p:spPr>
+          <a:xfrm>
+            <a:off x="2148840" y="3227832"/>
+            <a:ext cx="4114800" cy="420624"/>
+          </a:xfrm>
+          <a:prstGeom prst="rect">
+            <a:avLst/>
+          </a:prstGeom>
+          <a:noFill/>
+        </p:spPr>
+        <p:txBody>
+          <a:bodyPr wrap="square" anchor="ctr">
+            <a:spAutoFit/>
+          </a:bodyPr>
+          <a:lstStyle/>
+          <a:p>
+            <a:pPr algn="l">
+              <a:lnSpc>
+                <a:spcPct val="100000"/>
+              </a:lnSpc>
+            </a:pPr>
+            <a:r>
+              <a:rPr sz="850" b="0">
+                <a:solidFill>
+                  <a:srgbClr val="334155"/>
+                </a:solidFill>
+                <a:latin typeface="Malgun Gothic"/>
+              </a:rPr>
+              <a:t>대리점별 성과·수납 점검, 미납·환불 확인</a:t>
+            </a:r>
+          </a:p>
+        </p:txBody>
+      </p:sp>
+      <p:sp>
+        <p:nvSpPr>
+          <p:cNvPr id="18" name="Rounded Rectangle 17"/>
+          <p:cNvSpPr/>
+          <p:nvPr/>
+        </p:nvSpPr>
+        <p:spPr>
+          <a:xfrm>
+            <a:off x="457200" y="3703320"/>
+            <a:ext cx="1600200" cy="384048"/>
+          </a:xfrm>
+          <a:prstGeom prst="roundRect">
+            <a:avLst/>
+          </a:prstGeom>
+          <a:solidFill>
+            <a:srgbClr val="0D9488"/>
+          </a:solidFill>
+          <a:ln>
+            <a:noFill/>
+          </a:ln>
+          <a:effectLst/>
+        </p:spPr>
+        <p:style>
+          <a:lnRef idx="1">
+            <a:schemeClr val="accent1"/>
+          </a:lnRef>
+          <a:fillRef idx="3">
+            <a:schemeClr val="accent1"/>
+          </a:fillRef>
+          <a:effectRef idx="2">
+            <a:schemeClr val="accent1"/>
+          </a:effectRef>
+          <a:fontRef idx="minor">
+            <a:schemeClr val="lt1"/>
+          </a:fontRef>
+        </p:style>
+        <p:txBody>
+          <a:bodyPr rtlCol="0" anchor="ctr"/>
+          <a:lstStyle/>
+          <a:p>
+            <a:pPr algn="ctr"/>
+          </a:p>
+        </p:txBody>
+      </p:sp>
+      <p:sp>
+        <p:nvSpPr>
+          <p:cNvPr id="19" name="TextBox 18"/>
+          <p:cNvSpPr txBox="1"/>
+          <p:nvPr/>
+        </p:nvSpPr>
+        <p:spPr>
+          <a:xfrm>
+            <a:off x="457200" y="3703320"/>
+            <a:ext cx="1600200" cy="384048"/>
+          </a:xfrm>
+          <a:prstGeom prst="rect">
+            <a:avLst/>
+          </a:prstGeom>
+          <a:noFill/>
+        </p:spPr>
+        <p:txBody>
+          <a:bodyPr wrap="square" anchor="ctr">
+            <a:spAutoFit/>
+          </a:bodyPr>
+          <a:lstStyle/>
+          <a:p>
+            <a:pPr algn="ctr">
+              <a:lnSpc>
+                <a:spcPct val="100000"/>
+              </a:lnSpc>
+            </a:pPr>
+            <a:r>
+              <a:rPr sz="850" b="1">
+                <a:solidFill>
+                  <a:srgbClr val="FFFFFF"/>
+                </a:solidFill>
+                <a:latin typeface="Malgun Gothic"/>
+              </a:rPr>
+              <a:t>오후</a:t>
+            </a:r>
+          </a:p>
+        </p:txBody>
+      </p:sp>
+      <p:sp>
+        <p:nvSpPr>
+          <p:cNvPr id="20" name="TextBox 19"/>
+          <p:cNvSpPr txBox="1"/>
+          <p:nvPr/>
+        </p:nvSpPr>
+        <p:spPr>
+          <a:xfrm>
+            <a:off x="2148840" y="3685032"/>
+            <a:ext cx="4114800" cy="420624"/>
+          </a:xfrm>
+          <a:prstGeom prst="rect">
+            <a:avLst/>
+          </a:prstGeom>
+          <a:noFill/>
+        </p:spPr>
+        <p:txBody>
+          <a:bodyPr wrap="square" anchor="ctr">
+            <a:spAutoFit/>
+          </a:bodyPr>
+          <a:lstStyle/>
+          <a:p>
+            <a:pPr algn="l">
+              <a:lnSpc>
+                <a:spcPct val="100000"/>
+              </a:lnSpc>
+            </a:pPr>
+            <a:r>
+              <a:rPr sz="850" b="0">
+                <a:solidFill>
+                  <a:srgbClr val="334155"/>
+                </a:solidFill>
+                <a:latin typeface="Malgun Gothic"/>
+              </a:rPr>
+              <a:t>부진 대리점 지원·코칭, 이탈위험 학생 케어(리텐션)</a:t>
+            </a:r>
+          </a:p>
+        </p:txBody>
+      </p:sp>
+      <p:sp>
+        <p:nvSpPr>
+          <p:cNvPr id="21" name="Rounded Rectangle 20"/>
+          <p:cNvSpPr/>
+          <p:nvPr/>
+        </p:nvSpPr>
+        <p:spPr>
+          <a:xfrm>
+            <a:off x="457200" y="4160520"/>
+            <a:ext cx="1600200" cy="384048"/>
+          </a:xfrm>
+          <a:prstGeom prst="roundRect">
+            <a:avLst/>
+          </a:prstGeom>
+          <a:solidFill>
+            <a:srgbClr val="0D9488"/>
+          </a:solidFill>
+          <a:ln>
+            <a:noFill/>
+          </a:ln>
+          <a:effectLst/>
+        </p:spPr>
+        <p:style>
+          <a:lnRef idx="1">
+            <a:schemeClr val="accent1"/>
+          </a:lnRef>
+          <a:fillRef idx="3">
+            <a:schemeClr val="accent1"/>
+          </a:fillRef>
+          <a:effectRef idx="2">
+            <a:schemeClr val="accent1"/>
+          </a:effectRef>
+          <a:fontRef idx="minor">
+            <a:schemeClr val="lt1"/>
+          </a:fontRef>
+        </p:style>
+        <p:txBody>
+          <a:bodyPr rtlCol="0" anchor="ctr"/>
+          <a:lstStyle/>
+          <a:p>
+            <a:pPr algn="ctr"/>
+          </a:p>
+        </p:txBody>
+      </p:sp>
+      <p:sp>
+        <p:nvSpPr>
+          <p:cNvPr id="22" name="TextBox 21"/>
+          <p:cNvSpPr txBox="1"/>
+          <p:nvPr/>
+        </p:nvSpPr>
+        <p:spPr>
+          <a:xfrm>
+            <a:off x="457200" y="4160520"/>
+            <a:ext cx="1600200" cy="384048"/>
+          </a:xfrm>
+          <a:prstGeom prst="rect">
+            <a:avLst/>
+          </a:prstGeom>
+          <a:noFill/>
+        </p:spPr>
+        <p:txBody>
+          <a:bodyPr wrap="square" anchor="ctr">
+            <a:spAutoFit/>
+          </a:bodyPr>
+          <a:lstStyle/>
+          <a:p>
+            <a:pPr algn="ctr">
+              <a:lnSpc>
+                <a:spcPct val="100000"/>
+              </a:lnSpc>
+            </a:pPr>
+            <a:r>
+              <a:rPr sz="850" b="1">
+                <a:solidFill>
+                  <a:srgbClr val="FFFFFF"/>
+                </a:solidFill>
+                <a:latin typeface="Malgun Gothic"/>
+              </a:rPr>
+              <a:t>주간</a:t>
+            </a:r>
+          </a:p>
+        </p:txBody>
+      </p:sp>
+      <p:sp>
+        <p:nvSpPr>
+          <p:cNvPr id="23" name="TextBox 22"/>
+          <p:cNvSpPr txBox="1"/>
+          <p:nvPr/>
+        </p:nvSpPr>
+        <p:spPr>
+          <a:xfrm>
+            <a:off x="2148840" y="4142232"/>
+            <a:ext cx="4114800" cy="420624"/>
+          </a:xfrm>
+          <a:prstGeom prst="rect">
+            <a:avLst/>
+          </a:prstGeom>
+          <a:noFill/>
+        </p:spPr>
+        <p:txBody>
+          <a:bodyPr wrap="square" anchor="ctr">
+            <a:spAutoFit/>
+          </a:bodyPr>
+          <a:lstStyle/>
+          <a:p>
+            <a:pPr algn="l">
+              <a:lnSpc>
+                <a:spcPct val="100000"/>
+              </a:lnSpc>
+            </a:pPr>
+            <a:r>
+              <a:rPr sz="850" b="0">
+                <a:solidFill>
+                  <a:srgbClr val="334155"/>
+                </a:solidFill>
+                <a:latin typeface="Malgun Gothic"/>
+              </a:rPr>
+              <a:t>신규 대리점 온보딩, 우수 사례 공유</a:t>
+            </a:r>
+          </a:p>
+        </p:txBody>
+      </p:sp>
+      <p:sp>
+        <p:nvSpPr>
+          <p:cNvPr id="24" name="Rounded Rectangle 23"/>
+          <p:cNvSpPr/>
+          <p:nvPr/>
+        </p:nvSpPr>
+        <p:spPr>
+          <a:xfrm>
+            <a:off x="457200" y="4617720"/>
+            <a:ext cx="1600200" cy="384048"/>
+          </a:xfrm>
+          <a:prstGeom prst="roundRect">
+            <a:avLst/>
+          </a:prstGeom>
+          <a:solidFill>
+            <a:srgbClr val="0D9488"/>
+          </a:solidFill>
+          <a:ln>
+            <a:noFill/>
+          </a:ln>
+          <a:effectLst/>
+        </p:spPr>
+        <p:style>
+          <a:lnRef idx="1">
+            <a:schemeClr val="accent1"/>
+          </a:lnRef>
+          <a:fillRef idx="3">
+            <a:schemeClr val="accent1"/>
+          </a:fillRef>
+          <a:effectRef idx="2">
+            <a:schemeClr val="accent1"/>
+          </a:effectRef>
+          <a:fontRef idx="minor">
+            <a:schemeClr val="lt1"/>
+          </a:fontRef>
+        </p:style>
+        <p:txBody>
+          <a:bodyPr rtlCol="0" anchor="ctr"/>
+          <a:lstStyle/>
+          <a:p>
+            <a:pPr algn="ctr"/>
+          </a:p>
+        </p:txBody>
+      </p:sp>
+      <p:sp>
+        <p:nvSpPr>
+          <p:cNvPr id="25" name="TextBox 24"/>
+          <p:cNvSpPr txBox="1"/>
+          <p:nvPr/>
+        </p:nvSpPr>
+        <p:spPr>
+          <a:xfrm>
+            <a:off x="457200" y="4617720"/>
+            <a:ext cx="1600200" cy="384048"/>
+          </a:xfrm>
+          <a:prstGeom prst="rect">
+            <a:avLst/>
+          </a:prstGeom>
+          <a:noFill/>
+        </p:spPr>
+        <p:txBody>
+          <a:bodyPr wrap="square" anchor="ctr">
+            <a:spAutoFit/>
+          </a:bodyPr>
+          <a:lstStyle/>
+          <a:p>
+            <a:pPr algn="ctr">
+              <a:lnSpc>
+                <a:spcPct val="100000"/>
+              </a:lnSpc>
+            </a:pPr>
+            <a:r>
+              <a:rPr sz="850" b="1">
+                <a:solidFill>
+                  <a:srgbClr val="FFFFFF"/>
+                </a:solidFill>
+                <a:latin typeface="Malgun Gothic"/>
+              </a:rPr>
+              <a:t>월간</a:t>
+            </a:r>
+          </a:p>
+        </p:txBody>
+      </p:sp>
+      <p:sp>
+        <p:nvSpPr>
+          <p:cNvPr id="26" name="TextBox 25"/>
+          <p:cNvSpPr txBox="1"/>
+          <p:nvPr/>
+        </p:nvSpPr>
+        <p:spPr>
+          <a:xfrm>
+            <a:off x="2148840" y="4599432"/>
+            <a:ext cx="4114800" cy="420624"/>
+          </a:xfrm>
+          <a:prstGeom prst="rect">
+            <a:avLst/>
+          </a:prstGeom>
+          <a:noFill/>
+        </p:spPr>
+        <p:txBody>
+          <a:bodyPr wrap="square" anchor="ctr">
+            <a:spAutoFit/>
+          </a:bodyPr>
+          <a:lstStyle/>
+          <a:p>
+            <a:pPr algn="l">
+              <a:lnSpc>
+                <a:spcPct val="100000"/>
+              </a:lnSpc>
+            </a:pPr>
+            <a:r>
+              <a:rPr sz="850" b="0">
+                <a:solidFill>
+                  <a:srgbClr val="334155"/>
+                </a:solidFill>
+                <a:latin typeface="Malgun Gothic"/>
+              </a:rPr>
+              <a:t>본사→지사→대리점 정산 확인·배포, 월간 리포트 공유</a:t>
+            </a:r>
+          </a:p>
+        </p:txBody>
+      </p:sp>
+      <p:sp>
+        <p:nvSpPr>
+          <p:cNvPr id="27" name="TextBox 26"/>
+          <p:cNvSpPr txBox="1"/>
+          <p:nvPr/>
+        </p:nvSpPr>
+        <p:spPr>
+          <a:xfrm>
+            <a:off x="6400800" y="2423160"/>
+            <a:ext cx="5486400" cy="320040"/>
+          </a:xfrm>
+          <a:prstGeom prst="rect">
+            <a:avLst/>
+          </a:prstGeom>
+          <a:noFill/>
+        </p:spPr>
+        <p:txBody>
+          <a:bodyPr wrap="square" anchor="t">
+            <a:spAutoFit/>
+          </a:bodyPr>
+          <a:lstStyle/>
+          <a:p>
+            <a:pPr algn="l">
+              <a:lnSpc>
+                <a:spcPct val="100000"/>
+              </a:lnSpc>
+            </a:pPr>
+            <a:r>
+              <a:rPr sz="1350" b="1">
+                <a:solidFill>
+                  <a:srgbClr val="0D9488"/>
+                </a:solidFill>
+                <a:latin typeface="Malgun Gothic"/>
+              </a:rPr>
+              <a:t>⭐ 핵심 원칙</a:t>
+            </a:r>
+          </a:p>
+        </p:txBody>
+      </p:sp>
+      <p:sp>
+        <p:nvSpPr>
+          <p:cNvPr id="28" name="TextBox 27"/>
+          <p:cNvSpPr txBox="1"/>
+          <p:nvPr/>
+        </p:nvSpPr>
+        <p:spPr>
+          <a:xfrm>
+            <a:off x="6400800" y="2788920"/>
+            <a:ext cx="5394960" cy="2103120"/>
+          </a:xfrm>
+          <a:prstGeom prst="rect">
+            <a:avLst/>
+          </a:prstGeom>
+          <a:noFill/>
+        </p:spPr>
+        <p:txBody>
+          <a:bodyPr wrap="square">
+            <a:spAutoFit/>
+          </a:bodyPr>
+          <a:lstStyle/>
+          <a:p>
+            <a:pPr>
+              <a:lnSpc>
+                <a:spcPct val="115000"/>
+              </a:lnSpc>
+              <a:spcAft>
+                <a:spcPts val="500"/>
+              </a:spcAft>
+            </a:pPr>
+            <a:r>
+              <a:rPr sz="900" b="1">
+                <a:solidFill>
+                  <a:srgbClr val="0D9488"/>
+                </a:solidFill>
+                <a:latin typeface="Malgun Gothic"/>
+              </a:rPr>
+              <a:t>● </a:t>
+            </a:r>
+            <a:r>
+              <a:rPr sz="1100">
+                <a:solidFill>
+                  <a:srgbClr val="334155"/>
+                </a:solidFill>
+                <a:latin typeface="Malgun Gothic"/>
+              </a:rPr>
+              <a:t>지표는 매일 아침 5분 — 지사·대리점 이상 신호를 빨리 잡아요.</a:t>
+            </a:r>
+          </a:p>
+          <a:p>
+            <a:pPr>
+              <a:lnSpc>
+                <a:spcPct val="115000"/>
+              </a:lnSpc>
+              <a:spcAft>
+                <a:spcPts val="500"/>
+              </a:spcAft>
+            </a:pPr>
+            <a:r>
+              <a:rPr sz="900" b="1">
+                <a:solidFill>
+                  <a:srgbClr val="0D9488"/>
+                </a:solidFill>
+                <a:latin typeface="Malgun Gothic"/>
+              </a:rPr>
+              <a:t>● </a:t>
+            </a:r>
+            <a:r>
+              <a:rPr sz="1100">
+                <a:solidFill>
+                  <a:srgbClr val="334155"/>
+                </a:solidFill>
+                <a:latin typeface="Malgun Gothic"/>
+              </a:rPr>
+              <a:t>대리점을 파트너로 — 성과 편차를 코칭·지원으로 좁혀요.</a:t>
+            </a:r>
+          </a:p>
+          <a:p>
+            <a:pPr>
+              <a:lnSpc>
+                <a:spcPct val="115000"/>
+              </a:lnSpc>
+              <a:spcAft>
+                <a:spcPts val="500"/>
+              </a:spcAft>
+            </a:pPr>
+            <a:r>
+              <a:rPr sz="900" b="1">
+                <a:solidFill>
+                  <a:srgbClr val="0D9488"/>
+                </a:solidFill>
+                <a:latin typeface="Malgun Gothic"/>
+              </a:rPr>
+              <a:t>● </a:t>
+            </a:r>
+            <a:r>
+              <a:rPr sz="1100">
+                <a:solidFill>
+                  <a:srgbClr val="334155"/>
+                </a:solidFill>
+                <a:latin typeface="Malgun Gothic"/>
+              </a:rPr>
+              <a:t>정산은 투명하게 — 기준을 미리 공지하면 신뢰가 쌓여요.</a:t>
+            </a:r>
+          </a:p>
+          <a:p>
+            <a:pPr>
+              <a:lnSpc>
+                <a:spcPct val="115000"/>
+              </a:lnSpc>
+              <a:spcAft>
+                <a:spcPts val="500"/>
+              </a:spcAft>
+            </a:pPr>
+            <a:r>
+              <a:rPr sz="900" b="1">
+                <a:solidFill>
+                  <a:srgbClr val="0D9488"/>
+                </a:solidFill>
+                <a:latin typeface="Malgun Gothic"/>
+              </a:rPr>
+              <a:t>● </a:t>
+            </a:r>
+            <a:r>
+              <a:rPr sz="1100">
+                <a:solidFill>
+                  <a:srgbClr val="334155"/>
+                </a:solidFill>
+                <a:latin typeface="Malgun Gothic"/>
+              </a:rPr>
+              <a:t>이탈은 조기 개입 — 위험 대리점·학생을 먼저 챙겨요.</a:t>
+            </a:r>
+          </a:p>
+          <a:p>
+            <a:pPr>
+              <a:lnSpc>
+                <a:spcPct val="115000"/>
+              </a:lnSpc>
+              <a:spcAft>
+                <a:spcPts val="500"/>
+              </a:spcAft>
+            </a:pPr>
+            <a:r>
+              <a:rPr sz="900" b="1">
+                <a:solidFill>
+                  <a:srgbClr val="0D9488"/>
+                </a:solidFill>
+                <a:latin typeface="Malgun Gothic"/>
+              </a:rPr>
+              <a:t>● </a:t>
+            </a:r>
+            <a:r>
+              <a:rPr sz="1100">
+                <a:solidFill>
+                  <a:srgbClr val="334155"/>
+                </a:solidFill>
+                <a:latin typeface="Malgun Gothic"/>
+              </a:rPr>
+              <a:t>우수 사례를 확산 — 잘하는 대리점 방식을 전체로 공유해요.</a:t>
+            </a:r>
+          </a:p>
+        </p:txBody>
+      </p:sp>
+      <p:sp>
+        <p:nvSpPr>
+          <p:cNvPr id="29" name="TextBox 28"/>
+          <p:cNvSpPr txBox="1"/>
+          <p:nvPr/>
+        </p:nvSpPr>
+        <p:spPr>
+          <a:xfrm>
+            <a:off x="6400800" y="4892040"/>
+            <a:ext cx="5486400" cy="320040"/>
+          </a:xfrm>
+          <a:prstGeom prst="rect">
+            <a:avLst/>
+          </a:prstGeom>
+          <a:noFill/>
+        </p:spPr>
+        <p:txBody>
+          <a:bodyPr wrap="square" anchor="t">
+            <a:spAutoFit/>
+          </a:bodyPr>
+          <a:lstStyle/>
+          <a:p>
+            <a:pPr algn="l">
+              <a:lnSpc>
+                <a:spcPct val="100000"/>
+              </a:lnSpc>
+            </a:pPr>
+            <a:r>
+              <a:rPr sz="1350" b="1">
+                <a:solidFill>
+                  <a:srgbClr val="0D9488"/>
+                </a:solidFill>
+                <a:latin typeface="Malgun Gothic"/>
+              </a:rPr>
+              <a:t>📌 꼭 기억하세요</a:t>
+            </a:r>
+          </a:p>
+        </p:txBody>
+      </p:sp>
+      <p:sp>
+        <p:nvSpPr>
+          <p:cNvPr id="30" name="TextBox 29"/>
+          <p:cNvSpPr txBox="1"/>
+          <p:nvPr/>
+        </p:nvSpPr>
+        <p:spPr>
+          <a:xfrm>
+            <a:off x="6400800" y="5257800"/>
+            <a:ext cx="5394960" cy="1645920"/>
+          </a:xfrm>
+          <a:prstGeom prst="rect">
+            <a:avLst/>
+          </a:prstGeom>
+          <a:noFill/>
+        </p:spPr>
+        <p:txBody>
+          <a:bodyPr wrap="square">
+            <a:spAutoFit/>
+          </a:bodyPr>
+          <a:lstStyle/>
+          <a:p>
+            <a:pPr>
+              <a:lnSpc>
+                <a:spcPct val="115000"/>
+              </a:lnSpc>
+              <a:spcAft>
+                <a:spcPts val="400"/>
+              </a:spcAft>
+            </a:pPr>
+            <a:r>
+              <a:rPr sz="850" b="1">
+                <a:solidFill>
+                  <a:srgbClr val="F59E0B"/>
+                </a:solidFill>
+                <a:latin typeface="Malgun Gothic"/>
+              </a:rPr>
+              <a:t>● </a:t>
+            </a:r>
+            <a:r>
+              <a:rPr sz="1050">
+                <a:solidFill>
+                  <a:srgbClr val="334155"/>
+                </a:solidFill>
+                <a:latin typeface="Malgun Gothic"/>
+              </a:rPr>
+              <a:t>접속은 admin.mangoi.co.kr, 데이터는 우리 지사 범위로 자동 한정돼요</a:t>
+            </a:r>
+          </a:p>
+          <a:p>
+            <a:pPr>
+              <a:lnSpc>
+                <a:spcPct val="115000"/>
+              </a:lnSpc>
+              <a:spcAft>
+                <a:spcPts val="400"/>
+              </a:spcAft>
+            </a:pPr>
+            <a:r>
+              <a:rPr sz="850" b="1">
+                <a:solidFill>
+                  <a:srgbClr val="F59E0B"/>
+                </a:solidFill>
+                <a:latin typeface="Malgun Gothic"/>
+              </a:rPr>
+              <a:t>● </a:t>
+            </a:r>
+            <a:r>
+              <a:rPr sz="1050">
+                <a:solidFill>
+                  <a:srgbClr val="334155"/>
+                </a:solidFill>
+                <a:latin typeface="Malgun Gothic"/>
+              </a:rPr>
+              <a:t>정산은 본사→지사→대리점 트리 구조로 자동 계산돼요</a:t>
+            </a:r>
+          </a:p>
+          <a:p>
+            <a:pPr>
+              <a:lnSpc>
+                <a:spcPct val="115000"/>
+              </a:lnSpc>
+              <a:spcAft>
+                <a:spcPts val="400"/>
+              </a:spcAft>
+            </a:pPr>
+            <a:r>
+              <a:rPr sz="850" b="1">
+                <a:solidFill>
+                  <a:srgbClr val="F59E0B"/>
+                </a:solidFill>
+                <a:latin typeface="Malgun Gothic"/>
+              </a:rPr>
+              <a:t>● </a:t>
+            </a:r>
+            <a:r>
+              <a:rPr sz="1050">
+                <a:solidFill>
+                  <a:srgbClr val="334155"/>
+                </a:solidFill>
+                <a:latin typeface="Malgun Gothic"/>
+              </a:rPr>
+              <a:t>‘입장 안 됨’ 등 현장 문의의 대부분은 브라우저·권한 문제예요</a:t>
+            </a:r>
+          </a:p>
+          <a:p>
+            <a:pPr>
+              <a:lnSpc>
+                <a:spcPct val="115000"/>
+              </a:lnSpc>
+              <a:spcAft>
+                <a:spcPts val="400"/>
+              </a:spcAft>
+            </a:pPr>
+            <a:r>
+              <a:rPr sz="850" b="1">
+                <a:solidFill>
+                  <a:srgbClr val="F59E0B"/>
+                </a:solidFill>
+                <a:latin typeface="Malgun Gothic"/>
+              </a:rPr>
+              <a:t>● </a:t>
+            </a:r>
+            <a:r>
+              <a:rPr sz="1050">
+                <a:solidFill>
+                  <a:srgbClr val="334155"/>
+                </a:solidFill>
+                <a:latin typeface="Malgun Gothic"/>
+              </a:rPr>
+              <a:t>운영 리듬은 ‘점검 → 지원 → 정산 → 리포트’!</a:t>
+            </a:r>
+          </a:p>
+        </p:txBody>
+      </p:sp>
+      <p:sp>
+        <p:nvSpPr>
+          <p:cNvPr id="31" name="Rounded Rectangle 30"/>
+          <p:cNvSpPr/>
+          <p:nvPr/>
+        </p:nvSpPr>
+        <p:spPr>
+          <a:xfrm>
+            <a:off x="457200" y="6172200"/>
+            <a:ext cx="11338560" cy="566928"/>
+          </a:xfrm>
+          <a:prstGeom prst="roundRect">
+            <a:avLst/>
+          </a:prstGeom>
+          <a:solidFill>
+            <a:srgbClr val="ECFDF5"/>
+          </a:solidFill>
+          <a:ln w="12700">
+            <a:solidFill>
+              <a:srgbClr val="F59E0B"/>
+            </a:solidFill>
+          </a:ln>
+          <a:effectLst/>
+        </p:spPr>
+        <p:style>
+          <a:lnRef idx="1">
+            <a:schemeClr val="accent1"/>
+          </a:lnRef>
+          <a:fillRef idx="3">
+            <a:schemeClr val="accent1"/>
+          </a:fillRef>
+          <a:effectRef idx="2">
+            <a:schemeClr val="accent1"/>
+          </a:effectRef>
+          <a:fontRef idx="minor">
+            <a:schemeClr val="lt1"/>
+          </a:fontRef>
+        </p:style>
+        <p:txBody>
+          <a:bodyPr rtlCol="0" anchor="ctr"/>
+          <a:lstStyle/>
+          <a:p>
+            <a:pPr algn="ctr"/>
+          </a:p>
+        </p:txBody>
+      </p:sp>
+      <p:sp>
+        <p:nvSpPr>
+          <p:cNvPr id="32" name="TextBox 31"/>
+          <p:cNvSpPr txBox="1"/>
+          <p:nvPr/>
+        </p:nvSpPr>
+        <p:spPr>
+          <a:xfrm>
+            <a:off x="640080" y="6208776"/>
+            <a:ext cx="10972800" cy="502920"/>
+          </a:xfrm>
+          <a:prstGeom prst="rect">
+            <a:avLst/>
+          </a:prstGeom>
+          <a:noFill/>
+        </p:spPr>
+        <p:txBody>
+          <a:bodyPr wrap="square" anchor="t">
+            <a:spAutoFit/>
+          </a:bodyPr>
+          <a:lstStyle/>
+          <a:p>
+            <a:pPr algn="l">
+              <a:lnSpc>
+                <a:spcPct val="102000"/>
+              </a:lnSpc>
+            </a:pPr>
+            <a:r>
+              <a:rPr sz="1000" b="0">
+                <a:solidFill>
+                  <a:srgbClr val="5B4A2A"/>
+                </a:solidFill>
+                <a:latin typeface="Malgun Gothic"/>
+              </a:rPr>
+              <a:t>🍊 좋은 지사는 대리점이 잘되게 돕는 지사예요. 지표로 상황을 읽고, 파트너를 지원하고, 정산을 투명하게 하면 지사와 대리점이 함께 성장합니다. 궁금한 점은 언제든 본사 고객센터로 — 든든한 지사 운영을 응원합니다! 🍊</a:t>
+            </a:r>
+          </a:p>
+        </p:txBody>
+      </p:sp>
+    </p:spTree>
+  </p:cSld>
+  <p:clrMapOvr>
+    <a:masterClrMapping/>
+  </p:clrMapOvr>
+</p:sld>
+</file>
+
+<file path=ppt/slides/slide32.xml><?xml version="1.0" encoding="utf-8"?>
 <p:sld xmlns:a="http://schemas.openxmlformats.org/drawingml/2006/main" xmlns:p="http://schemas.openxmlformats.org/presentationml/2006/main" xmlns:r="http://schemas.openxmlformats.org/officeDocument/2006/relationships">
   <p:cSld>
     <p:bg>
